--- a/SEVEN-G/pptx/en/SEVEN-G_Curso_Partner.pptx
+++ b/SEVEN-G/pptx/en/SEVEN-G_Curso_Partner.pptx
@@ -6006,7 +6006,7 @@
                   <a:srgbClr val="2F2B28"/>
                 </a:solidFill>
               </a:rPr>
-              <a:t>Keep the codes (G0–G7, P01–P71, T01–T22) or publish your equivalence: your clients will be able to check against the source.</a:t>
+              <a:t>Keep the codes (G0–G7, P01–P74, T01–T22) or publish your equivalence: your clients will be able to check against the source.</a:t>
             </a:r>
           </a:p>
           <a:p>
@@ -6294,7 +6294,7 @@
                   <a:srgbClr val="2F2B28"/>
                 </a:solidFill>
               </a:rPr>
-              <a:t>The 71 templates are generated in Word from Markdown: you can change styles and cover and regenerate them with your branding.</a:t>
+              <a:t>The 74 templates are generated in Word from Markdown: you can change styles and cover and regenerate them with your branding.</a:t>
             </a:r>
           </a:p>
           <a:p>

--- a/SEVEN-G/pptx/en/SEVEN-G_Curso_Partner.pptx
+++ b/SEVEN-G/pptx/en/SEVEN-G_Curso_Partner.pptx
@@ -7277,6 +7277,40 @@
           </a:p>
         </p:txBody>
       </p:sp>
+      <p:sp>
+        <p:nvSpPr>
+          <p:cNvPr id="258" name="Texto 258"/>
+          <p:cNvSpPr txBox="1"/>
+          <p:nvPr/>
+        </p:nvSpPr>
+        <p:spPr>
+          <a:xfrm>
+            <a:off x="609600" y="5550000"/>
+            <a:ext cx="10972800" cy="1000000"/>
+          </a:xfrm>
+          <a:prstGeom prst="rect">
+            <a:avLst/>
+          </a:prstGeom>
+          <a:noFill/>
+        </p:spPr>
+        <p:txBody>
+          <a:bodyPr wrap="square" anchor="t" lIns="45720" rIns="45720">
+            <a:noAutofit/>
+          </a:bodyPr>
+          <a:lstStyle/>
+          <a:p>
+            <a:pPr algn="ctr"/>
+            <a:r>
+              <a:rPr lang="es-ES" sz="1000" dirty="0">
+                <a:solidFill>
+                  <a:srgbClr val="564D47"/>
+                </a:solidFill>
+              </a:rPr>
+              <a:t>Legal notice: a generic, free methodological aid provided "as is" for information purposes; it is not legal advice and has not been legally reviewed for any case. Each organisation adapts it and is responsible for its legal review and its regulatory compliance; it may not reflect recent regulatory changes. To the fullest extent permitted by law, the author accepts no liability whatsoever for the effects of its application. It does not grant certification of any kind. Details in document 93.</a:t>
+            </a:r>
+          </a:p>
+        </p:txBody>
+      </p:sp>
     </p:spTree>
   </p:cSld>
   <p:clrMapOvr>

--- a/SEVEN-G/pptx/en/SEVEN-G_Curso_Partner.pptx
+++ b/SEVEN-G/pptx/en/SEVEN-G_Curso_Partner.pptx
@@ -31,6 +31,7 @@
     <p:sldId id="279" r:id="rIdS24"/>
     <p:sldId id="280" r:id="rIdS25"/>
     <p:sldId id="281" r:id="rIdS26"/>
+    <p:sldId id="282" r:id="rIdS27"/>
   </p:sldIdLst>
   <p:sldSz cx="12192000" cy="6858000" type="screen16x9"/>
   <p:notesSz cx="6858000" cy="9144000"/>
@@ -1125,7 +1126,7 @@
       </p:sp>
       <p:pic>
         <p:nvPicPr>
-          <p:cNvPr id="124" name="Imagen 124" descr="Board dashboard with the portfolio and value cards"/>
+          <p:cNvPr id="124" name="Imagen 124" descr="Board dashboard: portfolio and value cards and the «What holds back scaling» reading"/>
           <p:cNvPicPr>
             <a:picLocks noChangeAspect="1"/>
           </p:cNvPicPr>
@@ -1190,7 +1191,7 @@
                   <a:srgbClr val="2F2B28"/>
                 </a:solidFill>
               </a:rPr>
-              <a:t>15 cases: how many are in use, in development, in proof of concept, proposed and out.</a:t>
+              <a:t>At the top, the figures: 15 cases, costs of €2.4M a year, total return of €7.3M and annual net of €4.8M. Each figure can be clicked to open its cases.</a:t>
             </a:r>
           </a:p>
           <a:p>
@@ -1210,7 +1211,7 @@
                   <a:srgbClr val="2F2B28"/>
                 </a:solidFill>
               </a:rPr>
-              <a:t>Costs of €2.4M a year and total return of €7.3M (efficiencies plus return): annual net is €4.8M.</a:t>
+              <a:t>The yellow card is the one that matters: only 36% of the value is validated by finance. In red: only 3 of 15 cases have all the controls.</a:t>
             </a:r>
           </a:p>
           <a:p>
@@ -1230,7 +1231,7 @@
                   <a:srgbClr val="2F2B28"/>
                 </a:solidFill>
               </a:rPr>
-              <a:t>The yellow card is the one that matters: only 36% of the value is validated by finance. The rest is declared or estimated.</a:t>
+              <a:t>Below, «What holds back scaling»: the three barriers to start with, with what they block, what to do, who and the value at stake (document 60 §10.4).</a:t>
             </a:r>
           </a:p>
           <a:p>
@@ -1250,7 +1251,7 @@
                   <a:srgbClr val="2F2B28"/>
                 </a:solidFill>
               </a:rPr>
-              <a:t>Released capacity that has not been materialised is shown separately and does not add up.</a:t>
+              <a:t>In the example: first risk and compliance (blocks G5), then unvalidated value (blocks G7 · Scale) and cases that do not move forward.</a:t>
             </a:r>
           </a:p>
           <a:p>
@@ -1270,9 +1271,254 @@
                   <a:srgbClr val="2F2B28"/>
                 </a:solidFill>
               </a:rPr>
-              <a:t>In red: only 3 of 15 cases have all the controls (impact assessments, security, user manual).</a:t>
-            </a:r>
-          </a:p>
+              <a:t>The value at stake ranks, it does not promise: it is declared, not validated.</a:t>
+            </a:r>
+          </a:p>
+        </p:txBody>
+      </p:sp>
+      <p:sp>
+        <p:nvSpPr>
+          <p:cNvPr id="126" name="Texto 126"/>
+          <p:cNvSpPr txBox="1"/>
+          <p:nvPr/>
+        </p:nvSpPr>
+        <p:spPr>
+          <a:xfrm>
+            <a:off x="609600" y="6260000"/>
+            <a:ext cx="10972800" cy="450000"/>
+          </a:xfrm>
+          <a:prstGeom prst="rect">
+            <a:avLst/>
+          </a:prstGeom>
+          <a:noFill/>
+        </p:spPr>
+        <p:txBody>
+          <a:bodyPr wrap="square" anchor="t" lIns="45720" rIns="45720">
+            <a:noAutofit/>
+          </a:bodyPr>
+          <a:lstStyle/>
+          <a:p>
+            <a:pPr algn="l"/>
+            <a:r>
+              <a:rPr lang="es-ES" sz="1300" b="1" dirty="0">
+                <a:solidFill>
+                  <a:srgbClr val="0F5499"/>
+                </a:solidFill>
+              </a:rPr>
+              <a:t>If a figure on the dashboard looks wrong, the dashboard is not touched: the evidence is fixed in the register and it is generated again.</a:t>
+            </a:r>
+          </a:p>
+        </p:txBody>
+      </p:sp>
+    </p:spTree>
+  </p:cSld>
+  <p:clrMapOvr>
+    <a:overrideClrMapping bg1="lt1" tx1="dk1" bg2="lt2" tx2="dk2" accent1="accent1" accent2="accent2" accent3="accent3" accent4="accent4" accent5="accent5" accent6="accent6" hlink="hlink" folHlink="folHlink"/>
+  </p:clrMapOvr>
+</p:sld>
+</file>
+
+<file path=ppt/slides/slide13.xml><?xml version="1.0" encoding="utf-8"?>
+<p:sld xmlns:a="http://schemas.openxmlformats.org/drawingml/2006/main" xmlns:r="http://schemas.openxmlformats.org/officeDocument/2006/relationships" xmlns:p="http://schemas.openxmlformats.org/presentationml/2006/main">
+  <p:cSld>
+    <p:bg>
+      <p:bgPr>
+        <a:solidFill>
+          <a:srgbClr val="FBE2CD"/>
+        </a:solidFill>
+        <a:effectLst/>
+      </p:bgPr>
+    </p:bg>
+    <p:spTree>
+      <p:nvGrpSpPr>
+        <p:cNvPr id="1" name=""/>
+        <p:cNvGrpSpPr/>
+        <p:nvPr/>
+      </p:nvGrpSpPr>
+      <p:grpSpPr>
+        <a:xfrm>
+          <a:off x="0" y="0"/>
+          <a:ext cx="0" cy="0"/>
+          <a:chOff x="0" y="0"/>
+          <a:chExt cx="0" cy="0"/>
+        </a:xfrm>
+      </p:grpSpPr>
+      <p:sp>
+        <p:nvSpPr>
+          <p:cNvPr id="134" name="Marca"/>
+          <p:cNvSpPr/>
+          <p:nvPr/>
+        </p:nvSpPr>
+        <p:spPr>
+          <a:xfrm>
+            <a:off x="609600" y="365760"/>
+            <a:ext cx="182880" cy="182880"/>
+          </a:xfrm>
+          <a:prstGeom prst="rect">
+            <a:avLst/>
+          </a:prstGeom>
+          <a:solidFill>
+            <a:srgbClr val="990F3D"/>
+          </a:solidFill>
+        </p:spPr>
+        <p:txBody>
+          <a:bodyPr/>
+          <a:lstStyle/>
+          <a:p/>
+        </p:txBody>
+      </p:sp>
+      <p:sp>
+        <p:nvSpPr>
+          <p:cNvPr id="135" name="Texto 135"/>
+          <p:cNvSpPr txBox="1"/>
+          <p:nvPr/>
+        </p:nvSpPr>
+        <p:spPr>
+          <a:xfrm>
+            <a:off x="838200" y="300000"/>
+            <a:ext cx="10500000" cy="320000"/>
+          </a:xfrm>
+          <a:prstGeom prst="rect">
+            <a:avLst/>
+          </a:prstGeom>
+          <a:noFill/>
+        </p:spPr>
+        <p:txBody>
+          <a:bodyPr wrap="square" anchor="ctr" lIns="45720" rIns="45720">
+            <a:noAutofit/>
+          </a:bodyPr>
+          <a:lstStyle/>
+          <a:p>
+            <a:pPr algn="l"/>
+            <a:r>
+              <a:rPr lang="es-ES" sz="1400" b="1" dirty="0">
+                <a:solidFill>
+                  <a:srgbClr val="1A1817"/>
+                </a:solidFill>
+              </a:rPr>
+              <a:t>SEVEN-G · COURSE · PARTNER · BUILDING IT INTO YOUR METHODOLOGY</a:t>
+            </a:r>
+          </a:p>
+        </p:txBody>
+      </p:sp>
+      <p:sp>
+        <p:nvSpPr>
+          <p:cNvPr id="136" name="Texto 136"/>
+          <p:cNvSpPr txBox="1"/>
+          <p:nvPr/>
+        </p:nvSpPr>
+        <p:spPr>
+          <a:xfrm>
+            <a:off x="609600" y="700000"/>
+            <a:ext cx="10972800" cy="650000"/>
+          </a:xfrm>
+          <a:prstGeom prst="rect">
+            <a:avLst/>
+          </a:prstGeom>
+          <a:noFill/>
+        </p:spPr>
+        <p:txBody>
+          <a:bodyPr wrap="square" anchor="t" lIns="45720" rIns="45720">
+            <a:noAutofit/>
+          </a:bodyPr>
+          <a:lstStyle/>
+          <a:p>
+            <a:pPr algn="l"/>
+            <a:r>
+              <a:rPr lang="es-ES" sz="2700" b="1" dirty="0">
+                <a:solidFill>
+                  <a:srgbClr val="990F3D"/>
+                </a:solidFill>
+              </a:rPr>
+              <a:t>Where the impact is: spheres × ambition</a:t>
+            </a:r>
+          </a:p>
+        </p:txBody>
+      </p:sp>
+      <p:sp>
+        <p:nvSpPr>
+          <p:cNvPr id="137" name="Texto 137"/>
+          <p:cNvSpPr txBox="1"/>
+          <p:nvPr/>
+        </p:nvSpPr>
+        <p:spPr>
+          <a:xfrm>
+            <a:off x="609600" y="1330000"/>
+            <a:ext cx="10972800" cy="450000"/>
+          </a:xfrm>
+          <a:prstGeom prst="rect">
+            <a:avLst/>
+          </a:prstGeom>
+          <a:noFill/>
+        </p:spPr>
+        <p:txBody>
+          <a:bodyPr wrap="square" anchor="t" lIns="45720" rIns="45720">
+            <a:noAutofit/>
+          </a:bodyPr>
+          <a:lstStyle/>
+          <a:p>
+            <a:pPr algn="l"/>
+            <a:r>
+              <a:rPr lang="es-ES" sz="1500" dirty="0">
+                <a:solidFill>
+                  <a:srgbClr val="564D47"/>
+                </a:solidFill>
+              </a:rPr>
+              <a:t>The portfolio heat map (T16) in the same dashboard. Fictitious data</a:t>
+            </a:r>
+          </a:p>
+        </p:txBody>
+      </p:sp>
+      <p:pic>
+        <p:nvPicPr>
+          <p:cNvPr id="131" name="Imagen 131" descr="Heat map of spheres by ambition level with cases, investment, net and gaps"/>
+          <p:cNvPicPr>
+            <a:picLocks noChangeAspect="1"/>
+          </p:cNvPicPr>
+          <p:nvPr/>
+        </p:nvPicPr>
+        <p:blipFill>
+          <a:blip r:embed="rIdImg_impacto"/>
+          <a:stretch>
+            <a:fillRect/>
+          </a:stretch>
+        </p:blipFill>
+        <p:spPr>
+          <a:xfrm>
+            <a:off x="609600" y="1900000"/>
+            <a:ext cx="6700000" cy="4243333"/>
+          </a:xfrm>
+          <a:prstGeom prst="rect">
+            <a:avLst/>
+          </a:prstGeom>
+          <a:ln w="12700">
+            <a:solidFill>
+              <a:srgbClr val="C9A78D"/>
+            </a:solidFill>
+          </a:ln>
+        </p:spPr>
+      </p:pic>
+      <p:sp>
+        <p:nvSpPr>
+          <p:cNvPr id="132" name="Texto 132"/>
+          <p:cNvSpPr txBox="1"/>
+          <p:nvPr/>
+        </p:nvSpPr>
+        <p:spPr>
+          <a:xfrm>
+            <a:off x="7509600" y="1850000"/>
+            <a:ext cx="4072800" cy="4400000"/>
+          </a:xfrm>
+          <a:prstGeom prst="rect">
+            <a:avLst/>
+          </a:prstGeom>
+          <a:noFill/>
+        </p:spPr>
+        <p:txBody>
+          <a:bodyPr wrap="square" anchor="t" lIns="45720" rIns="45720">
+            <a:noAutofit/>
+          </a:bodyPr>
+          <a:lstStyle/>
           <a:p>
             <a:pPr marL="285750" indent="-285750">
               <a:spcAft>
@@ -1290,14 +1536,94 @@
                   <a:srgbClr val="2F2B28"/>
                 </a:solidFill>
               </a:rPr>
-              <a:t>Other pages: funnel and lifecycle, history and adoption, risk and compliance, inventory.</a:t>
-            </a:r>
-          </a:p>
-        </p:txBody>
-      </p:sp>
-      <p:sp>
-        <p:nvSpPr>
-          <p:cNvPr id="126" name="Texto 126"/>
+              <a:t>Rows: the areas where AI creates value (customer, product, people, operations, data, knowledge, decision). Columns: optimise, augment, transform.</a:t>
+            </a:r>
+          </a:p>
+          <a:p>
+            <a:pPr marL="285750" indent="-285750">
+              <a:spcAft>
+                <a:spcPts val="400"/>
+              </a:spcAft>
+              <a:buClr>
+                <a:srgbClr val="990F3D"/>
+              </a:buClr>
+              <a:buFont typeface="Arial"/>
+              <a:buChar char="•"/>
+            </a:pPr>
+            <a:r>
+              <a:rPr lang="es-ES" sz="1300" dirty="0">
+                <a:solidFill>
+                  <a:srgbClr val="2F2B28"/>
+                </a:solidFill>
+              </a:rPr>
+              <a:t>Each cell: cases, investment and cost, annual net and validated value; the colour shows where spending is concentrated.</a:t>
+            </a:r>
+          </a:p>
+          <a:p>
+            <a:pPr marL="285750" indent="-285750">
+              <a:spcAft>
+                <a:spcPts val="400"/>
+              </a:spcAft>
+              <a:buClr>
+                <a:srgbClr val="990F3D"/>
+              </a:buClr>
+              <a:buFont typeface="Arial"/>
+              <a:buChar char="•"/>
+            </a:pPr>
+            <a:r>
+              <a:rPr lang="es-ES" sz="1300" dirty="0">
+                <a:solidFill>
+                  <a:srgbClr val="2F2B28"/>
+                </a:solidFill>
+              </a:rPr>
+              <a:t>«Gap»: the ambition management approved in C2 for that sphere has no case that has passed G2.</a:t>
+            </a:r>
+          </a:p>
+          <a:p>
+            <a:pPr marL="285750" indent="-285750">
+              <a:spcAft>
+                <a:spcPts val="400"/>
+              </a:spcAft>
+              <a:buClr>
+                <a:srgbClr val="990F3D"/>
+              </a:buClr>
+              <a:buFont typeface="Arial"/>
+              <a:buChar char="•"/>
+            </a:pPr>
+            <a:r>
+              <a:rPr lang="es-ES" sz="1300" dirty="0">
+                <a:solidFill>
+                  <a:srgbClr val="2F2B28"/>
+                </a:solidFill>
+              </a:rPr>
+              <a:t>In the example: 40% of spending is in Customer, Data has no activity and five spheres have a gap.</a:t>
+            </a:r>
+          </a:p>
+          <a:p>
+            <a:pPr marL="285750" indent="-285750">
+              <a:spcAft>
+                <a:spcPts val="400"/>
+              </a:spcAft>
+              <a:buClr>
+                <a:srgbClr val="990F3D"/>
+              </a:buClr>
+              <a:buFont typeface="Arial"/>
+              <a:buChar char="•"/>
+            </a:pPr>
+            <a:r>
+              <a:rPr lang="es-ES" sz="1300" dirty="0">
+                <a:solidFill>
+                  <a:srgbClr val="2F2B28"/>
+                </a:solidFill>
+              </a:rPr>
+              <a:t>The target ambition comes from the thesis approved in the register; it is not written in the dashboard.</a:t>
+            </a:r>
+          </a:p>
+        </p:txBody>
+      </p:sp>
+      <p:sp>
+        <p:nvSpPr>
+          <p:cNvPr id="133" name="Texto 133"/>
           <p:cNvSpPr txBox="1"/>
           <p:nvPr/>
         </p:nvSpPr>
@@ -1324,7 +1650,7 @@
                   <a:srgbClr val="0F5499"/>
                 </a:solidFill>
               </a:rPr>
-              <a:t>If a figure on the dashboard looks wrong, the dashboard is not touched: the evidence is fixed in the register and it is generated again.</a:t>
+              <a:t>The question it answers: where does AI have most impact in the company and where are we not playing? (document 10 §8)</a:t>
             </a:r>
           </a:p>
         </p:txBody>
@@ -1337,7 +1663,7 @@
 </p:sld>
 </file>
 
-<file path=ppt/slides/slide13.xml><?xml version="1.0" encoding="utf-8"?>
+<file path=ppt/slides/slide14.xml><?xml version="1.0" encoding="utf-8"?>
 <p:sld xmlns:a="http://schemas.openxmlformats.org/drawingml/2006/main" xmlns:r="http://schemas.openxmlformats.org/officeDocument/2006/relationships" xmlns:p="http://schemas.openxmlformats.org/presentationml/2006/main">
   <p:cSld>
     <p:bg>
@@ -1364,7 +1690,7 @@
       </p:grpSpPr>
       <p:sp>
         <p:nvSpPr>
-          <p:cNvPr id="131" name="Marca"/>
+          <p:cNvPr id="138" name="Marca"/>
           <p:cNvSpPr/>
           <p:nvPr/>
         </p:nvSpPr>
@@ -1388,7 +1714,7 @@
       </p:sp>
       <p:sp>
         <p:nvSpPr>
-          <p:cNvPr id="132" name="Texto 132"/>
+          <p:cNvPr id="139" name="Texto 139"/>
           <p:cNvSpPr txBox="1"/>
           <p:nvPr/>
         </p:nvSpPr>
@@ -1422,7 +1748,7 @@
       </p:sp>
       <p:sp>
         <p:nvSpPr>
-          <p:cNvPr id="133" name="Texto 133"/>
+          <p:cNvPr id="140" name="Texto 140"/>
           <p:cNvSpPr txBox="1"/>
           <p:nvPr/>
         </p:nvSpPr>
@@ -1456,7 +1782,7 @@
       </p:sp>
       <p:sp>
         <p:nvSpPr>
-          <p:cNvPr id="134" name="Texto 134"/>
+          <p:cNvPr id="141" name="Texto 141"/>
           <p:cNvSpPr txBox="1"/>
           <p:nvPr/>
         </p:nvSpPr>
@@ -1484,349 +1810,6 @@
                 </a:solidFill>
               </a:rPr>
               <a:t>Fictitious, illustrative data: they do not describe any real company.</a:t>
-            </a:r>
-          </a:p>
-        </p:txBody>
-      </p:sp>
-    </p:spTree>
-  </p:cSld>
-  <p:clrMapOvr>
-    <a:overrideClrMapping bg1="lt1" tx1="dk1" bg2="lt2" tx2="dk2" accent1="accent1" accent2="accent2" accent3="accent3" accent4="accent4" accent5="accent5" accent6="accent6" hlink="hlink" folHlink="folHlink"/>
-  </p:clrMapOvr>
-</p:sld>
-</file>
-
-<file path=ppt/slides/slide14.xml><?xml version="1.0" encoding="utf-8"?>
-<p:sld xmlns:a="http://schemas.openxmlformats.org/drawingml/2006/main" xmlns:r="http://schemas.openxmlformats.org/officeDocument/2006/relationships" xmlns:p="http://schemas.openxmlformats.org/presentationml/2006/main">
-  <p:cSld>
-    <p:bg>
-      <p:bgPr>
-        <a:solidFill>
-          <a:srgbClr val="FBE2CD"/>
-        </a:solidFill>
-        <a:effectLst/>
-      </p:bgPr>
-    </p:bg>
-    <p:spTree>
-      <p:nvGrpSpPr>
-        <p:cNvPr id="1" name=""/>
-        <p:cNvGrpSpPr/>
-        <p:nvPr/>
-      </p:nvGrpSpPr>
-      <p:grpSpPr>
-        <a:xfrm>
-          <a:off x="0" y="0"/>
-          <a:ext cx="0" cy="0"/>
-          <a:chOff x="0" y="0"/>
-          <a:chExt cx="0" cy="0"/>
-        </a:xfrm>
-      </p:grpSpPr>
-      <p:sp>
-        <p:nvSpPr>
-          <p:cNvPr id="138" name="Marca"/>
-          <p:cNvSpPr/>
-          <p:nvPr/>
-        </p:nvSpPr>
-        <p:spPr>
-          <a:xfrm>
-            <a:off x="609600" y="365760"/>
-            <a:ext cx="182880" cy="182880"/>
-          </a:xfrm>
-          <a:prstGeom prst="rect">
-            <a:avLst/>
-          </a:prstGeom>
-          <a:solidFill>
-            <a:srgbClr val="990F3D"/>
-          </a:solidFill>
-        </p:spPr>
-        <p:txBody>
-          <a:bodyPr/>
-          <a:lstStyle/>
-          <a:p/>
-        </p:txBody>
-      </p:sp>
-      <p:sp>
-        <p:nvSpPr>
-          <p:cNvPr id="139" name="Texto 139"/>
-          <p:cNvSpPr txBox="1"/>
-          <p:nvPr/>
-        </p:nvSpPr>
-        <p:spPr>
-          <a:xfrm>
-            <a:off x="838200" y="300000"/>
-            <a:ext cx="10500000" cy="320000"/>
-          </a:xfrm>
-          <a:prstGeom prst="rect">
-            <a:avLst/>
-          </a:prstGeom>
-          <a:noFill/>
-        </p:spPr>
-        <p:txBody>
-          <a:bodyPr wrap="square" anchor="ctr" lIns="45720" rIns="45720">
-            <a:noAutofit/>
-          </a:bodyPr>
-          <a:lstStyle/>
-          <a:p>
-            <a:pPr algn="l"/>
-            <a:r>
-              <a:rPr lang="es-ES" sz="1400" b="1" dirty="0">
-                <a:solidFill>
-                  <a:srgbClr val="1A1817"/>
-                </a:solidFill>
-              </a:rPr>
-              <a:t>SEVEN-G · COURSE · PARTNER · BUILDING IT INTO YOUR METHODOLOGY</a:t>
-            </a:r>
-          </a:p>
-        </p:txBody>
-      </p:sp>
-      <p:sp>
-        <p:nvSpPr>
-          <p:cNvPr id="140" name="Texto 140"/>
-          <p:cNvSpPr txBox="1"/>
-          <p:nvPr/>
-        </p:nvSpPr>
-        <p:spPr>
-          <a:xfrm>
-            <a:off x="609600" y="700000"/>
-            <a:ext cx="10972800" cy="650000"/>
-          </a:xfrm>
-          <a:prstGeom prst="rect">
-            <a:avLst/>
-          </a:prstGeom>
-          <a:noFill/>
-        </p:spPr>
-        <p:txBody>
-          <a:bodyPr wrap="square" anchor="t" lIns="45720" rIns="45720">
-            <a:noAutofit/>
-          </a:bodyPr>
-          <a:lstStyle/>
-          <a:p>
-            <a:pPr algn="l"/>
-            <a:r>
-              <a:rPr lang="es-ES" sz="2700" b="1" dirty="0">
-                <a:solidFill>
-                  <a:srgbClr val="990F3D"/>
-                </a:solidFill>
-              </a:rPr>
-              <a:t>Example 1 · When an initiative stops</a:t>
-            </a:r>
-          </a:p>
-        </p:txBody>
-      </p:sp>
-      <p:sp>
-        <p:nvSpPr>
-          <p:cNvPr id="135" name="Texto 135"/>
-          <p:cNvSpPr txBox="1"/>
-          <p:nvPr/>
-        </p:nvSpPr>
-        <p:spPr>
-          <a:xfrm>
-            <a:off x="609600" y="1330000"/>
-            <a:ext cx="10972800" cy="500000"/>
-          </a:xfrm>
-          <a:prstGeom prst="rect">
-            <a:avLst/>
-          </a:prstGeom>
-          <a:noFill/>
-        </p:spPr>
-        <p:txBody>
-          <a:bodyPr wrap="square" anchor="t" lIns="45720" rIns="45720">
-            <a:noAutofit/>
-          </a:bodyPr>
-          <a:lstStyle/>
-          <a:p>
-            <a:pPr algn="l"/>
-            <a:r>
-              <a:rPr lang="es-ES" sz="1700" b="1" dirty="0">
-                <a:solidFill>
-                  <a:srgbClr val="2F2B28"/>
-                </a:solidFill>
-              </a:rPr>
-              <a:t>Candidate screening in recruitment (HR)</a:t>
-            </a:r>
-          </a:p>
-        </p:txBody>
-      </p:sp>
-      <p:sp>
-        <p:nvSpPr>
-          <p:cNvPr id="136" name="Texto 136"/>
-          <p:cNvSpPr txBox="1"/>
-          <p:nvPr/>
-        </p:nvSpPr>
-        <p:spPr>
-          <a:xfrm>
-            <a:off x="609600" y="1900000"/>
-            <a:ext cx="10972800" cy="3550000"/>
-          </a:xfrm>
-          <a:prstGeom prst="rect">
-            <a:avLst/>
-          </a:prstGeom>
-          <a:noFill/>
-        </p:spPr>
-        <p:txBody>
-          <a:bodyPr wrap="square" anchor="t" lIns="45720" rIns="45720">
-            <a:noAutofit/>
-          </a:bodyPr>
-          <a:lstStyle/>
-          <a:p>
-            <a:pPr marL="285750" indent="-285750">
-              <a:spcAft>
-                <a:spcPts val="400"/>
-              </a:spcAft>
-              <a:buClr>
-                <a:srgbClr val="990F3D"/>
-              </a:buClr>
-              <a:buFont typeface="Arial"/>
-              <a:buChar char="•"/>
-            </a:pPr>
-            <a:r>
-              <a:rPr lang="es-ES" sz="1500" dirty="0">
-                <a:solidFill>
-                  <a:srgbClr val="2F2B28"/>
-                </a:solidFill>
-              </a:rPr>
-              <a:t>Phases 0 and 1: HR sponsors it (P01–P05). Because it decides about people, intensity is Enterprise (P04). It enters "Proposed".</a:t>
-            </a:r>
-          </a:p>
-          <a:p>
-            <a:pPr marL="285750" indent="-285750">
-              <a:spcAft>
-                <a:spcPts val="400"/>
-              </a:spcAft>
-              <a:buClr>
-                <a:srgbClr val="990F3D"/>
-              </a:buClr>
-              <a:buFont typeface="Arial"/>
-              <a:buChar char="•"/>
-            </a:pPr>
-            <a:r>
-              <a:rPr lang="es-ES" sz="1500" dirty="0">
-                <a:solidFill>
-                  <a:srgbClr val="2F2B28"/>
-                </a:solidFill>
-              </a:rPr>
-              <a:t>Phase 2: the hypothesis (P08) promises 40% less screening time against the baseline (P09). The pilot confirms it: G2, Proceed.</a:t>
-            </a:r>
-          </a:p>
-          <a:p>
-            <a:pPr marL="285750" indent="-285750">
-              <a:spcAft>
-                <a:spcPts val="400"/>
-              </a:spcAft>
-              <a:buClr>
-                <a:srgbClr val="990F3D"/>
-              </a:buClr>
-              <a:buFont typeface="Arial"/>
-              <a:buChar char="•"/>
-            </a:pPr>
-            <a:r>
-              <a:rPr lang="es-ES" sz="1500" dirty="0">
-                <a:solidFill>
-                  <a:srgbClr val="2F2B28"/>
-                </a:solidFill>
-              </a:rPr>
-              <a:t>Phase 3: the regulatory classification (P11) makes it a high-risk system. The bias test finds it penalises older candidates.</a:t>
-            </a:r>
-          </a:p>
-          <a:p>
-            <a:pPr marL="285750" indent="-285750">
-              <a:spcAft>
-                <a:spcPts val="400"/>
-              </a:spcAft>
-              <a:buClr>
-                <a:srgbClr val="990F3D"/>
-              </a:buClr>
-              <a:buFont typeface="Arial"/>
-              <a:buChar char="•"/>
-            </a:pPr>
-            <a:r>
-              <a:rPr lang="es-ES" sz="1500" dirty="0">
-                <a:solidFill>
-                  <a:srgbClr val="2F2B28"/>
-                </a:solidFill>
-              </a:rPr>
-              <a:t>It iterates twice, adjusting variables: fixing the bias destroys the predictive power that justified the project.</a:t>
-            </a:r>
-          </a:p>
-          <a:p>
-            <a:pPr marL="285750" indent="-285750">
-              <a:spcAft>
-                <a:spcPts val="400"/>
-              </a:spcAft>
-              <a:buClr>
-                <a:srgbClr val="990F3D"/>
-              </a:buClr>
-              <a:buFont typeface="Arial"/>
-              <a:buChar char="•"/>
-            </a:pPr>
-            <a:r>
-              <a:rPr lang="es-ES" sz="1500" dirty="0">
-                <a:solidFill>
-                  <a:srgbClr val="2F2B28"/>
-                </a:solidFill>
-              </a:rPr>
-              <a:t>G3: high residual risk with no viable mitigation (P12, P13). The AI committee decides to Stop; it is recorded in P29 with its reason.</a:t>
-            </a:r>
-          </a:p>
-          <a:p>
-            <a:pPr marL="285750" indent="-285750">
-              <a:spcAft>
-                <a:spcPts val="400"/>
-              </a:spcAft>
-              <a:buClr>
-                <a:srgbClr val="990F3D"/>
-              </a:buClr>
-              <a:buFont typeface="Arial"/>
-              <a:buChar char="•"/>
-            </a:pPr>
-            <a:r>
-              <a:rPr lang="es-ES" sz="1500" dirty="0">
-                <a:solidFill>
-                  <a:srgbClr val="2F2B28"/>
-                </a:solidFill>
-              </a:rPr>
-              <a:t>In the funnel it shows to the right of "Proof of concept": Discarded · unacceptable risk. Lesson: test for bias earlier, in phase 2.</a:t>
-            </a:r>
-          </a:p>
-        </p:txBody>
-      </p:sp>
-      <p:sp>
-        <p:nvSpPr>
-          <p:cNvPr id="137" name="Caja 137"/>
-          <p:cNvSpPr/>
-          <p:nvPr/>
-        </p:nvSpPr>
-        <p:spPr>
-          <a:xfrm>
-            <a:off x="609600" y="5600000"/>
-            <a:ext cx="10972800" cy="900000"/>
-          </a:xfrm>
-          <a:prstGeom prst="roundRect">
-            <a:avLst>
-              <a:gd name="adj" fmla="val 6000"/>
-            </a:avLst>
-          </a:prstGeom>
-          <a:solidFill>
-            <a:srgbClr val="990F3D"/>
-          </a:solidFill>
-          <a:ln>
-            <a:noFill/>
-          </a:ln>
-        </p:spPr>
-        <p:txBody>
-          <a:bodyPr wrap="square" anchor="ctr" lIns="45720" rIns="45720">
-            <a:noAutofit/>
-          </a:bodyPr>
-          <a:lstStyle/>
-          <a:p>
-            <a:pPr algn="ctr"/>
-            <a:r>
-              <a:rPr lang="es-ES" sz="2100" b="1" dirty="0">
-                <a:solidFill>
-                  <a:srgbClr val="FFFFFF"/>
-                </a:solidFill>
-              </a:rPr>
-              <a:t>STOPPED AT G3 · BUILDING AND RUNNING AN UNVIABLE SYSTEM WAS AVOIDED</a:t>
             </a:r>
           </a:p>
         </p:txBody>
@@ -1866,7 +1849,7 @@
       </p:grpSpPr>
       <p:sp>
         <p:nvSpPr>
-          <p:cNvPr id="158" name="Marca"/>
+          <p:cNvPr id="145" name="Marca"/>
           <p:cNvSpPr/>
           <p:nvPr/>
         </p:nvSpPr>
@@ -1890,7 +1873,7 @@
       </p:sp>
       <p:sp>
         <p:nvSpPr>
-          <p:cNvPr id="159" name="Texto 159"/>
+          <p:cNvPr id="146" name="Texto 146"/>
           <p:cNvSpPr txBox="1"/>
           <p:nvPr/>
         </p:nvSpPr>
@@ -1924,7 +1907,7 @@
       </p:sp>
       <p:sp>
         <p:nvSpPr>
-          <p:cNvPr id="160" name="Texto 160"/>
+          <p:cNvPr id="147" name="Texto 147"/>
           <p:cNvSpPr txBox="1"/>
           <p:nvPr/>
         </p:nvSpPr>
@@ -1951,21 +1934,21 @@
                   <a:srgbClr val="990F3D"/>
                 </a:solidFill>
               </a:rPr>
-              <a:t>Initiative 1, on the lifecycle</a:t>
-            </a:r>
-          </a:p>
-        </p:txBody>
-      </p:sp>
-      <p:sp>
-        <p:nvSpPr>
-          <p:cNvPr id="161" name="Texto 161"/>
+              <a:t>Example 1 · When an initiative stops</a:t>
+            </a:r>
+          </a:p>
+        </p:txBody>
+      </p:sp>
+      <p:sp>
+        <p:nvSpPr>
+          <p:cNvPr id="142" name="Texto 142"/>
           <p:cNvSpPr txBox="1"/>
           <p:nvPr/>
         </p:nvSpPr>
         <p:spPr>
           <a:xfrm>
             <a:off x="609600" y="1330000"/>
-            <a:ext cx="10972800" cy="450000"/>
+            <a:ext cx="10972800" cy="500000"/>
           </a:xfrm>
           <a:prstGeom prst="rect">
             <a:avLst/>
@@ -1980,26 +1963,169 @@
           <a:p>
             <a:pPr algn="l"/>
             <a:r>
+              <a:rPr lang="es-ES" sz="1700" b="1" dirty="0">
+                <a:solidFill>
+                  <a:srgbClr val="2F2B28"/>
+                </a:solidFill>
+              </a:rPr>
+              <a:t>Candidate screening in recruitment (HR)</a:t>
+            </a:r>
+          </a:p>
+        </p:txBody>
+      </p:sp>
+      <p:sp>
+        <p:nvSpPr>
+          <p:cNvPr id="143" name="Texto 143"/>
+          <p:cNvSpPr txBox="1"/>
+          <p:nvPr/>
+        </p:nvSpPr>
+        <p:spPr>
+          <a:xfrm>
+            <a:off x="609600" y="1900000"/>
+            <a:ext cx="10972800" cy="3550000"/>
+          </a:xfrm>
+          <a:prstGeom prst="rect">
+            <a:avLst/>
+          </a:prstGeom>
+          <a:noFill/>
+        </p:spPr>
+        <p:txBody>
+          <a:bodyPr wrap="square" anchor="t" lIns="45720" rIns="45720">
+            <a:noAutofit/>
+          </a:bodyPr>
+          <a:lstStyle/>
+          <a:p>
+            <a:pPr marL="285750" indent="-285750">
+              <a:spcAft>
+                <a:spcPts val="400"/>
+              </a:spcAft>
+              <a:buClr>
+                <a:srgbClr val="990F3D"/>
+              </a:buClr>
+              <a:buFont typeface="Arial"/>
+              <a:buChar char="•"/>
+            </a:pPr>
+            <a:r>
               <a:rPr lang="es-ES" sz="1500" dirty="0">
                 <a:solidFill>
-                  <a:srgbClr val="564D47"/>
-                </a:solidFill>
-              </a:rPr>
-              <a:t>It reached phase 3 and did not pass gate G3</a:t>
-            </a:r>
-          </a:p>
-        </p:txBody>
-      </p:sp>
-      <p:sp>
-        <p:nvSpPr>
-          <p:cNvPr id="141" name="Caja 141"/>
+                  <a:srgbClr val="2F2B28"/>
+                </a:solidFill>
+              </a:rPr>
+              <a:t>Phases 0 and 1: HR sponsors it (P01–P05). Because it decides about people, intensity is Enterprise (P04). It enters "Proposed".</a:t>
+            </a:r>
+          </a:p>
+          <a:p>
+            <a:pPr marL="285750" indent="-285750">
+              <a:spcAft>
+                <a:spcPts val="400"/>
+              </a:spcAft>
+              <a:buClr>
+                <a:srgbClr val="990F3D"/>
+              </a:buClr>
+              <a:buFont typeface="Arial"/>
+              <a:buChar char="•"/>
+            </a:pPr>
+            <a:r>
+              <a:rPr lang="es-ES" sz="1500" dirty="0">
+                <a:solidFill>
+                  <a:srgbClr val="2F2B28"/>
+                </a:solidFill>
+              </a:rPr>
+              <a:t>Phase 2: the hypothesis (P08) promises 40% less screening time against the baseline (P09). The pilot confirms it: G2, Proceed.</a:t>
+            </a:r>
+          </a:p>
+          <a:p>
+            <a:pPr marL="285750" indent="-285750">
+              <a:spcAft>
+                <a:spcPts val="400"/>
+              </a:spcAft>
+              <a:buClr>
+                <a:srgbClr val="990F3D"/>
+              </a:buClr>
+              <a:buFont typeface="Arial"/>
+              <a:buChar char="•"/>
+            </a:pPr>
+            <a:r>
+              <a:rPr lang="es-ES" sz="1500" dirty="0">
+                <a:solidFill>
+                  <a:srgbClr val="2F2B28"/>
+                </a:solidFill>
+              </a:rPr>
+              <a:t>Phase 3: the regulatory classification (P11) makes it a high-risk system. The bias test finds it penalises older candidates.</a:t>
+            </a:r>
+          </a:p>
+          <a:p>
+            <a:pPr marL="285750" indent="-285750">
+              <a:spcAft>
+                <a:spcPts val="400"/>
+              </a:spcAft>
+              <a:buClr>
+                <a:srgbClr val="990F3D"/>
+              </a:buClr>
+              <a:buFont typeface="Arial"/>
+              <a:buChar char="•"/>
+            </a:pPr>
+            <a:r>
+              <a:rPr lang="es-ES" sz="1500" dirty="0">
+                <a:solidFill>
+                  <a:srgbClr val="2F2B28"/>
+                </a:solidFill>
+              </a:rPr>
+              <a:t>It iterates twice, adjusting variables: fixing the bias destroys the predictive power that justified the project.</a:t>
+            </a:r>
+          </a:p>
+          <a:p>
+            <a:pPr marL="285750" indent="-285750">
+              <a:spcAft>
+                <a:spcPts val="400"/>
+              </a:spcAft>
+              <a:buClr>
+                <a:srgbClr val="990F3D"/>
+              </a:buClr>
+              <a:buFont typeface="Arial"/>
+              <a:buChar char="•"/>
+            </a:pPr>
+            <a:r>
+              <a:rPr lang="es-ES" sz="1500" dirty="0">
+                <a:solidFill>
+                  <a:srgbClr val="2F2B28"/>
+                </a:solidFill>
+              </a:rPr>
+              <a:t>G3: high residual risk with no viable mitigation (P12, P13). The AI committee decides to Stop; it is recorded in P29 with its reason.</a:t>
+            </a:r>
+          </a:p>
+          <a:p>
+            <a:pPr marL="285750" indent="-285750">
+              <a:spcAft>
+                <a:spcPts val="400"/>
+              </a:spcAft>
+              <a:buClr>
+                <a:srgbClr val="990F3D"/>
+              </a:buClr>
+              <a:buFont typeface="Arial"/>
+              <a:buChar char="•"/>
+            </a:pPr>
+            <a:r>
+              <a:rPr lang="es-ES" sz="1500" dirty="0">
+                <a:solidFill>
+                  <a:srgbClr val="2F2B28"/>
+                </a:solidFill>
+              </a:rPr>
+              <a:t>In the funnel it shows to the right of "Proof of concept": Discarded · unacceptable risk. Lesson: test for bias earlier, in phase 2.</a:t>
+            </a:r>
+          </a:p>
+        </p:txBody>
+      </p:sp>
+      <p:sp>
+        <p:nvSpPr>
+          <p:cNvPr id="144" name="Caja 144"/>
           <p:cNvSpPr/>
           <p:nvPr/>
         </p:nvSpPr>
         <p:spPr>
           <a:xfrm>
-            <a:off x="681000" y="2350000"/>
-            <a:ext cx="1240000" cy="1500000"/>
+            <a:off x="609600" y="5600000"/>
+            <a:ext cx="10972800" cy="900000"/>
           </a:xfrm>
           <a:prstGeom prst="roundRect">
             <a:avLst>
@@ -2021,693 +2147,12 @@
           <a:p>
             <a:pPr algn="ctr"/>
             <a:r>
-              <a:rPr lang="es-ES" sz="2400" b="1" dirty="0">
+              <a:rPr lang="es-ES" sz="2100" b="1" dirty="0">
                 <a:solidFill>
                   <a:srgbClr val="FFFFFF"/>
                 </a:solidFill>
               </a:rPr>
-              <a:t>F0</a:t>
-            </a:r>
-          </a:p>
-          <a:p>
-            <a:pPr algn="ctr"/>
-            <a:r>
-              <a:rPr lang="es-ES" sz="1050" dirty="0">
-                <a:solidFill>
-                  <a:srgbClr val="FFFFFF"/>
-                </a:solidFill>
-              </a:rPr>
-              <a:t>Context and constraints</a:t>
-            </a:r>
-          </a:p>
-        </p:txBody>
-      </p:sp>
-      <p:sp>
-        <p:nvSpPr>
-          <p:cNvPr id="142" name="Texto 142"/>
-          <p:cNvSpPr txBox="1"/>
-          <p:nvPr/>
-        </p:nvSpPr>
-        <p:spPr>
-          <a:xfrm>
-            <a:off x="1591000" y="3900000"/>
-            <a:ext cx="800000" cy="300000"/>
-          </a:xfrm>
-          <a:prstGeom prst="rect">
-            <a:avLst/>
-          </a:prstGeom>
-          <a:noFill/>
-        </p:spPr>
-        <p:txBody>
-          <a:bodyPr wrap="square" anchor="t" lIns="45720" rIns="45720">
-            <a:noAutofit/>
-          </a:bodyPr>
-          <a:lstStyle/>
-          <a:p>
-            <a:pPr algn="ctr"/>
-            <a:r>
-              <a:rPr lang="es-ES" sz="1200" b="1" dirty="0">
-                <a:solidFill>
-                  <a:srgbClr val="990F3D"/>
-                </a:solidFill>
-              </a:rPr>
-              <a:t>G0</a:t>
-            </a:r>
-          </a:p>
-        </p:txBody>
-      </p:sp>
-      <p:sp>
-        <p:nvSpPr>
-          <p:cNvPr id="143" name="Caja 143"/>
-          <p:cNvSpPr/>
-          <p:nvPr/>
-        </p:nvSpPr>
-        <p:spPr>
-          <a:xfrm>
-            <a:off x="2051000" y="2350000"/>
-            <a:ext cx="1240000" cy="1500000"/>
-          </a:xfrm>
-          <a:prstGeom prst="roundRect">
-            <a:avLst>
-              <a:gd name="adj" fmla="val 6000"/>
-            </a:avLst>
-          </a:prstGeom>
-          <a:solidFill>
-            <a:srgbClr val="990F3D"/>
-          </a:solidFill>
-          <a:ln>
-            <a:noFill/>
-          </a:ln>
-        </p:spPr>
-        <p:txBody>
-          <a:bodyPr wrap="square" anchor="ctr" lIns="45720" rIns="45720">
-            <a:noAutofit/>
-          </a:bodyPr>
-          <a:lstStyle/>
-          <a:p>
-            <a:pPr algn="ctr"/>
-            <a:r>
-              <a:rPr lang="es-ES" sz="2400" b="1" dirty="0">
-                <a:solidFill>
-                  <a:srgbClr val="FFFFFF"/>
-                </a:solidFill>
-              </a:rPr>
-              <a:t>F1</a:t>
-            </a:r>
-          </a:p>
-          <a:p>
-            <a:pPr algn="ctr"/>
-            <a:r>
-              <a:rPr lang="es-ES" sz="1050" dirty="0">
-                <a:solidFill>
-                  <a:srgbClr val="FFFFFF"/>
-                </a:solidFill>
-              </a:rPr>
-              <a:t>Opportunity discovery</a:t>
-            </a:r>
-          </a:p>
-        </p:txBody>
-      </p:sp>
-      <p:sp>
-        <p:nvSpPr>
-          <p:cNvPr id="144" name="Texto 144"/>
-          <p:cNvSpPr txBox="1"/>
-          <p:nvPr/>
-        </p:nvSpPr>
-        <p:spPr>
-          <a:xfrm>
-            <a:off x="2961000" y="3900000"/>
-            <a:ext cx="800000" cy="300000"/>
-          </a:xfrm>
-          <a:prstGeom prst="rect">
-            <a:avLst/>
-          </a:prstGeom>
-          <a:noFill/>
-        </p:spPr>
-        <p:txBody>
-          <a:bodyPr wrap="square" anchor="t" lIns="45720" rIns="45720">
-            <a:noAutofit/>
-          </a:bodyPr>
-          <a:lstStyle/>
-          <a:p>
-            <a:pPr algn="ctr"/>
-            <a:r>
-              <a:rPr lang="es-ES" sz="1200" b="1" dirty="0">
-                <a:solidFill>
-                  <a:srgbClr val="990F3D"/>
-                </a:solidFill>
-              </a:rPr>
-              <a:t>G1</a:t>
-            </a:r>
-          </a:p>
-        </p:txBody>
-      </p:sp>
-      <p:sp>
-        <p:nvSpPr>
-          <p:cNvPr id="145" name="Caja 145"/>
-          <p:cNvSpPr/>
-          <p:nvPr/>
-        </p:nvSpPr>
-        <p:spPr>
-          <a:xfrm>
-            <a:off x="3421000" y="2350000"/>
-            <a:ext cx="1240000" cy="1500000"/>
-          </a:xfrm>
-          <a:prstGeom prst="roundRect">
-            <a:avLst>
-              <a:gd name="adj" fmla="val 6000"/>
-            </a:avLst>
-          </a:prstGeom>
-          <a:solidFill>
-            <a:srgbClr val="990F3D"/>
-          </a:solidFill>
-          <a:ln>
-            <a:noFill/>
-          </a:ln>
-        </p:spPr>
-        <p:txBody>
-          <a:bodyPr wrap="square" anchor="ctr" lIns="45720" rIns="45720">
-            <a:noAutofit/>
-          </a:bodyPr>
-          <a:lstStyle/>
-          <a:p>
-            <a:pPr algn="ctr"/>
-            <a:r>
-              <a:rPr lang="es-ES" sz="2400" b="1" dirty="0">
-                <a:solidFill>
-                  <a:srgbClr val="FFFFFF"/>
-                </a:solidFill>
-              </a:rPr>
-              <a:t>F2</a:t>
-            </a:r>
-          </a:p>
-          <a:p>
-            <a:pPr algn="ctr"/>
-            <a:r>
-              <a:rPr lang="es-ES" sz="1050" dirty="0">
-                <a:solidFill>
-                  <a:srgbClr val="FFFFFF"/>
-                </a:solidFill>
-              </a:rPr>
-              <a:t>Value hypothesis</a:t>
-            </a:r>
-          </a:p>
-        </p:txBody>
-      </p:sp>
-      <p:sp>
-        <p:nvSpPr>
-          <p:cNvPr id="146" name="Texto 146"/>
-          <p:cNvSpPr txBox="1"/>
-          <p:nvPr/>
-        </p:nvSpPr>
-        <p:spPr>
-          <a:xfrm>
-            <a:off x="4331000" y="3900000"/>
-            <a:ext cx="800000" cy="300000"/>
-          </a:xfrm>
-          <a:prstGeom prst="rect">
-            <a:avLst/>
-          </a:prstGeom>
-          <a:noFill/>
-        </p:spPr>
-        <p:txBody>
-          <a:bodyPr wrap="square" anchor="t" lIns="45720" rIns="45720">
-            <a:noAutofit/>
-          </a:bodyPr>
-          <a:lstStyle/>
-          <a:p>
-            <a:pPr algn="ctr"/>
-            <a:r>
-              <a:rPr lang="es-ES" sz="1200" b="1" dirty="0">
-                <a:solidFill>
-                  <a:srgbClr val="990F3D"/>
-                </a:solidFill>
-              </a:rPr>
-              <a:t>G2</a:t>
-            </a:r>
-          </a:p>
-        </p:txBody>
-      </p:sp>
-      <p:sp>
-        <p:nvSpPr>
-          <p:cNvPr id="147" name="Caja 147"/>
-          <p:cNvSpPr/>
-          <p:nvPr/>
-        </p:nvSpPr>
-        <p:spPr>
-          <a:xfrm>
-            <a:off x="4791000" y="2350000"/>
-            <a:ext cx="1240000" cy="1500000"/>
-          </a:xfrm>
-          <a:prstGeom prst="roundRect">
-            <a:avLst>
-              <a:gd name="adj" fmla="val 6000"/>
-            </a:avLst>
-          </a:prstGeom>
-          <a:solidFill>
-            <a:srgbClr val="990F3D"/>
-          </a:solidFill>
-          <a:ln>
-            <a:noFill/>
-          </a:ln>
-        </p:spPr>
-        <p:txBody>
-          <a:bodyPr wrap="square" anchor="ctr" lIns="45720" rIns="45720">
-            <a:noAutofit/>
-          </a:bodyPr>
-          <a:lstStyle/>
-          <a:p>
-            <a:pPr algn="ctr"/>
-            <a:r>
-              <a:rPr lang="es-ES" sz="2400" b="1" dirty="0">
-                <a:solidFill>
-                  <a:srgbClr val="FFFFFF"/>
-                </a:solidFill>
-              </a:rPr>
-              <a:t>F3</a:t>
-            </a:r>
-          </a:p>
-          <a:p>
-            <a:pPr algn="ctr"/>
-            <a:r>
-              <a:rPr lang="es-ES" sz="1050" dirty="0">
-                <a:solidFill>
-                  <a:srgbClr val="FFFFFF"/>
-                </a:solidFill>
-              </a:rPr>
-              <a:t>Feasibility and risk</a:t>
-            </a:r>
-          </a:p>
-        </p:txBody>
-      </p:sp>
-      <p:sp>
-        <p:nvSpPr>
-          <p:cNvPr id="148" name="Texto 148"/>
-          <p:cNvSpPr txBox="1"/>
-          <p:nvPr/>
-        </p:nvSpPr>
-        <p:spPr>
-          <a:xfrm>
-            <a:off x="5701000" y="3900000"/>
-            <a:ext cx="800000" cy="300000"/>
-          </a:xfrm>
-          <a:prstGeom prst="rect">
-            <a:avLst/>
-          </a:prstGeom>
-          <a:noFill/>
-        </p:spPr>
-        <p:txBody>
-          <a:bodyPr wrap="square" anchor="t" lIns="45720" rIns="45720">
-            <a:noAutofit/>
-          </a:bodyPr>
-          <a:lstStyle/>
-          <a:p>
-            <a:pPr algn="ctr"/>
-            <a:r>
-              <a:rPr lang="es-ES" sz="1200" b="1" dirty="0">
-                <a:solidFill>
-                  <a:srgbClr val="990F3D"/>
-                </a:solidFill>
-              </a:rPr>
-              <a:t>G3</a:t>
-            </a:r>
-          </a:p>
-        </p:txBody>
-      </p:sp>
-      <p:sp>
-        <p:nvSpPr>
-          <p:cNvPr id="149" name="Caja 149"/>
-          <p:cNvSpPr/>
-          <p:nvPr/>
-        </p:nvSpPr>
-        <p:spPr>
-          <a:xfrm>
-            <a:off x="6161000" y="2350000"/>
-            <a:ext cx="1240000" cy="1500000"/>
-          </a:xfrm>
-          <a:prstGeom prst="roundRect">
-            <a:avLst>
-              <a:gd name="adj" fmla="val 6000"/>
-            </a:avLst>
-          </a:prstGeom>
-          <a:solidFill>
-            <a:srgbClr val="C9A78D"/>
-          </a:solidFill>
-          <a:ln>
-            <a:noFill/>
-          </a:ln>
-        </p:spPr>
-        <p:txBody>
-          <a:bodyPr wrap="square" anchor="ctr" lIns="45720" rIns="45720">
-            <a:noAutofit/>
-          </a:bodyPr>
-          <a:lstStyle/>
-          <a:p>
-            <a:pPr algn="ctr"/>
-            <a:r>
-              <a:rPr lang="es-ES" sz="2400" b="1" dirty="0">
-                <a:solidFill>
-                  <a:srgbClr val="564D47"/>
-                </a:solidFill>
-              </a:rPr>
-              <a:t>F4</a:t>
-            </a:r>
-          </a:p>
-          <a:p>
-            <a:pPr algn="ctr"/>
-            <a:r>
-              <a:rPr lang="es-ES" sz="1050" dirty="0">
-                <a:solidFill>
-                  <a:srgbClr val="564D47"/>
-                </a:solidFill>
-              </a:rPr>
-              <a:t>Solution design</a:t>
-            </a:r>
-          </a:p>
-        </p:txBody>
-      </p:sp>
-      <p:sp>
-        <p:nvSpPr>
-          <p:cNvPr id="150" name="Texto 150"/>
-          <p:cNvSpPr txBox="1"/>
-          <p:nvPr/>
-        </p:nvSpPr>
-        <p:spPr>
-          <a:xfrm>
-            <a:off x="7071000" y="3900000"/>
-            <a:ext cx="800000" cy="300000"/>
-          </a:xfrm>
-          <a:prstGeom prst="rect">
-            <a:avLst/>
-          </a:prstGeom>
-          <a:noFill/>
-        </p:spPr>
-        <p:txBody>
-          <a:bodyPr wrap="square" anchor="t" lIns="45720" rIns="45720">
-            <a:noAutofit/>
-          </a:bodyPr>
-          <a:lstStyle/>
-          <a:p>
-            <a:pPr algn="ctr"/>
-            <a:r>
-              <a:rPr lang="es-ES" sz="1200" b="1" dirty="0">
-                <a:solidFill>
-                  <a:srgbClr val="990F3D"/>
-                </a:solidFill>
-              </a:rPr>
-              <a:t>G4</a:t>
-            </a:r>
-          </a:p>
-        </p:txBody>
-      </p:sp>
-      <p:sp>
-        <p:nvSpPr>
-          <p:cNvPr id="151" name="Caja 151"/>
-          <p:cNvSpPr/>
-          <p:nvPr/>
-        </p:nvSpPr>
-        <p:spPr>
-          <a:xfrm>
-            <a:off x="7531000" y="2350000"/>
-            <a:ext cx="1240000" cy="1500000"/>
-          </a:xfrm>
-          <a:prstGeom prst="roundRect">
-            <a:avLst>
-              <a:gd name="adj" fmla="val 6000"/>
-            </a:avLst>
-          </a:prstGeom>
-          <a:solidFill>
-            <a:srgbClr val="C9A78D"/>
-          </a:solidFill>
-          <a:ln>
-            <a:noFill/>
-          </a:ln>
-        </p:spPr>
-        <p:txBody>
-          <a:bodyPr wrap="square" anchor="ctr" lIns="45720" rIns="45720">
-            <a:noAutofit/>
-          </a:bodyPr>
-          <a:lstStyle/>
-          <a:p>
-            <a:pPr algn="ctr"/>
-            <a:r>
-              <a:rPr lang="es-ES" sz="2400" b="1" dirty="0">
-                <a:solidFill>
-                  <a:srgbClr val="564D47"/>
-                </a:solidFill>
-              </a:rPr>
-              <a:t>F5</a:t>
-            </a:r>
-          </a:p>
-          <a:p>
-            <a:pPr algn="ctr"/>
-            <a:r>
-              <a:rPr lang="es-ES" sz="1050" dirty="0">
-                <a:solidFill>
-                  <a:srgbClr val="564D47"/>
-                </a:solidFill>
-              </a:rPr>
-              <a:t>Delivery and validation</a:t>
-            </a:r>
-          </a:p>
-        </p:txBody>
-      </p:sp>
-      <p:sp>
-        <p:nvSpPr>
-          <p:cNvPr id="152" name="Texto 152"/>
-          <p:cNvSpPr txBox="1"/>
-          <p:nvPr/>
-        </p:nvSpPr>
-        <p:spPr>
-          <a:xfrm>
-            <a:off x="8441000" y="3900000"/>
-            <a:ext cx="800000" cy="300000"/>
-          </a:xfrm>
-          <a:prstGeom prst="rect">
-            <a:avLst/>
-          </a:prstGeom>
-          <a:noFill/>
-        </p:spPr>
-        <p:txBody>
-          <a:bodyPr wrap="square" anchor="t" lIns="45720" rIns="45720">
-            <a:noAutofit/>
-          </a:bodyPr>
-          <a:lstStyle/>
-          <a:p>
-            <a:pPr algn="ctr"/>
-            <a:r>
-              <a:rPr lang="es-ES" sz="1200" b="1" dirty="0">
-                <a:solidFill>
-                  <a:srgbClr val="990F3D"/>
-                </a:solidFill>
-              </a:rPr>
-              <a:t>G5</a:t>
-            </a:r>
-          </a:p>
-        </p:txBody>
-      </p:sp>
-      <p:sp>
-        <p:nvSpPr>
-          <p:cNvPr id="153" name="Caja 153"/>
-          <p:cNvSpPr/>
-          <p:nvPr/>
-        </p:nvSpPr>
-        <p:spPr>
-          <a:xfrm>
-            <a:off x="8901000" y="2350000"/>
-            <a:ext cx="1240000" cy="1500000"/>
-          </a:xfrm>
-          <a:prstGeom prst="roundRect">
-            <a:avLst>
-              <a:gd name="adj" fmla="val 6000"/>
-            </a:avLst>
-          </a:prstGeom>
-          <a:solidFill>
-            <a:srgbClr val="C9A78D"/>
-          </a:solidFill>
-          <a:ln>
-            <a:noFill/>
-          </a:ln>
-        </p:spPr>
-        <p:txBody>
-          <a:bodyPr wrap="square" anchor="ctr" lIns="45720" rIns="45720">
-            <a:noAutofit/>
-          </a:bodyPr>
-          <a:lstStyle/>
-          <a:p>
-            <a:pPr algn="ctr"/>
-            <a:r>
-              <a:rPr lang="es-ES" sz="2400" b="1" dirty="0">
-                <a:solidFill>
-                  <a:srgbClr val="564D47"/>
-                </a:solidFill>
-              </a:rPr>
-              <a:t>F6</a:t>
-            </a:r>
-          </a:p>
-          <a:p>
-            <a:pPr algn="ctr"/>
-            <a:r>
-              <a:rPr lang="es-ES" sz="1050" dirty="0">
-                <a:solidFill>
-                  <a:srgbClr val="564D47"/>
-                </a:solidFill>
-              </a:rPr>
-              <a:t>Operation and governance</a:t>
-            </a:r>
-          </a:p>
-        </p:txBody>
-      </p:sp>
-      <p:sp>
-        <p:nvSpPr>
-          <p:cNvPr id="154" name="Texto 154"/>
-          <p:cNvSpPr txBox="1"/>
-          <p:nvPr/>
-        </p:nvSpPr>
-        <p:spPr>
-          <a:xfrm>
-            <a:off x="9811000" y="3900000"/>
-            <a:ext cx="800000" cy="300000"/>
-          </a:xfrm>
-          <a:prstGeom prst="rect">
-            <a:avLst/>
-          </a:prstGeom>
-          <a:noFill/>
-        </p:spPr>
-        <p:txBody>
-          <a:bodyPr wrap="square" anchor="t" lIns="45720" rIns="45720">
-            <a:noAutofit/>
-          </a:bodyPr>
-          <a:lstStyle/>
-          <a:p>
-            <a:pPr algn="ctr"/>
-            <a:r>
-              <a:rPr lang="es-ES" sz="1200" b="1" dirty="0">
-                <a:solidFill>
-                  <a:srgbClr val="990F3D"/>
-                </a:solidFill>
-              </a:rPr>
-              <a:t>R6</a:t>
-            </a:r>
-          </a:p>
-        </p:txBody>
-      </p:sp>
-      <p:sp>
-        <p:nvSpPr>
-          <p:cNvPr id="155" name="Caja 155"/>
-          <p:cNvSpPr/>
-          <p:nvPr/>
-        </p:nvSpPr>
-        <p:spPr>
-          <a:xfrm>
-            <a:off x="10271000" y="2350000"/>
-            <a:ext cx="1240000" cy="1500000"/>
-          </a:xfrm>
-          <a:prstGeom prst="roundRect">
-            <a:avLst>
-              <a:gd name="adj" fmla="val 6000"/>
-            </a:avLst>
-          </a:prstGeom>
-          <a:solidFill>
-            <a:srgbClr val="C9A78D"/>
-          </a:solidFill>
-          <a:ln>
-            <a:noFill/>
-          </a:ln>
-        </p:spPr>
-        <p:txBody>
-          <a:bodyPr wrap="square" anchor="ctr" lIns="45720" rIns="45720">
-            <a:noAutofit/>
-          </a:bodyPr>
-          <a:lstStyle/>
-          <a:p>
-            <a:pPr algn="ctr"/>
-            <a:r>
-              <a:rPr lang="es-ES" sz="2400" b="1" dirty="0">
-                <a:solidFill>
-                  <a:srgbClr val="564D47"/>
-                </a:solidFill>
-              </a:rPr>
-              <a:t>F7</a:t>
-            </a:r>
-          </a:p>
-          <a:p>
-            <a:pPr algn="ctr"/>
-            <a:r>
-              <a:rPr lang="es-ES" sz="1050" dirty="0">
-                <a:solidFill>
-                  <a:srgbClr val="564D47"/>
-                </a:solidFill>
-              </a:rPr>
-              <a:t>Evolution or retirement</a:t>
-            </a:r>
-          </a:p>
-        </p:txBody>
-      </p:sp>
-      <p:sp>
-        <p:nvSpPr>
-          <p:cNvPr id="156" name="Texto 156"/>
-          <p:cNvSpPr txBox="1"/>
-          <p:nvPr/>
-        </p:nvSpPr>
-        <p:spPr>
-          <a:xfrm>
-            <a:off x="11181000" y="3900000"/>
-            <a:ext cx="800000" cy="300000"/>
-          </a:xfrm>
-          <a:prstGeom prst="rect">
-            <a:avLst/>
-          </a:prstGeom>
-          <a:noFill/>
-        </p:spPr>
-        <p:txBody>
-          <a:bodyPr wrap="square" anchor="t" lIns="45720" rIns="45720">
-            <a:noAutofit/>
-          </a:bodyPr>
-          <a:lstStyle/>
-          <a:p>
-            <a:pPr algn="ctr"/>
-            <a:r>
-              <a:rPr lang="es-ES" sz="1200" b="1" dirty="0">
-                <a:solidFill>
-                  <a:srgbClr val="990F3D"/>
-                </a:solidFill>
-              </a:rPr>
-              <a:t>G7</a:t>
-            </a:r>
-          </a:p>
-        </p:txBody>
-      </p:sp>
-      <p:sp>
-        <p:nvSpPr>
-          <p:cNvPr id="157" name="Texto 157"/>
-          <p:cNvSpPr txBox="1"/>
-          <p:nvPr/>
-        </p:nvSpPr>
-        <p:spPr>
-          <a:xfrm>
-            <a:off x="609600" y="4430000"/>
-            <a:ext cx="10972800" cy="600000"/>
-          </a:xfrm>
-          <a:prstGeom prst="rect">
-            <a:avLst/>
-          </a:prstGeom>
-          <a:noFill/>
-        </p:spPr>
-        <p:txBody>
-          <a:bodyPr wrap="square" anchor="t" lIns="45720" rIns="45720">
-            <a:noAutofit/>
-          </a:bodyPr>
-          <a:lstStyle/>
-          <a:p>
-            <a:pPr algn="ctr"/>
-            <a:r>
-              <a:rPr lang="es-ES" sz="2200" b="1" dirty="0">
-                <a:solidFill>
-                  <a:srgbClr val="990F3D"/>
-                </a:solidFill>
-              </a:rPr>
-              <a:t>STOPPED AT G3 · it leaves the funnel as "Discarded", with its reason</a:t>
+              <a:t>STOPPED AT G3 · BUILDING AND RUNNING AN UNVIABLE SYSTEM WAS AVOIDED</a:t>
             </a:r>
           </a:p>
         </p:txBody>
@@ -2832,21 +2277,21 @@
                   <a:srgbClr val="990F3D"/>
                 </a:solidFill>
               </a:rPr>
-              <a:t>Example 2 · When an initiative reaches production</a:t>
-            </a:r>
-          </a:p>
-        </p:txBody>
-      </p:sp>
-      <p:sp>
-        <p:nvSpPr>
-          <p:cNvPr id="162" name="Texto 162"/>
+              <a:t>Initiative 1, on the lifecycle</a:t>
+            </a:r>
+          </a:p>
+        </p:txBody>
+      </p:sp>
+      <p:sp>
+        <p:nvSpPr>
+          <p:cNvPr id="168" name="Texto 168"/>
           <p:cNvSpPr txBox="1"/>
           <p:nvPr/>
         </p:nvSpPr>
         <p:spPr>
           <a:xfrm>
             <a:off x="609600" y="1330000"/>
-            <a:ext cx="10972800" cy="500000"/>
+            <a:ext cx="10972800" cy="450000"/>
           </a:xfrm>
           <a:prstGeom prst="rect">
             <a:avLst/>
@@ -2861,169 +2306,26 @@
           <a:p>
             <a:pPr algn="l"/>
             <a:r>
-              <a:rPr lang="es-ES" sz="1700" b="1" dirty="0">
-                <a:solidFill>
-                  <a:srgbClr val="2F2B28"/>
-                </a:solidFill>
-              </a:rPr>
-              <a:t>First-line IT incident response assistant</a:t>
-            </a:r>
-          </a:p>
-        </p:txBody>
-      </p:sp>
-      <p:sp>
-        <p:nvSpPr>
-          <p:cNvPr id="163" name="Texto 163"/>
-          <p:cNvSpPr txBox="1"/>
-          <p:nvPr/>
-        </p:nvSpPr>
-        <p:spPr>
-          <a:xfrm>
-            <a:off x="609600" y="1900000"/>
-            <a:ext cx="10972800" cy="3550000"/>
-          </a:xfrm>
-          <a:prstGeom prst="rect">
-            <a:avLst/>
-          </a:prstGeom>
-          <a:noFill/>
-        </p:spPr>
-        <p:txBody>
-          <a:bodyPr wrap="square" anchor="t" lIns="45720" rIns="45720">
-            <a:noAutofit/>
-          </a:bodyPr>
-          <a:lstStyle/>
-          <a:p>
-            <a:pPr marL="285750" indent="-285750">
-              <a:spcAft>
-                <a:spcPts val="400"/>
-              </a:spcAft>
-              <a:buClr>
-                <a:srgbClr val="990F3D"/>
-              </a:buClr>
-              <a:buFont typeface="Arial"/>
-              <a:buChar char="•"/>
-            </a:pPr>
-            <a:r>
               <a:rPr lang="es-ES" sz="1500" dirty="0">
                 <a:solidFill>
-                  <a:srgbClr val="2F2B28"/>
-                </a:solidFill>
-              </a:rPr>
-              <a:t>Phases 0 and 1: IT sponsors it; against the non-AI alternative (more staff), the operations sphere with Optimise ambition is proposed (P07).</a:t>
-            </a:r>
-          </a:p>
-          <a:p>
-            <a:pPr marL="285750" indent="-285750">
-              <a:spcAft>
-                <a:spcPts val="400"/>
-              </a:spcAft>
-              <a:buClr>
-                <a:srgbClr val="990F3D"/>
-              </a:buClr>
-              <a:buFont typeface="Arial"/>
-              <a:buChar char="•"/>
-            </a:pPr>
-            <a:r>
-              <a:rPr lang="es-ES" sz="1500" dirty="0">
-                <a:solidFill>
-                  <a:srgbClr val="2F2B28"/>
-                </a:solidFill>
-              </a:rPr>
-              <a:t>Phase 2: hypothesis of 30% less resolution time for simple incidents; the controlled pilot yields 32%.</a:t>
-            </a:r>
-          </a:p>
-          <a:p>
-            <a:pPr marL="285750" indent="-285750">
-              <a:spcAft>
-                <a:spcPts val="400"/>
-              </a:spcAft>
-              <a:buClr>
-                <a:srgbClr val="990F3D"/>
-              </a:buClr>
-              <a:buFont typeface="Arial"/>
-              <a:buChar char="•"/>
-            </a:pPr>
-            <a:r>
-              <a:rPr lang="es-ES" sz="1500" dirty="0">
-                <a:solidFill>
-                  <a:srgbClr val="2F2B28"/>
-                </a:solidFill>
-              </a:rPr>
-              <a:t>Phase 3: no relevant bias, medium residual risk accepted by the right body (P12), supplier assessed (P14). G3, Proceed.</a:t>
-            </a:r>
-          </a:p>
-          <a:p>
-            <a:pPr marL="285750" indent="-285750">
-              <a:spcAft>
-                <a:spcPts val="400"/>
-              </a:spcAft>
-              <a:buClr>
-                <a:srgbClr val="990F3D"/>
-              </a:buClr>
-              <a:buFont typeface="Arial"/>
-              <a:buChar char="•"/>
-            </a:pPr>
-            <a:r>
-              <a:rPr lang="es-ES" sz="1500" dirty="0">
-                <a:solidFill>
-                  <a:srgbClr val="2F2B28"/>
-                </a:solidFill>
-              </a:rPr>
-              <a:t>Phases 4 and 5: mandatory human oversight above a severity level (P17), tested rollback (P19) and go-live sign-off (P23).</a:t>
-            </a:r>
-          </a:p>
-          <a:p>
-            <a:pPr marL="285750" indent="-285750">
-              <a:spcAft>
-                <a:spcPts val="400"/>
-              </a:spcAft>
-              <a:buClr>
-                <a:srgbClr val="990F3D"/>
-              </a:buClr>
-              <a:buFont typeface="Arial"/>
-              <a:buChar char="•"/>
-            </a:pPr>
-            <a:r>
-              <a:rPr lang="es-ES" sz="1500" dirty="0">
-                <a:solidFill>
-                  <a:srgbClr val="2F2B28"/>
-                </a:solidFill>
-              </a:rPr>
-              <a:t>Phase 6: fourteen months in use. Finance validates €1.1M a year (P28); released capacity was reassigned to complex incidents.</a:t>
-            </a:r>
-          </a:p>
-          <a:p>
-            <a:pPr marL="285750" indent="-285750">
-              <a:spcAft>
-                <a:spcPts val="400"/>
-              </a:spcAft>
-              <a:buClr>
-                <a:srgbClr val="990F3D"/>
-              </a:buClr>
-              <a:buFont typeface="Arial"/>
-              <a:buChar char="•"/>
-            </a:pPr>
-            <a:r>
-              <a:rPr lang="es-ES" sz="1500" dirty="0">
-                <a:solidFill>
-                  <a:srgbClr val="2F2B28"/>
-                </a:solidFill>
-              </a:rPr>
-              <a:t>In the funnel it sits under "In use"; on the dashboard it adds to annual net because its value is validated, not declared.</a:t>
-            </a:r>
-          </a:p>
-        </p:txBody>
-      </p:sp>
-      <p:sp>
-        <p:nvSpPr>
-          <p:cNvPr id="164" name="Caja 164"/>
+                  <a:srgbClr val="564D47"/>
+                </a:solidFill>
+              </a:rPr>
+              <a:t>It reached phase 3 and did not pass gate G3</a:t>
+            </a:r>
+          </a:p>
+        </p:txBody>
+      </p:sp>
+      <p:sp>
+        <p:nvSpPr>
+          <p:cNvPr id="148" name="Caja 148"/>
           <p:cNvSpPr/>
           <p:nvPr/>
         </p:nvSpPr>
         <p:spPr>
           <a:xfrm>
-            <a:off x="609600" y="5600000"/>
-            <a:ext cx="10972800" cy="900000"/>
+            <a:off x="681000" y="2350000"/>
+            <a:ext cx="1240000" cy="1500000"/>
           </a:xfrm>
           <a:prstGeom prst="roundRect">
             <a:avLst>
@@ -3031,7 +2333,7 @@
             </a:avLst>
           </a:prstGeom>
           <a:solidFill>
-            <a:srgbClr val="0D7680"/>
+            <a:srgbClr val="990F3D"/>
           </a:solidFill>
           <a:ln>
             <a:noFill/>
@@ -3045,12 +2347,693 @@
           <a:p>
             <a:pPr algn="ctr"/>
             <a:r>
-              <a:rPr lang="es-ES" sz="2100" b="1" dirty="0">
+              <a:rPr lang="es-ES" sz="2400" b="1" dirty="0">
                 <a:solidFill>
                   <a:srgbClr val="FFFFFF"/>
                 </a:solidFill>
               </a:rPr>
-              <a:t>IN PRODUCTION · €1.1M OF VALIDATED ANNUAL RETURN · QUARTERLY R6</a:t>
+              <a:t>F0</a:t>
+            </a:r>
+          </a:p>
+          <a:p>
+            <a:pPr algn="ctr"/>
+            <a:r>
+              <a:rPr lang="es-ES" sz="1050" dirty="0">
+                <a:solidFill>
+                  <a:srgbClr val="FFFFFF"/>
+                </a:solidFill>
+              </a:rPr>
+              <a:t>Context and constraints</a:t>
+            </a:r>
+          </a:p>
+        </p:txBody>
+      </p:sp>
+      <p:sp>
+        <p:nvSpPr>
+          <p:cNvPr id="149" name="Texto 149"/>
+          <p:cNvSpPr txBox="1"/>
+          <p:nvPr/>
+        </p:nvSpPr>
+        <p:spPr>
+          <a:xfrm>
+            <a:off x="1591000" y="3900000"/>
+            <a:ext cx="800000" cy="300000"/>
+          </a:xfrm>
+          <a:prstGeom prst="rect">
+            <a:avLst/>
+          </a:prstGeom>
+          <a:noFill/>
+        </p:spPr>
+        <p:txBody>
+          <a:bodyPr wrap="square" anchor="t" lIns="45720" rIns="45720">
+            <a:noAutofit/>
+          </a:bodyPr>
+          <a:lstStyle/>
+          <a:p>
+            <a:pPr algn="ctr"/>
+            <a:r>
+              <a:rPr lang="es-ES" sz="1200" b="1" dirty="0">
+                <a:solidFill>
+                  <a:srgbClr val="990F3D"/>
+                </a:solidFill>
+              </a:rPr>
+              <a:t>G0</a:t>
+            </a:r>
+          </a:p>
+        </p:txBody>
+      </p:sp>
+      <p:sp>
+        <p:nvSpPr>
+          <p:cNvPr id="150" name="Caja 150"/>
+          <p:cNvSpPr/>
+          <p:nvPr/>
+        </p:nvSpPr>
+        <p:spPr>
+          <a:xfrm>
+            <a:off x="2051000" y="2350000"/>
+            <a:ext cx="1240000" cy="1500000"/>
+          </a:xfrm>
+          <a:prstGeom prst="roundRect">
+            <a:avLst>
+              <a:gd name="adj" fmla="val 6000"/>
+            </a:avLst>
+          </a:prstGeom>
+          <a:solidFill>
+            <a:srgbClr val="990F3D"/>
+          </a:solidFill>
+          <a:ln>
+            <a:noFill/>
+          </a:ln>
+        </p:spPr>
+        <p:txBody>
+          <a:bodyPr wrap="square" anchor="ctr" lIns="45720" rIns="45720">
+            <a:noAutofit/>
+          </a:bodyPr>
+          <a:lstStyle/>
+          <a:p>
+            <a:pPr algn="ctr"/>
+            <a:r>
+              <a:rPr lang="es-ES" sz="2400" b="1" dirty="0">
+                <a:solidFill>
+                  <a:srgbClr val="FFFFFF"/>
+                </a:solidFill>
+              </a:rPr>
+              <a:t>F1</a:t>
+            </a:r>
+          </a:p>
+          <a:p>
+            <a:pPr algn="ctr"/>
+            <a:r>
+              <a:rPr lang="es-ES" sz="1050" dirty="0">
+                <a:solidFill>
+                  <a:srgbClr val="FFFFFF"/>
+                </a:solidFill>
+              </a:rPr>
+              <a:t>Opportunity discovery</a:t>
+            </a:r>
+          </a:p>
+        </p:txBody>
+      </p:sp>
+      <p:sp>
+        <p:nvSpPr>
+          <p:cNvPr id="151" name="Texto 151"/>
+          <p:cNvSpPr txBox="1"/>
+          <p:nvPr/>
+        </p:nvSpPr>
+        <p:spPr>
+          <a:xfrm>
+            <a:off x="2961000" y="3900000"/>
+            <a:ext cx="800000" cy="300000"/>
+          </a:xfrm>
+          <a:prstGeom prst="rect">
+            <a:avLst/>
+          </a:prstGeom>
+          <a:noFill/>
+        </p:spPr>
+        <p:txBody>
+          <a:bodyPr wrap="square" anchor="t" lIns="45720" rIns="45720">
+            <a:noAutofit/>
+          </a:bodyPr>
+          <a:lstStyle/>
+          <a:p>
+            <a:pPr algn="ctr"/>
+            <a:r>
+              <a:rPr lang="es-ES" sz="1200" b="1" dirty="0">
+                <a:solidFill>
+                  <a:srgbClr val="990F3D"/>
+                </a:solidFill>
+              </a:rPr>
+              <a:t>G1</a:t>
+            </a:r>
+          </a:p>
+        </p:txBody>
+      </p:sp>
+      <p:sp>
+        <p:nvSpPr>
+          <p:cNvPr id="152" name="Caja 152"/>
+          <p:cNvSpPr/>
+          <p:nvPr/>
+        </p:nvSpPr>
+        <p:spPr>
+          <a:xfrm>
+            <a:off x="3421000" y="2350000"/>
+            <a:ext cx="1240000" cy="1500000"/>
+          </a:xfrm>
+          <a:prstGeom prst="roundRect">
+            <a:avLst>
+              <a:gd name="adj" fmla="val 6000"/>
+            </a:avLst>
+          </a:prstGeom>
+          <a:solidFill>
+            <a:srgbClr val="990F3D"/>
+          </a:solidFill>
+          <a:ln>
+            <a:noFill/>
+          </a:ln>
+        </p:spPr>
+        <p:txBody>
+          <a:bodyPr wrap="square" anchor="ctr" lIns="45720" rIns="45720">
+            <a:noAutofit/>
+          </a:bodyPr>
+          <a:lstStyle/>
+          <a:p>
+            <a:pPr algn="ctr"/>
+            <a:r>
+              <a:rPr lang="es-ES" sz="2400" b="1" dirty="0">
+                <a:solidFill>
+                  <a:srgbClr val="FFFFFF"/>
+                </a:solidFill>
+              </a:rPr>
+              <a:t>F2</a:t>
+            </a:r>
+          </a:p>
+          <a:p>
+            <a:pPr algn="ctr"/>
+            <a:r>
+              <a:rPr lang="es-ES" sz="1050" dirty="0">
+                <a:solidFill>
+                  <a:srgbClr val="FFFFFF"/>
+                </a:solidFill>
+              </a:rPr>
+              <a:t>Value hypothesis</a:t>
+            </a:r>
+          </a:p>
+        </p:txBody>
+      </p:sp>
+      <p:sp>
+        <p:nvSpPr>
+          <p:cNvPr id="153" name="Texto 153"/>
+          <p:cNvSpPr txBox="1"/>
+          <p:nvPr/>
+        </p:nvSpPr>
+        <p:spPr>
+          <a:xfrm>
+            <a:off x="4331000" y="3900000"/>
+            <a:ext cx="800000" cy="300000"/>
+          </a:xfrm>
+          <a:prstGeom prst="rect">
+            <a:avLst/>
+          </a:prstGeom>
+          <a:noFill/>
+        </p:spPr>
+        <p:txBody>
+          <a:bodyPr wrap="square" anchor="t" lIns="45720" rIns="45720">
+            <a:noAutofit/>
+          </a:bodyPr>
+          <a:lstStyle/>
+          <a:p>
+            <a:pPr algn="ctr"/>
+            <a:r>
+              <a:rPr lang="es-ES" sz="1200" b="1" dirty="0">
+                <a:solidFill>
+                  <a:srgbClr val="990F3D"/>
+                </a:solidFill>
+              </a:rPr>
+              <a:t>G2</a:t>
+            </a:r>
+          </a:p>
+        </p:txBody>
+      </p:sp>
+      <p:sp>
+        <p:nvSpPr>
+          <p:cNvPr id="154" name="Caja 154"/>
+          <p:cNvSpPr/>
+          <p:nvPr/>
+        </p:nvSpPr>
+        <p:spPr>
+          <a:xfrm>
+            <a:off x="4791000" y="2350000"/>
+            <a:ext cx="1240000" cy="1500000"/>
+          </a:xfrm>
+          <a:prstGeom prst="roundRect">
+            <a:avLst>
+              <a:gd name="adj" fmla="val 6000"/>
+            </a:avLst>
+          </a:prstGeom>
+          <a:solidFill>
+            <a:srgbClr val="990F3D"/>
+          </a:solidFill>
+          <a:ln>
+            <a:noFill/>
+          </a:ln>
+        </p:spPr>
+        <p:txBody>
+          <a:bodyPr wrap="square" anchor="ctr" lIns="45720" rIns="45720">
+            <a:noAutofit/>
+          </a:bodyPr>
+          <a:lstStyle/>
+          <a:p>
+            <a:pPr algn="ctr"/>
+            <a:r>
+              <a:rPr lang="es-ES" sz="2400" b="1" dirty="0">
+                <a:solidFill>
+                  <a:srgbClr val="FFFFFF"/>
+                </a:solidFill>
+              </a:rPr>
+              <a:t>F3</a:t>
+            </a:r>
+          </a:p>
+          <a:p>
+            <a:pPr algn="ctr"/>
+            <a:r>
+              <a:rPr lang="es-ES" sz="1050" dirty="0">
+                <a:solidFill>
+                  <a:srgbClr val="FFFFFF"/>
+                </a:solidFill>
+              </a:rPr>
+              <a:t>Feasibility and risk</a:t>
+            </a:r>
+          </a:p>
+        </p:txBody>
+      </p:sp>
+      <p:sp>
+        <p:nvSpPr>
+          <p:cNvPr id="155" name="Texto 155"/>
+          <p:cNvSpPr txBox="1"/>
+          <p:nvPr/>
+        </p:nvSpPr>
+        <p:spPr>
+          <a:xfrm>
+            <a:off x="5701000" y="3900000"/>
+            <a:ext cx="800000" cy="300000"/>
+          </a:xfrm>
+          <a:prstGeom prst="rect">
+            <a:avLst/>
+          </a:prstGeom>
+          <a:noFill/>
+        </p:spPr>
+        <p:txBody>
+          <a:bodyPr wrap="square" anchor="t" lIns="45720" rIns="45720">
+            <a:noAutofit/>
+          </a:bodyPr>
+          <a:lstStyle/>
+          <a:p>
+            <a:pPr algn="ctr"/>
+            <a:r>
+              <a:rPr lang="es-ES" sz="1200" b="1" dirty="0">
+                <a:solidFill>
+                  <a:srgbClr val="990F3D"/>
+                </a:solidFill>
+              </a:rPr>
+              <a:t>G3</a:t>
+            </a:r>
+          </a:p>
+        </p:txBody>
+      </p:sp>
+      <p:sp>
+        <p:nvSpPr>
+          <p:cNvPr id="156" name="Caja 156"/>
+          <p:cNvSpPr/>
+          <p:nvPr/>
+        </p:nvSpPr>
+        <p:spPr>
+          <a:xfrm>
+            <a:off x="6161000" y="2350000"/>
+            <a:ext cx="1240000" cy="1500000"/>
+          </a:xfrm>
+          <a:prstGeom prst="roundRect">
+            <a:avLst>
+              <a:gd name="adj" fmla="val 6000"/>
+            </a:avLst>
+          </a:prstGeom>
+          <a:solidFill>
+            <a:srgbClr val="C9A78D"/>
+          </a:solidFill>
+          <a:ln>
+            <a:noFill/>
+          </a:ln>
+        </p:spPr>
+        <p:txBody>
+          <a:bodyPr wrap="square" anchor="ctr" lIns="45720" rIns="45720">
+            <a:noAutofit/>
+          </a:bodyPr>
+          <a:lstStyle/>
+          <a:p>
+            <a:pPr algn="ctr"/>
+            <a:r>
+              <a:rPr lang="es-ES" sz="2400" b="1" dirty="0">
+                <a:solidFill>
+                  <a:srgbClr val="564D47"/>
+                </a:solidFill>
+              </a:rPr>
+              <a:t>F4</a:t>
+            </a:r>
+          </a:p>
+          <a:p>
+            <a:pPr algn="ctr"/>
+            <a:r>
+              <a:rPr lang="es-ES" sz="1050" dirty="0">
+                <a:solidFill>
+                  <a:srgbClr val="564D47"/>
+                </a:solidFill>
+              </a:rPr>
+              <a:t>Solution design</a:t>
+            </a:r>
+          </a:p>
+        </p:txBody>
+      </p:sp>
+      <p:sp>
+        <p:nvSpPr>
+          <p:cNvPr id="157" name="Texto 157"/>
+          <p:cNvSpPr txBox="1"/>
+          <p:nvPr/>
+        </p:nvSpPr>
+        <p:spPr>
+          <a:xfrm>
+            <a:off x="7071000" y="3900000"/>
+            <a:ext cx="800000" cy="300000"/>
+          </a:xfrm>
+          <a:prstGeom prst="rect">
+            <a:avLst/>
+          </a:prstGeom>
+          <a:noFill/>
+        </p:spPr>
+        <p:txBody>
+          <a:bodyPr wrap="square" anchor="t" lIns="45720" rIns="45720">
+            <a:noAutofit/>
+          </a:bodyPr>
+          <a:lstStyle/>
+          <a:p>
+            <a:pPr algn="ctr"/>
+            <a:r>
+              <a:rPr lang="es-ES" sz="1200" b="1" dirty="0">
+                <a:solidFill>
+                  <a:srgbClr val="990F3D"/>
+                </a:solidFill>
+              </a:rPr>
+              <a:t>G4</a:t>
+            </a:r>
+          </a:p>
+        </p:txBody>
+      </p:sp>
+      <p:sp>
+        <p:nvSpPr>
+          <p:cNvPr id="158" name="Caja 158"/>
+          <p:cNvSpPr/>
+          <p:nvPr/>
+        </p:nvSpPr>
+        <p:spPr>
+          <a:xfrm>
+            <a:off x="7531000" y="2350000"/>
+            <a:ext cx="1240000" cy="1500000"/>
+          </a:xfrm>
+          <a:prstGeom prst="roundRect">
+            <a:avLst>
+              <a:gd name="adj" fmla="val 6000"/>
+            </a:avLst>
+          </a:prstGeom>
+          <a:solidFill>
+            <a:srgbClr val="C9A78D"/>
+          </a:solidFill>
+          <a:ln>
+            <a:noFill/>
+          </a:ln>
+        </p:spPr>
+        <p:txBody>
+          <a:bodyPr wrap="square" anchor="ctr" lIns="45720" rIns="45720">
+            <a:noAutofit/>
+          </a:bodyPr>
+          <a:lstStyle/>
+          <a:p>
+            <a:pPr algn="ctr"/>
+            <a:r>
+              <a:rPr lang="es-ES" sz="2400" b="1" dirty="0">
+                <a:solidFill>
+                  <a:srgbClr val="564D47"/>
+                </a:solidFill>
+              </a:rPr>
+              <a:t>F5</a:t>
+            </a:r>
+          </a:p>
+          <a:p>
+            <a:pPr algn="ctr"/>
+            <a:r>
+              <a:rPr lang="es-ES" sz="1050" dirty="0">
+                <a:solidFill>
+                  <a:srgbClr val="564D47"/>
+                </a:solidFill>
+              </a:rPr>
+              <a:t>Delivery and validation</a:t>
+            </a:r>
+          </a:p>
+        </p:txBody>
+      </p:sp>
+      <p:sp>
+        <p:nvSpPr>
+          <p:cNvPr id="159" name="Texto 159"/>
+          <p:cNvSpPr txBox="1"/>
+          <p:nvPr/>
+        </p:nvSpPr>
+        <p:spPr>
+          <a:xfrm>
+            <a:off x="8441000" y="3900000"/>
+            <a:ext cx="800000" cy="300000"/>
+          </a:xfrm>
+          <a:prstGeom prst="rect">
+            <a:avLst/>
+          </a:prstGeom>
+          <a:noFill/>
+        </p:spPr>
+        <p:txBody>
+          <a:bodyPr wrap="square" anchor="t" lIns="45720" rIns="45720">
+            <a:noAutofit/>
+          </a:bodyPr>
+          <a:lstStyle/>
+          <a:p>
+            <a:pPr algn="ctr"/>
+            <a:r>
+              <a:rPr lang="es-ES" sz="1200" b="1" dirty="0">
+                <a:solidFill>
+                  <a:srgbClr val="990F3D"/>
+                </a:solidFill>
+              </a:rPr>
+              <a:t>G5</a:t>
+            </a:r>
+          </a:p>
+        </p:txBody>
+      </p:sp>
+      <p:sp>
+        <p:nvSpPr>
+          <p:cNvPr id="160" name="Caja 160"/>
+          <p:cNvSpPr/>
+          <p:nvPr/>
+        </p:nvSpPr>
+        <p:spPr>
+          <a:xfrm>
+            <a:off x="8901000" y="2350000"/>
+            <a:ext cx="1240000" cy="1500000"/>
+          </a:xfrm>
+          <a:prstGeom prst="roundRect">
+            <a:avLst>
+              <a:gd name="adj" fmla="val 6000"/>
+            </a:avLst>
+          </a:prstGeom>
+          <a:solidFill>
+            <a:srgbClr val="C9A78D"/>
+          </a:solidFill>
+          <a:ln>
+            <a:noFill/>
+          </a:ln>
+        </p:spPr>
+        <p:txBody>
+          <a:bodyPr wrap="square" anchor="ctr" lIns="45720" rIns="45720">
+            <a:noAutofit/>
+          </a:bodyPr>
+          <a:lstStyle/>
+          <a:p>
+            <a:pPr algn="ctr"/>
+            <a:r>
+              <a:rPr lang="es-ES" sz="2400" b="1" dirty="0">
+                <a:solidFill>
+                  <a:srgbClr val="564D47"/>
+                </a:solidFill>
+              </a:rPr>
+              <a:t>F6</a:t>
+            </a:r>
+          </a:p>
+          <a:p>
+            <a:pPr algn="ctr"/>
+            <a:r>
+              <a:rPr lang="es-ES" sz="1050" dirty="0">
+                <a:solidFill>
+                  <a:srgbClr val="564D47"/>
+                </a:solidFill>
+              </a:rPr>
+              <a:t>Operation and governance</a:t>
+            </a:r>
+          </a:p>
+        </p:txBody>
+      </p:sp>
+      <p:sp>
+        <p:nvSpPr>
+          <p:cNvPr id="161" name="Texto 161"/>
+          <p:cNvSpPr txBox="1"/>
+          <p:nvPr/>
+        </p:nvSpPr>
+        <p:spPr>
+          <a:xfrm>
+            <a:off x="9811000" y="3900000"/>
+            <a:ext cx="800000" cy="300000"/>
+          </a:xfrm>
+          <a:prstGeom prst="rect">
+            <a:avLst/>
+          </a:prstGeom>
+          <a:noFill/>
+        </p:spPr>
+        <p:txBody>
+          <a:bodyPr wrap="square" anchor="t" lIns="45720" rIns="45720">
+            <a:noAutofit/>
+          </a:bodyPr>
+          <a:lstStyle/>
+          <a:p>
+            <a:pPr algn="ctr"/>
+            <a:r>
+              <a:rPr lang="es-ES" sz="1200" b="1" dirty="0">
+                <a:solidFill>
+                  <a:srgbClr val="990F3D"/>
+                </a:solidFill>
+              </a:rPr>
+              <a:t>R6</a:t>
+            </a:r>
+          </a:p>
+        </p:txBody>
+      </p:sp>
+      <p:sp>
+        <p:nvSpPr>
+          <p:cNvPr id="162" name="Caja 162"/>
+          <p:cNvSpPr/>
+          <p:nvPr/>
+        </p:nvSpPr>
+        <p:spPr>
+          <a:xfrm>
+            <a:off x="10271000" y="2350000"/>
+            <a:ext cx="1240000" cy="1500000"/>
+          </a:xfrm>
+          <a:prstGeom prst="roundRect">
+            <a:avLst>
+              <a:gd name="adj" fmla="val 6000"/>
+            </a:avLst>
+          </a:prstGeom>
+          <a:solidFill>
+            <a:srgbClr val="C9A78D"/>
+          </a:solidFill>
+          <a:ln>
+            <a:noFill/>
+          </a:ln>
+        </p:spPr>
+        <p:txBody>
+          <a:bodyPr wrap="square" anchor="ctr" lIns="45720" rIns="45720">
+            <a:noAutofit/>
+          </a:bodyPr>
+          <a:lstStyle/>
+          <a:p>
+            <a:pPr algn="ctr"/>
+            <a:r>
+              <a:rPr lang="es-ES" sz="2400" b="1" dirty="0">
+                <a:solidFill>
+                  <a:srgbClr val="564D47"/>
+                </a:solidFill>
+              </a:rPr>
+              <a:t>F7</a:t>
+            </a:r>
+          </a:p>
+          <a:p>
+            <a:pPr algn="ctr"/>
+            <a:r>
+              <a:rPr lang="es-ES" sz="1050" dirty="0">
+                <a:solidFill>
+                  <a:srgbClr val="564D47"/>
+                </a:solidFill>
+              </a:rPr>
+              <a:t>Evolution or retirement</a:t>
+            </a:r>
+          </a:p>
+        </p:txBody>
+      </p:sp>
+      <p:sp>
+        <p:nvSpPr>
+          <p:cNvPr id="163" name="Texto 163"/>
+          <p:cNvSpPr txBox="1"/>
+          <p:nvPr/>
+        </p:nvSpPr>
+        <p:spPr>
+          <a:xfrm>
+            <a:off x="11181000" y="3900000"/>
+            <a:ext cx="800000" cy="300000"/>
+          </a:xfrm>
+          <a:prstGeom prst="rect">
+            <a:avLst/>
+          </a:prstGeom>
+          <a:noFill/>
+        </p:spPr>
+        <p:txBody>
+          <a:bodyPr wrap="square" anchor="t" lIns="45720" rIns="45720">
+            <a:noAutofit/>
+          </a:bodyPr>
+          <a:lstStyle/>
+          <a:p>
+            <a:pPr algn="ctr"/>
+            <a:r>
+              <a:rPr lang="es-ES" sz="1200" b="1" dirty="0">
+                <a:solidFill>
+                  <a:srgbClr val="990F3D"/>
+                </a:solidFill>
+              </a:rPr>
+              <a:t>G7</a:t>
+            </a:r>
+          </a:p>
+        </p:txBody>
+      </p:sp>
+      <p:sp>
+        <p:nvSpPr>
+          <p:cNvPr id="164" name="Texto 164"/>
+          <p:cNvSpPr txBox="1"/>
+          <p:nvPr/>
+        </p:nvSpPr>
+        <p:spPr>
+          <a:xfrm>
+            <a:off x="609600" y="4430000"/>
+            <a:ext cx="10972800" cy="600000"/>
+          </a:xfrm>
+          <a:prstGeom prst="rect">
+            <a:avLst/>
+          </a:prstGeom>
+          <a:noFill/>
+        </p:spPr>
+        <p:txBody>
+          <a:bodyPr wrap="square" anchor="t" lIns="45720" rIns="45720">
+            <a:noAutofit/>
+          </a:bodyPr>
+          <a:lstStyle/>
+          <a:p>
+            <a:pPr algn="ctr"/>
+            <a:r>
+              <a:rPr lang="es-ES" sz="2200" b="1" dirty="0">
+                <a:solidFill>
+                  <a:srgbClr val="990F3D"/>
+                </a:solidFill>
+              </a:rPr>
+              <a:t>STOPPED AT G3 · it leaves the funnel as "Discarded", with its reason</a:t>
             </a:r>
           </a:p>
         </p:txBody>
@@ -3090,7 +3073,7 @@
       </p:grpSpPr>
       <p:sp>
         <p:nvSpPr>
-          <p:cNvPr id="185" name="Marca"/>
+          <p:cNvPr id="172" name="Marca"/>
           <p:cNvSpPr/>
           <p:nvPr/>
         </p:nvSpPr>
@@ -3114,7 +3097,7 @@
       </p:sp>
       <p:sp>
         <p:nvSpPr>
-          <p:cNvPr id="186" name="Texto 186"/>
+          <p:cNvPr id="173" name="Texto 173"/>
           <p:cNvSpPr txBox="1"/>
           <p:nvPr/>
         </p:nvSpPr>
@@ -3148,7 +3131,7 @@
       </p:sp>
       <p:sp>
         <p:nvSpPr>
-          <p:cNvPr id="187" name="Texto 187"/>
+          <p:cNvPr id="174" name="Texto 174"/>
           <p:cNvSpPr txBox="1"/>
           <p:nvPr/>
         </p:nvSpPr>
@@ -3175,21 +3158,21 @@
                   <a:srgbClr val="990F3D"/>
                 </a:solidFill>
               </a:rPr>
-              <a:t>Initiative 2, on the lifecycle</a:t>
-            </a:r>
-          </a:p>
-        </p:txBody>
-      </p:sp>
-      <p:sp>
-        <p:nvSpPr>
-          <p:cNvPr id="188" name="Texto 188"/>
+              <a:t>Example 2 · When an initiative reaches production</a:t>
+            </a:r>
+          </a:p>
+        </p:txBody>
+      </p:sp>
+      <p:sp>
+        <p:nvSpPr>
+          <p:cNvPr id="169" name="Texto 169"/>
           <p:cNvSpPr txBox="1"/>
           <p:nvPr/>
         </p:nvSpPr>
         <p:spPr>
           <a:xfrm>
             <a:off x="609600" y="1330000"/>
-            <a:ext cx="10972800" cy="450000"/>
+            <a:ext cx="10972800" cy="500000"/>
           </a:xfrm>
           <a:prstGeom prst="rect">
             <a:avLst/>
@@ -3204,26 +3187,169 @@
           <a:p>
             <a:pPr algn="l"/>
             <a:r>
+              <a:rPr lang="es-ES" sz="1700" b="1" dirty="0">
+                <a:solidFill>
+                  <a:srgbClr val="2F2B28"/>
+                </a:solidFill>
+              </a:rPr>
+              <a:t>First-line IT incident response assistant</a:t>
+            </a:r>
+          </a:p>
+        </p:txBody>
+      </p:sp>
+      <p:sp>
+        <p:nvSpPr>
+          <p:cNvPr id="170" name="Texto 170"/>
+          <p:cNvSpPr txBox="1"/>
+          <p:nvPr/>
+        </p:nvSpPr>
+        <p:spPr>
+          <a:xfrm>
+            <a:off x="609600" y="1900000"/>
+            <a:ext cx="10972800" cy="3550000"/>
+          </a:xfrm>
+          <a:prstGeom prst="rect">
+            <a:avLst/>
+          </a:prstGeom>
+          <a:noFill/>
+        </p:spPr>
+        <p:txBody>
+          <a:bodyPr wrap="square" anchor="t" lIns="45720" rIns="45720">
+            <a:noAutofit/>
+          </a:bodyPr>
+          <a:lstStyle/>
+          <a:p>
+            <a:pPr marL="285750" indent="-285750">
+              <a:spcAft>
+                <a:spcPts val="400"/>
+              </a:spcAft>
+              <a:buClr>
+                <a:srgbClr val="990F3D"/>
+              </a:buClr>
+              <a:buFont typeface="Arial"/>
+              <a:buChar char="•"/>
+            </a:pPr>
+            <a:r>
               <a:rPr lang="es-ES" sz="1500" dirty="0">
                 <a:solidFill>
-                  <a:srgbClr val="564D47"/>
-                </a:solidFill>
-              </a:rPr>
-              <a:t>It went through phases 0 to 6 and remains in use; phase 7 will come with G7</a:t>
-            </a:r>
-          </a:p>
-        </p:txBody>
-      </p:sp>
-      <p:sp>
-        <p:nvSpPr>
-          <p:cNvPr id="168" name="Caja 168"/>
+                  <a:srgbClr val="2F2B28"/>
+                </a:solidFill>
+              </a:rPr>
+              <a:t>Phases 0 and 1: IT sponsors it; against the non-AI alternative (more staff), the operations sphere with Optimise ambition is proposed (P07).</a:t>
+            </a:r>
+          </a:p>
+          <a:p>
+            <a:pPr marL="285750" indent="-285750">
+              <a:spcAft>
+                <a:spcPts val="400"/>
+              </a:spcAft>
+              <a:buClr>
+                <a:srgbClr val="990F3D"/>
+              </a:buClr>
+              <a:buFont typeface="Arial"/>
+              <a:buChar char="•"/>
+            </a:pPr>
+            <a:r>
+              <a:rPr lang="es-ES" sz="1500" dirty="0">
+                <a:solidFill>
+                  <a:srgbClr val="2F2B28"/>
+                </a:solidFill>
+              </a:rPr>
+              <a:t>Phase 2: hypothesis of 30% less resolution time for simple incidents; the controlled pilot yields 32%.</a:t>
+            </a:r>
+          </a:p>
+          <a:p>
+            <a:pPr marL="285750" indent="-285750">
+              <a:spcAft>
+                <a:spcPts val="400"/>
+              </a:spcAft>
+              <a:buClr>
+                <a:srgbClr val="990F3D"/>
+              </a:buClr>
+              <a:buFont typeface="Arial"/>
+              <a:buChar char="•"/>
+            </a:pPr>
+            <a:r>
+              <a:rPr lang="es-ES" sz="1500" dirty="0">
+                <a:solidFill>
+                  <a:srgbClr val="2F2B28"/>
+                </a:solidFill>
+              </a:rPr>
+              <a:t>Phase 3: no relevant bias, medium residual risk accepted by the right body (P12), supplier assessed (P14). G3, Proceed.</a:t>
+            </a:r>
+          </a:p>
+          <a:p>
+            <a:pPr marL="285750" indent="-285750">
+              <a:spcAft>
+                <a:spcPts val="400"/>
+              </a:spcAft>
+              <a:buClr>
+                <a:srgbClr val="990F3D"/>
+              </a:buClr>
+              <a:buFont typeface="Arial"/>
+              <a:buChar char="•"/>
+            </a:pPr>
+            <a:r>
+              <a:rPr lang="es-ES" sz="1500" dirty="0">
+                <a:solidFill>
+                  <a:srgbClr val="2F2B28"/>
+                </a:solidFill>
+              </a:rPr>
+              <a:t>Phases 4 and 5: mandatory human oversight above a severity level (P17), tested rollback (P19) and go-live sign-off (P23).</a:t>
+            </a:r>
+          </a:p>
+          <a:p>
+            <a:pPr marL="285750" indent="-285750">
+              <a:spcAft>
+                <a:spcPts val="400"/>
+              </a:spcAft>
+              <a:buClr>
+                <a:srgbClr val="990F3D"/>
+              </a:buClr>
+              <a:buFont typeface="Arial"/>
+              <a:buChar char="•"/>
+            </a:pPr>
+            <a:r>
+              <a:rPr lang="es-ES" sz="1500" dirty="0">
+                <a:solidFill>
+                  <a:srgbClr val="2F2B28"/>
+                </a:solidFill>
+              </a:rPr>
+              <a:t>Phase 6: fourteen months in use. Finance validates €1.1M a year (P28); released capacity was reassigned to complex incidents.</a:t>
+            </a:r>
+          </a:p>
+          <a:p>
+            <a:pPr marL="285750" indent="-285750">
+              <a:spcAft>
+                <a:spcPts val="400"/>
+              </a:spcAft>
+              <a:buClr>
+                <a:srgbClr val="990F3D"/>
+              </a:buClr>
+              <a:buFont typeface="Arial"/>
+              <a:buChar char="•"/>
+            </a:pPr>
+            <a:r>
+              <a:rPr lang="es-ES" sz="1500" dirty="0">
+                <a:solidFill>
+                  <a:srgbClr val="2F2B28"/>
+                </a:solidFill>
+              </a:rPr>
+              <a:t>In the funnel it sits under "In use"; on the dashboard it adds to annual net because its value is validated, not declared.</a:t>
+            </a:r>
+          </a:p>
+        </p:txBody>
+      </p:sp>
+      <p:sp>
+        <p:nvSpPr>
+          <p:cNvPr id="171" name="Caja 171"/>
           <p:cNvSpPr/>
           <p:nvPr/>
         </p:nvSpPr>
         <p:spPr>
           <a:xfrm>
-            <a:off x="681000" y="2350000"/>
-            <a:ext cx="1240000" cy="1500000"/>
+            <a:off x="609600" y="5600000"/>
+            <a:ext cx="10972800" cy="900000"/>
           </a:xfrm>
           <a:prstGeom prst="roundRect">
             <a:avLst>
@@ -3245,693 +3371,12 @@
           <a:p>
             <a:pPr algn="ctr"/>
             <a:r>
-              <a:rPr lang="es-ES" sz="2400" b="1" dirty="0">
+              <a:rPr lang="es-ES" sz="2100" b="1" dirty="0">
                 <a:solidFill>
                   <a:srgbClr val="FFFFFF"/>
                 </a:solidFill>
               </a:rPr>
-              <a:t>F0</a:t>
-            </a:r>
-          </a:p>
-          <a:p>
-            <a:pPr algn="ctr"/>
-            <a:r>
-              <a:rPr lang="es-ES" sz="1050" dirty="0">
-                <a:solidFill>
-                  <a:srgbClr val="FFFFFF"/>
-                </a:solidFill>
-              </a:rPr>
-              <a:t>Context and constraints</a:t>
-            </a:r>
-          </a:p>
-        </p:txBody>
-      </p:sp>
-      <p:sp>
-        <p:nvSpPr>
-          <p:cNvPr id="169" name="Texto 169"/>
-          <p:cNvSpPr txBox="1"/>
-          <p:nvPr/>
-        </p:nvSpPr>
-        <p:spPr>
-          <a:xfrm>
-            <a:off x="1591000" y="3900000"/>
-            <a:ext cx="800000" cy="300000"/>
-          </a:xfrm>
-          <a:prstGeom prst="rect">
-            <a:avLst/>
-          </a:prstGeom>
-          <a:noFill/>
-        </p:spPr>
-        <p:txBody>
-          <a:bodyPr wrap="square" anchor="t" lIns="45720" rIns="45720">
-            <a:noAutofit/>
-          </a:bodyPr>
-          <a:lstStyle/>
-          <a:p>
-            <a:pPr algn="ctr"/>
-            <a:r>
-              <a:rPr lang="es-ES" sz="1200" b="1" dirty="0">
-                <a:solidFill>
-                  <a:srgbClr val="990F3D"/>
-                </a:solidFill>
-              </a:rPr>
-              <a:t>G0</a:t>
-            </a:r>
-          </a:p>
-        </p:txBody>
-      </p:sp>
-      <p:sp>
-        <p:nvSpPr>
-          <p:cNvPr id="170" name="Caja 170"/>
-          <p:cNvSpPr/>
-          <p:nvPr/>
-        </p:nvSpPr>
-        <p:spPr>
-          <a:xfrm>
-            <a:off x="2051000" y="2350000"/>
-            <a:ext cx="1240000" cy="1500000"/>
-          </a:xfrm>
-          <a:prstGeom prst="roundRect">
-            <a:avLst>
-              <a:gd name="adj" fmla="val 6000"/>
-            </a:avLst>
-          </a:prstGeom>
-          <a:solidFill>
-            <a:srgbClr val="0D7680"/>
-          </a:solidFill>
-          <a:ln>
-            <a:noFill/>
-          </a:ln>
-        </p:spPr>
-        <p:txBody>
-          <a:bodyPr wrap="square" anchor="ctr" lIns="45720" rIns="45720">
-            <a:noAutofit/>
-          </a:bodyPr>
-          <a:lstStyle/>
-          <a:p>
-            <a:pPr algn="ctr"/>
-            <a:r>
-              <a:rPr lang="es-ES" sz="2400" b="1" dirty="0">
-                <a:solidFill>
-                  <a:srgbClr val="FFFFFF"/>
-                </a:solidFill>
-              </a:rPr>
-              <a:t>F1</a:t>
-            </a:r>
-          </a:p>
-          <a:p>
-            <a:pPr algn="ctr"/>
-            <a:r>
-              <a:rPr lang="es-ES" sz="1050" dirty="0">
-                <a:solidFill>
-                  <a:srgbClr val="FFFFFF"/>
-                </a:solidFill>
-              </a:rPr>
-              <a:t>Opportunity discovery</a:t>
-            </a:r>
-          </a:p>
-        </p:txBody>
-      </p:sp>
-      <p:sp>
-        <p:nvSpPr>
-          <p:cNvPr id="171" name="Texto 171"/>
-          <p:cNvSpPr txBox="1"/>
-          <p:nvPr/>
-        </p:nvSpPr>
-        <p:spPr>
-          <a:xfrm>
-            <a:off x="2961000" y="3900000"/>
-            <a:ext cx="800000" cy="300000"/>
-          </a:xfrm>
-          <a:prstGeom prst="rect">
-            <a:avLst/>
-          </a:prstGeom>
-          <a:noFill/>
-        </p:spPr>
-        <p:txBody>
-          <a:bodyPr wrap="square" anchor="t" lIns="45720" rIns="45720">
-            <a:noAutofit/>
-          </a:bodyPr>
-          <a:lstStyle/>
-          <a:p>
-            <a:pPr algn="ctr"/>
-            <a:r>
-              <a:rPr lang="es-ES" sz="1200" b="1" dirty="0">
-                <a:solidFill>
-                  <a:srgbClr val="990F3D"/>
-                </a:solidFill>
-              </a:rPr>
-              <a:t>G1</a:t>
-            </a:r>
-          </a:p>
-        </p:txBody>
-      </p:sp>
-      <p:sp>
-        <p:nvSpPr>
-          <p:cNvPr id="172" name="Caja 172"/>
-          <p:cNvSpPr/>
-          <p:nvPr/>
-        </p:nvSpPr>
-        <p:spPr>
-          <a:xfrm>
-            <a:off x="3421000" y="2350000"/>
-            <a:ext cx="1240000" cy="1500000"/>
-          </a:xfrm>
-          <a:prstGeom prst="roundRect">
-            <a:avLst>
-              <a:gd name="adj" fmla="val 6000"/>
-            </a:avLst>
-          </a:prstGeom>
-          <a:solidFill>
-            <a:srgbClr val="0D7680"/>
-          </a:solidFill>
-          <a:ln>
-            <a:noFill/>
-          </a:ln>
-        </p:spPr>
-        <p:txBody>
-          <a:bodyPr wrap="square" anchor="ctr" lIns="45720" rIns="45720">
-            <a:noAutofit/>
-          </a:bodyPr>
-          <a:lstStyle/>
-          <a:p>
-            <a:pPr algn="ctr"/>
-            <a:r>
-              <a:rPr lang="es-ES" sz="2400" b="1" dirty="0">
-                <a:solidFill>
-                  <a:srgbClr val="FFFFFF"/>
-                </a:solidFill>
-              </a:rPr>
-              <a:t>F2</a:t>
-            </a:r>
-          </a:p>
-          <a:p>
-            <a:pPr algn="ctr"/>
-            <a:r>
-              <a:rPr lang="es-ES" sz="1050" dirty="0">
-                <a:solidFill>
-                  <a:srgbClr val="FFFFFF"/>
-                </a:solidFill>
-              </a:rPr>
-              <a:t>Value hypothesis</a:t>
-            </a:r>
-          </a:p>
-        </p:txBody>
-      </p:sp>
-      <p:sp>
-        <p:nvSpPr>
-          <p:cNvPr id="173" name="Texto 173"/>
-          <p:cNvSpPr txBox="1"/>
-          <p:nvPr/>
-        </p:nvSpPr>
-        <p:spPr>
-          <a:xfrm>
-            <a:off x="4331000" y="3900000"/>
-            <a:ext cx="800000" cy="300000"/>
-          </a:xfrm>
-          <a:prstGeom prst="rect">
-            <a:avLst/>
-          </a:prstGeom>
-          <a:noFill/>
-        </p:spPr>
-        <p:txBody>
-          <a:bodyPr wrap="square" anchor="t" lIns="45720" rIns="45720">
-            <a:noAutofit/>
-          </a:bodyPr>
-          <a:lstStyle/>
-          <a:p>
-            <a:pPr algn="ctr"/>
-            <a:r>
-              <a:rPr lang="es-ES" sz="1200" b="1" dirty="0">
-                <a:solidFill>
-                  <a:srgbClr val="990F3D"/>
-                </a:solidFill>
-              </a:rPr>
-              <a:t>G2</a:t>
-            </a:r>
-          </a:p>
-        </p:txBody>
-      </p:sp>
-      <p:sp>
-        <p:nvSpPr>
-          <p:cNvPr id="174" name="Caja 174"/>
-          <p:cNvSpPr/>
-          <p:nvPr/>
-        </p:nvSpPr>
-        <p:spPr>
-          <a:xfrm>
-            <a:off x="4791000" y="2350000"/>
-            <a:ext cx="1240000" cy="1500000"/>
-          </a:xfrm>
-          <a:prstGeom prst="roundRect">
-            <a:avLst>
-              <a:gd name="adj" fmla="val 6000"/>
-            </a:avLst>
-          </a:prstGeom>
-          <a:solidFill>
-            <a:srgbClr val="0D7680"/>
-          </a:solidFill>
-          <a:ln>
-            <a:noFill/>
-          </a:ln>
-        </p:spPr>
-        <p:txBody>
-          <a:bodyPr wrap="square" anchor="ctr" lIns="45720" rIns="45720">
-            <a:noAutofit/>
-          </a:bodyPr>
-          <a:lstStyle/>
-          <a:p>
-            <a:pPr algn="ctr"/>
-            <a:r>
-              <a:rPr lang="es-ES" sz="2400" b="1" dirty="0">
-                <a:solidFill>
-                  <a:srgbClr val="FFFFFF"/>
-                </a:solidFill>
-              </a:rPr>
-              <a:t>F3</a:t>
-            </a:r>
-          </a:p>
-          <a:p>
-            <a:pPr algn="ctr"/>
-            <a:r>
-              <a:rPr lang="es-ES" sz="1050" dirty="0">
-                <a:solidFill>
-                  <a:srgbClr val="FFFFFF"/>
-                </a:solidFill>
-              </a:rPr>
-              <a:t>Feasibility and risk</a:t>
-            </a:r>
-          </a:p>
-        </p:txBody>
-      </p:sp>
-      <p:sp>
-        <p:nvSpPr>
-          <p:cNvPr id="175" name="Texto 175"/>
-          <p:cNvSpPr txBox="1"/>
-          <p:nvPr/>
-        </p:nvSpPr>
-        <p:spPr>
-          <a:xfrm>
-            <a:off x="5701000" y="3900000"/>
-            <a:ext cx="800000" cy="300000"/>
-          </a:xfrm>
-          <a:prstGeom prst="rect">
-            <a:avLst/>
-          </a:prstGeom>
-          <a:noFill/>
-        </p:spPr>
-        <p:txBody>
-          <a:bodyPr wrap="square" anchor="t" lIns="45720" rIns="45720">
-            <a:noAutofit/>
-          </a:bodyPr>
-          <a:lstStyle/>
-          <a:p>
-            <a:pPr algn="ctr"/>
-            <a:r>
-              <a:rPr lang="es-ES" sz="1200" b="1" dirty="0">
-                <a:solidFill>
-                  <a:srgbClr val="990F3D"/>
-                </a:solidFill>
-              </a:rPr>
-              <a:t>G3</a:t>
-            </a:r>
-          </a:p>
-        </p:txBody>
-      </p:sp>
-      <p:sp>
-        <p:nvSpPr>
-          <p:cNvPr id="176" name="Caja 176"/>
-          <p:cNvSpPr/>
-          <p:nvPr/>
-        </p:nvSpPr>
-        <p:spPr>
-          <a:xfrm>
-            <a:off x="6161000" y="2350000"/>
-            <a:ext cx="1240000" cy="1500000"/>
-          </a:xfrm>
-          <a:prstGeom prst="roundRect">
-            <a:avLst>
-              <a:gd name="adj" fmla="val 6000"/>
-            </a:avLst>
-          </a:prstGeom>
-          <a:solidFill>
-            <a:srgbClr val="0D7680"/>
-          </a:solidFill>
-          <a:ln>
-            <a:noFill/>
-          </a:ln>
-        </p:spPr>
-        <p:txBody>
-          <a:bodyPr wrap="square" anchor="ctr" lIns="45720" rIns="45720">
-            <a:noAutofit/>
-          </a:bodyPr>
-          <a:lstStyle/>
-          <a:p>
-            <a:pPr algn="ctr"/>
-            <a:r>
-              <a:rPr lang="es-ES" sz="2400" b="1" dirty="0">
-                <a:solidFill>
-                  <a:srgbClr val="FFFFFF"/>
-                </a:solidFill>
-              </a:rPr>
-              <a:t>F4</a:t>
-            </a:r>
-          </a:p>
-          <a:p>
-            <a:pPr algn="ctr"/>
-            <a:r>
-              <a:rPr lang="es-ES" sz="1050" dirty="0">
-                <a:solidFill>
-                  <a:srgbClr val="FFFFFF"/>
-                </a:solidFill>
-              </a:rPr>
-              <a:t>Solution design</a:t>
-            </a:r>
-          </a:p>
-        </p:txBody>
-      </p:sp>
-      <p:sp>
-        <p:nvSpPr>
-          <p:cNvPr id="177" name="Texto 177"/>
-          <p:cNvSpPr txBox="1"/>
-          <p:nvPr/>
-        </p:nvSpPr>
-        <p:spPr>
-          <a:xfrm>
-            <a:off x="7071000" y="3900000"/>
-            <a:ext cx="800000" cy="300000"/>
-          </a:xfrm>
-          <a:prstGeom prst="rect">
-            <a:avLst/>
-          </a:prstGeom>
-          <a:noFill/>
-        </p:spPr>
-        <p:txBody>
-          <a:bodyPr wrap="square" anchor="t" lIns="45720" rIns="45720">
-            <a:noAutofit/>
-          </a:bodyPr>
-          <a:lstStyle/>
-          <a:p>
-            <a:pPr algn="ctr"/>
-            <a:r>
-              <a:rPr lang="es-ES" sz="1200" b="1" dirty="0">
-                <a:solidFill>
-                  <a:srgbClr val="990F3D"/>
-                </a:solidFill>
-              </a:rPr>
-              <a:t>G4</a:t>
-            </a:r>
-          </a:p>
-        </p:txBody>
-      </p:sp>
-      <p:sp>
-        <p:nvSpPr>
-          <p:cNvPr id="178" name="Caja 178"/>
-          <p:cNvSpPr/>
-          <p:nvPr/>
-        </p:nvSpPr>
-        <p:spPr>
-          <a:xfrm>
-            <a:off x="7531000" y="2350000"/>
-            <a:ext cx="1240000" cy="1500000"/>
-          </a:xfrm>
-          <a:prstGeom prst="roundRect">
-            <a:avLst>
-              <a:gd name="adj" fmla="val 6000"/>
-            </a:avLst>
-          </a:prstGeom>
-          <a:solidFill>
-            <a:srgbClr val="0D7680"/>
-          </a:solidFill>
-          <a:ln>
-            <a:noFill/>
-          </a:ln>
-        </p:spPr>
-        <p:txBody>
-          <a:bodyPr wrap="square" anchor="ctr" lIns="45720" rIns="45720">
-            <a:noAutofit/>
-          </a:bodyPr>
-          <a:lstStyle/>
-          <a:p>
-            <a:pPr algn="ctr"/>
-            <a:r>
-              <a:rPr lang="es-ES" sz="2400" b="1" dirty="0">
-                <a:solidFill>
-                  <a:srgbClr val="FFFFFF"/>
-                </a:solidFill>
-              </a:rPr>
-              <a:t>F5</a:t>
-            </a:r>
-          </a:p>
-          <a:p>
-            <a:pPr algn="ctr"/>
-            <a:r>
-              <a:rPr lang="es-ES" sz="1050" dirty="0">
-                <a:solidFill>
-                  <a:srgbClr val="FFFFFF"/>
-                </a:solidFill>
-              </a:rPr>
-              <a:t>Delivery and validation</a:t>
-            </a:r>
-          </a:p>
-        </p:txBody>
-      </p:sp>
-      <p:sp>
-        <p:nvSpPr>
-          <p:cNvPr id="179" name="Texto 179"/>
-          <p:cNvSpPr txBox="1"/>
-          <p:nvPr/>
-        </p:nvSpPr>
-        <p:spPr>
-          <a:xfrm>
-            <a:off x="8441000" y="3900000"/>
-            <a:ext cx="800000" cy="300000"/>
-          </a:xfrm>
-          <a:prstGeom prst="rect">
-            <a:avLst/>
-          </a:prstGeom>
-          <a:noFill/>
-        </p:spPr>
-        <p:txBody>
-          <a:bodyPr wrap="square" anchor="t" lIns="45720" rIns="45720">
-            <a:noAutofit/>
-          </a:bodyPr>
-          <a:lstStyle/>
-          <a:p>
-            <a:pPr algn="ctr"/>
-            <a:r>
-              <a:rPr lang="es-ES" sz="1200" b="1" dirty="0">
-                <a:solidFill>
-                  <a:srgbClr val="990F3D"/>
-                </a:solidFill>
-              </a:rPr>
-              <a:t>G5</a:t>
-            </a:r>
-          </a:p>
-        </p:txBody>
-      </p:sp>
-      <p:sp>
-        <p:nvSpPr>
-          <p:cNvPr id="180" name="Caja 180"/>
-          <p:cNvSpPr/>
-          <p:nvPr/>
-        </p:nvSpPr>
-        <p:spPr>
-          <a:xfrm>
-            <a:off x="8901000" y="2350000"/>
-            <a:ext cx="1240000" cy="1500000"/>
-          </a:xfrm>
-          <a:prstGeom prst="roundRect">
-            <a:avLst>
-              <a:gd name="adj" fmla="val 6000"/>
-            </a:avLst>
-          </a:prstGeom>
-          <a:solidFill>
-            <a:srgbClr val="0D7680"/>
-          </a:solidFill>
-          <a:ln>
-            <a:noFill/>
-          </a:ln>
-        </p:spPr>
-        <p:txBody>
-          <a:bodyPr wrap="square" anchor="ctr" lIns="45720" rIns="45720">
-            <a:noAutofit/>
-          </a:bodyPr>
-          <a:lstStyle/>
-          <a:p>
-            <a:pPr algn="ctr"/>
-            <a:r>
-              <a:rPr lang="es-ES" sz="2400" b="1" dirty="0">
-                <a:solidFill>
-                  <a:srgbClr val="FFFFFF"/>
-                </a:solidFill>
-              </a:rPr>
-              <a:t>F6</a:t>
-            </a:r>
-          </a:p>
-          <a:p>
-            <a:pPr algn="ctr"/>
-            <a:r>
-              <a:rPr lang="es-ES" sz="1050" dirty="0">
-                <a:solidFill>
-                  <a:srgbClr val="FFFFFF"/>
-                </a:solidFill>
-              </a:rPr>
-              <a:t>Operation and governance</a:t>
-            </a:r>
-          </a:p>
-        </p:txBody>
-      </p:sp>
-      <p:sp>
-        <p:nvSpPr>
-          <p:cNvPr id="181" name="Texto 181"/>
-          <p:cNvSpPr txBox="1"/>
-          <p:nvPr/>
-        </p:nvSpPr>
-        <p:spPr>
-          <a:xfrm>
-            <a:off x="9811000" y="3900000"/>
-            <a:ext cx="800000" cy="300000"/>
-          </a:xfrm>
-          <a:prstGeom prst="rect">
-            <a:avLst/>
-          </a:prstGeom>
-          <a:noFill/>
-        </p:spPr>
-        <p:txBody>
-          <a:bodyPr wrap="square" anchor="t" lIns="45720" rIns="45720">
-            <a:noAutofit/>
-          </a:bodyPr>
-          <a:lstStyle/>
-          <a:p>
-            <a:pPr algn="ctr"/>
-            <a:r>
-              <a:rPr lang="es-ES" sz="1200" b="1" dirty="0">
-                <a:solidFill>
-                  <a:srgbClr val="990F3D"/>
-                </a:solidFill>
-              </a:rPr>
-              <a:t>R6</a:t>
-            </a:r>
-          </a:p>
-        </p:txBody>
-      </p:sp>
-      <p:sp>
-        <p:nvSpPr>
-          <p:cNvPr id="182" name="Caja 182"/>
-          <p:cNvSpPr/>
-          <p:nvPr/>
-        </p:nvSpPr>
-        <p:spPr>
-          <a:xfrm>
-            <a:off x="10271000" y="2350000"/>
-            <a:ext cx="1240000" cy="1500000"/>
-          </a:xfrm>
-          <a:prstGeom prst="roundRect">
-            <a:avLst>
-              <a:gd name="adj" fmla="val 6000"/>
-            </a:avLst>
-          </a:prstGeom>
-          <a:solidFill>
-            <a:srgbClr val="C9A78D"/>
-          </a:solidFill>
-          <a:ln>
-            <a:noFill/>
-          </a:ln>
-        </p:spPr>
-        <p:txBody>
-          <a:bodyPr wrap="square" anchor="ctr" lIns="45720" rIns="45720">
-            <a:noAutofit/>
-          </a:bodyPr>
-          <a:lstStyle/>
-          <a:p>
-            <a:pPr algn="ctr"/>
-            <a:r>
-              <a:rPr lang="es-ES" sz="2400" b="1" dirty="0">
-                <a:solidFill>
-                  <a:srgbClr val="564D47"/>
-                </a:solidFill>
-              </a:rPr>
-              <a:t>F7</a:t>
-            </a:r>
-          </a:p>
-          <a:p>
-            <a:pPr algn="ctr"/>
-            <a:r>
-              <a:rPr lang="es-ES" sz="1050" dirty="0">
-                <a:solidFill>
-                  <a:srgbClr val="564D47"/>
-                </a:solidFill>
-              </a:rPr>
-              <a:t>Evolution or retirement</a:t>
-            </a:r>
-          </a:p>
-        </p:txBody>
-      </p:sp>
-      <p:sp>
-        <p:nvSpPr>
-          <p:cNvPr id="183" name="Texto 183"/>
-          <p:cNvSpPr txBox="1"/>
-          <p:nvPr/>
-        </p:nvSpPr>
-        <p:spPr>
-          <a:xfrm>
-            <a:off x="11181000" y="3900000"/>
-            <a:ext cx="800000" cy="300000"/>
-          </a:xfrm>
-          <a:prstGeom prst="rect">
-            <a:avLst/>
-          </a:prstGeom>
-          <a:noFill/>
-        </p:spPr>
-        <p:txBody>
-          <a:bodyPr wrap="square" anchor="t" lIns="45720" rIns="45720">
-            <a:noAutofit/>
-          </a:bodyPr>
-          <a:lstStyle/>
-          <a:p>
-            <a:pPr algn="ctr"/>
-            <a:r>
-              <a:rPr lang="es-ES" sz="1200" b="1" dirty="0">
-                <a:solidFill>
-                  <a:srgbClr val="990F3D"/>
-                </a:solidFill>
-              </a:rPr>
-              <a:t>G7</a:t>
-            </a:r>
-          </a:p>
-        </p:txBody>
-      </p:sp>
-      <p:sp>
-        <p:nvSpPr>
-          <p:cNvPr id="184" name="Texto 184"/>
-          <p:cNvSpPr txBox="1"/>
-          <p:nvPr/>
-        </p:nvSpPr>
-        <p:spPr>
-          <a:xfrm>
-            <a:off x="609600" y="4430000"/>
-            <a:ext cx="10972800" cy="600000"/>
-          </a:xfrm>
-          <a:prstGeom prst="rect">
-            <a:avLst/>
-          </a:prstGeom>
-          <a:noFill/>
-        </p:spPr>
-        <p:txBody>
-          <a:bodyPr wrap="square" anchor="t" lIns="45720" rIns="45720">
-            <a:noAutofit/>
-          </a:bodyPr>
-          <a:lstStyle/>
-          <a:p>
-            <a:pPr algn="ctr"/>
-            <a:r>
-              <a:rPr lang="es-ES" sz="2200" b="1" dirty="0">
-                <a:solidFill>
-                  <a:srgbClr val="0D7680"/>
-                </a:solidFill>
-              </a:rPr>
-              <a:t>IN USE · each R6 confirms it keeps delivering value under control</a:t>
+              <a:t>IN PRODUCTION · €1.1M OF VALIDATED ANNUAL RETURN · QUARTERLY R6</a:t>
             </a:r>
           </a:p>
         </p:txBody>
@@ -3971,7 +3416,7 @@
       </p:grpSpPr>
       <p:sp>
         <p:nvSpPr>
-          <p:cNvPr id="190" name="Marca"/>
+          <p:cNvPr id="192" name="Marca"/>
           <p:cNvSpPr/>
           <p:nvPr/>
         </p:nvSpPr>
@@ -3995,7 +3440,7 @@
       </p:sp>
       <p:sp>
         <p:nvSpPr>
-          <p:cNvPr id="191" name="Texto 191"/>
+          <p:cNvPr id="193" name="Texto 193"/>
           <p:cNvSpPr txBox="1"/>
           <p:nvPr/>
         </p:nvSpPr>
@@ -4029,7 +3474,7 @@
       </p:sp>
       <p:sp>
         <p:nvSpPr>
-          <p:cNvPr id="192" name="Texto 192"/>
+          <p:cNvPr id="194" name="Texto 194"/>
           <p:cNvSpPr txBox="1"/>
           <p:nvPr/>
         </p:nvSpPr>
@@ -4056,130 +3501,763 @@
                   <a:srgbClr val="990F3D"/>
                 </a:solidFill>
               </a:rPr>
-              <a:t>How value is measured</a:t>
-            </a:r>
-          </a:p>
-        </p:txBody>
-      </p:sp>
-      <p:sp>
-        <p:nvSpPr>
-          <p:cNvPr id="189" name="Texto 189"/>
-          <p:cNvSpPr txBox="1"/>
-          <p:nvPr/>
-        </p:nvSpPr>
-        <p:spPr>
-          <a:xfrm>
-            <a:off x="609600" y="1750000"/>
-            <a:ext cx="10972800" cy="4400000"/>
-          </a:xfrm>
-          <a:prstGeom prst="rect">
-            <a:avLst/>
-          </a:prstGeom>
-          <a:noFill/>
-        </p:spPr>
-        <p:txBody>
-          <a:bodyPr wrap="square" anchor="t" lIns="45720" rIns="45720">
-            <a:noAutofit/>
-          </a:bodyPr>
-          <a:lstStyle/>
-          <a:p>
-            <a:pPr marL="285750" indent="-285750">
-              <a:spcAft>
-                <a:spcPts val="400"/>
-              </a:spcAft>
-              <a:buClr>
-                <a:srgbClr val="990F3D"/>
-              </a:buClr>
-              <a:buFont typeface="Arial"/>
-              <a:buChar char="•"/>
-            </a:pPr>
-            <a:r>
-              <a:rPr lang="es-ES" sz="1800" dirty="0">
-                <a:solidFill>
-                  <a:srgbClr val="2F2B28"/>
-                </a:solidFill>
-              </a:rPr>
-              <a:t>Every amount carries a formula and a status: validated (finance), declared (the team) or estimated.</a:t>
-            </a:r>
-          </a:p>
-          <a:p>
-            <a:pPr marL="285750" indent="-285750">
-              <a:spcAft>
-                <a:spcPts val="400"/>
-              </a:spcAft>
-              <a:buClr>
-                <a:srgbClr val="990F3D"/>
-              </a:buClr>
-              <a:buFont typeface="Arial"/>
-              <a:buChar char="•"/>
-            </a:pPr>
-            <a:r>
-              <a:rPr lang="es-ES" sz="1800" dirty="0">
-                <a:solidFill>
-                  <a:srgbClr val="2F2B28"/>
-                </a:solidFill>
-              </a:rPr>
-              <a:t>Released hours are not savings until they are materialised: a cost goes down or they are reassigned to a valuable activity.</a:t>
-            </a:r>
-          </a:p>
-          <a:p>
-            <a:pPr marL="285750" indent="-285750">
-              <a:spcAft>
-                <a:spcPts val="400"/>
-              </a:spcAft>
-              <a:buClr>
-                <a:srgbClr val="990F3D"/>
-              </a:buClr>
-              <a:buFont typeface="Arial"/>
-              <a:buChar char="•"/>
-            </a:pPr>
-            <a:r>
-              <a:rPr lang="es-ES" sz="1800" dirty="0">
-                <a:solidFill>
-                  <a:srgbClr val="2F2B28"/>
-                </a:solidFill>
-              </a:rPr>
-              <a:t>Cost is complete: build, consumption, operation, human oversight and retirement.</a:t>
-            </a:r>
-          </a:p>
-          <a:p>
-            <a:pPr marL="285750" indent="-285750">
-              <a:spcAft>
-                <a:spcPts val="400"/>
-              </a:spcAft>
-              <a:buClr>
-                <a:srgbClr val="990F3D"/>
-              </a:buClr>
-              <a:buFont typeface="Arial"/>
-              <a:buChar char="•"/>
-            </a:pPr>
-            <a:r>
-              <a:rPr lang="es-ES" sz="1800" dirty="0">
-                <a:solidFill>
-                  <a:srgbClr val="2F2B28"/>
-                </a:solidFill>
-              </a:rPr>
-              <a:t>The transformation index uses eight evidence signals to tell transformation apart from mere efficiency.</a:t>
-            </a:r>
-          </a:p>
-          <a:p>
-            <a:pPr marL="285750" indent="-285750">
-              <a:spcAft>
-                <a:spcPts val="400"/>
-              </a:spcAft>
-              <a:buClr>
-                <a:srgbClr val="990F3D"/>
-              </a:buClr>
-              <a:buFont typeface="Arial"/>
-              <a:buChar char="•"/>
-            </a:pPr>
-            <a:r>
-              <a:rPr lang="es-ES" sz="1800" dirty="0">
-                <a:solidFill>
-                  <a:srgbClr val="2F2B28"/>
-                </a:solidFill>
-              </a:rPr>
-              <a:t>Ten measurement rules (document 40). No figure enters the portfolio net without its status.</a:t>
+              <a:t>Initiative 2, on the lifecycle</a:t>
+            </a:r>
+          </a:p>
+        </p:txBody>
+      </p:sp>
+      <p:sp>
+        <p:nvSpPr>
+          <p:cNvPr id="195" name="Texto 195"/>
+          <p:cNvSpPr txBox="1"/>
+          <p:nvPr/>
+        </p:nvSpPr>
+        <p:spPr>
+          <a:xfrm>
+            <a:off x="609600" y="1330000"/>
+            <a:ext cx="10972800" cy="450000"/>
+          </a:xfrm>
+          <a:prstGeom prst="rect">
+            <a:avLst/>
+          </a:prstGeom>
+          <a:noFill/>
+        </p:spPr>
+        <p:txBody>
+          <a:bodyPr wrap="square" anchor="t" lIns="45720" rIns="45720">
+            <a:noAutofit/>
+          </a:bodyPr>
+          <a:lstStyle/>
+          <a:p>
+            <a:pPr algn="l"/>
+            <a:r>
+              <a:rPr lang="es-ES" sz="1500" dirty="0">
+                <a:solidFill>
+                  <a:srgbClr val="564D47"/>
+                </a:solidFill>
+              </a:rPr>
+              <a:t>It went through phases 0 to 6 and remains in use; phase 7 will come with G7</a:t>
+            </a:r>
+          </a:p>
+        </p:txBody>
+      </p:sp>
+      <p:sp>
+        <p:nvSpPr>
+          <p:cNvPr id="175" name="Caja 175"/>
+          <p:cNvSpPr/>
+          <p:nvPr/>
+        </p:nvSpPr>
+        <p:spPr>
+          <a:xfrm>
+            <a:off x="681000" y="2350000"/>
+            <a:ext cx="1240000" cy="1500000"/>
+          </a:xfrm>
+          <a:prstGeom prst="roundRect">
+            <a:avLst>
+              <a:gd name="adj" fmla="val 6000"/>
+            </a:avLst>
+          </a:prstGeom>
+          <a:solidFill>
+            <a:srgbClr val="0D7680"/>
+          </a:solidFill>
+          <a:ln>
+            <a:noFill/>
+          </a:ln>
+        </p:spPr>
+        <p:txBody>
+          <a:bodyPr wrap="square" anchor="ctr" lIns="45720" rIns="45720">
+            <a:noAutofit/>
+          </a:bodyPr>
+          <a:lstStyle/>
+          <a:p>
+            <a:pPr algn="ctr"/>
+            <a:r>
+              <a:rPr lang="es-ES" sz="2400" b="1" dirty="0">
+                <a:solidFill>
+                  <a:srgbClr val="FFFFFF"/>
+                </a:solidFill>
+              </a:rPr>
+              <a:t>F0</a:t>
+            </a:r>
+          </a:p>
+          <a:p>
+            <a:pPr algn="ctr"/>
+            <a:r>
+              <a:rPr lang="es-ES" sz="1050" dirty="0">
+                <a:solidFill>
+                  <a:srgbClr val="FFFFFF"/>
+                </a:solidFill>
+              </a:rPr>
+              <a:t>Context and constraints</a:t>
+            </a:r>
+          </a:p>
+        </p:txBody>
+      </p:sp>
+      <p:sp>
+        <p:nvSpPr>
+          <p:cNvPr id="176" name="Texto 176"/>
+          <p:cNvSpPr txBox="1"/>
+          <p:nvPr/>
+        </p:nvSpPr>
+        <p:spPr>
+          <a:xfrm>
+            <a:off x="1591000" y="3900000"/>
+            <a:ext cx="800000" cy="300000"/>
+          </a:xfrm>
+          <a:prstGeom prst="rect">
+            <a:avLst/>
+          </a:prstGeom>
+          <a:noFill/>
+        </p:spPr>
+        <p:txBody>
+          <a:bodyPr wrap="square" anchor="t" lIns="45720" rIns="45720">
+            <a:noAutofit/>
+          </a:bodyPr>
+          <a:lstStyle/>
+          <a:p>
+            <a:pPr algn="ctr"/>
+            <a:r>
+              <a:rPr lang="es-ES" sz="1200" b="1" dirty="0">
+                <a:solidFill>
+                  <a:srgbClr val="990F3D"/>
+                </a:solidFill>
+              </a:rPr>
+              <a:t>G0</a:t>
+            </a:r>
+          </a:p>
+        </p:txBody>
+      </p:sp>
+      <p:sp>
+        <p:nvSpPr>
+          <p:cNvPr id="177" name="Caja 177"/>
+          <p:cNvSpPr/>
+          <p:nvPr/>
+        </p:nvSpPr>
+        <p:spPr>
+          <a:xfrm>
+            <a:off x="2051000" y="2350000"/>
+            <a:ext cx="1240000" cy="1500000"/>
+          </a:xfrm>
+          <a:prstGeom prst="roundRect">
+            <a:avLst>
+              <a:gd name="adj" fmla="val 6000"/>
+            </a:avLst>
+          </a:prstGeom>
+          <a:solidFill>
+            <a:srgbClr val="0D7680"/>
+          </a:solidFill>
+          <a:ln>
+            <a:noFill/>
+          </a:ln>
+        </p:spPr>
+        <p:txBody>
+          <a:bodyPr wrap="square" anchor="ctr" lIns="45720" rIns="45720">
+            <a:noAutofit/>
+          </a:bodyPr>
+          <a:lstStyle/>
+          <a:p>
+            <a:pPr algn="ctr"/>
+            <a:r>
+              <a:rPr lang="es-ES" sz="2400" b="1" dirty="0">
+                <a:solidFill>
+                  <a:srgbClr val="FFFFFF"/>
+                </a:solidFill>
+              </a:rPr>
+              <a:t>F1</a:t>
+            </a:r>
+          </a:p>
+          <a:p>
+            <a:pPr algn="ctr"/>
+            <a:r>
+              <a:rPr lang="es-ES" sz="1050" dirty="0">
+                <a:solidFill>
+                  <a:srgbClr val="FFFFFF"/>
+                </a:solidFill>
+              </a:rPr>
+              <a:t>Opportunity discovery</a:t>
+            </a:r>
+          </a:p>
+        </p:txBody>
+      </p:sp>
+      <p:sp>
+        <p:nvSpPr>
+          <p:cNvPr id="178" name="Texto 178"/>
+          <p:cNvSpPr txBox="1"/>
+          <p:nvPr/>
+        </p:nvSpPr>
+        <p:spPr>
+          <a:xfrm>
+            <a:off x="2961000" y="3900000"/>
+            <a:ext cx="800000" cy="300000"/>
+          </a:xfrm>
+          <a:prstGeom prst="rect">
+            <a:avLst/>
+          </a:prstGeom>
+          <a:noFill/>
+        </p:spPr>
+        <p:txBody>
+          <a:bodyPr wrap="square" anchor="t" lIns="45720" rIns="45720">
+            <a:noAutofit/>
+          </a:bodyPr>
+          <a:lstStyle/>
+          <a:p>
+            <a:pPr algn="ctr"/>
+            <a:r>
+              <a:rPr lang="es-ES" sz="1200" b="1" dirty="0">
+                <a:solidFill>
+                  <a:srgbClr val="990F3D"/>
+                </a:solidFill>
+              </a:rPr>
+              <a:t>G1</a:t>
+            </a:r>
+          </a:p>
+        </p:txBody>
+      </p:sp>
+      <p:sp>
+        <p:nvSpPr>
+          <p:cNvPr id="179" name="Caja 179"/>
+          <p:cNvSpPr/>
+          <p:nvPr/>
+        </p:nvSpPr>
+        <p:spPr>
+          <a:xfrm>
+            <a:off x="3421000" y="2350000"/>
+            <a:ext cx="1240000" cy="1500000"/>
+          </a:xfrm>
+          <a:prstGeom prst="roundRect">
+            <a:avLst>
+              <a:gd name="adj" fmla="val 6000"/>
+            </a:avLst>
+          </a:prstGeom>
+          <a:solidFill>
+            <a:srgbClr val="0D7680"/>
+          </a:solidFill>
+          <a:ln>
+            <a:noFill/>
+          </a:ln>
+        </p:spPr>
+        <p:txBody>
+          <a:bodyPr wrap="square" anchor="ctr" lIns="45720" rIns="45720">
+            <a:noAutofit/>
+          </a:bodyPr>
+          <a:lstStyle/>
+          <a:p>
+            <a:pPr algn="ctr"/>
+            <a:r>
+              <a:rPr lang="es-ES" sz="2400" b="1" dirty="0">
+                <a:solidFill>
+                  <a:srgbClr val="FFFFFF"/>
+                </a:solidFill>
+              </a:rPr>
+              <a:t>F2</a:t>
+            </a:r>
+          </a:p>
+          <a:p>
+            <a:pPr algn="ctr"/>
+            <a:r>
+              <a:rPr lang="es-ES" sz="1050" dirty="0">
+                <a:solidFill>
+                  <a:srgbClr val="FFFFFF"/>
+                </a:solidFill>
+              </a:rPr>
+              <a:t>Value hypothesis</a:t>
+            </a:r>
+          </a:p>
+        </p:txBody>
+      </p:sp>
+      <p:sp>
+        <p:nvSpPr>
+          <p:cNvPr id="180" name="Texto 180"/>
+          <p:cNvSpPr txBox="1"/>
+          <p:nvPr/>
+        </p:nvSpPr>
+        <p:spPr>
+          <a:xfrm>
+            <a:off x="4331000" y="3900000"/>
+            <a:ext cx="800000" cy="300000"/>
+          </a:xfrm>
+          <a:prstGeom prst="rect">
+            <a:avLst/>
+          </a:prstGeom>
+          <a:noFill/>
+        </p:spPr>
+        <p:txBody>
+          <a:bodyPr wrap="square" anchor="t" lIns="45720" rIns="45720">
+            <a:noAutofit/>
+          </a:bodyPr>
+          <a:lstStyle/>
+          <a:p>
+            <a:pPr algn="ctr"/>
+            <a:r>
+              <a:rPr lang="es-ES" sz="1200" b="1" dirty="0">
+                <a:solidFill>
+                  <a:srgbClr val="990F3D"/>
+                </a:solidFill>
+              </a:rPr>
+              <a:t>G2</a:t>
+            </a:r>
+          </a:p>
+        </p:txBody>
+      </p:sp>
+      <p:sp>
+        <p:nvSpPr>
+          <p:cNvPr id="181" name="Caja 181"/>
+          <p:cNvSpPr/>
+          <p:nvPr/>
+        </p:nvSpPr>
+        <p:spPr>
+          <a:xfrm>
+            <a:off x="4791000" y="2350000"/>
+            <a:ext cx="1240000" cy="1500000"/>
+          </a:xfrm>
+          <a:prstGeom prst="roundRect">
+            <a:avLst>
+              <a:gd name="adj" fmla="val 6000"/>
+            </a:avLst>
+          </a:prstGeom>
+          <a:solidFill>
+            <a:srgbClr val="0D7680"/>
+          </a:solidFill>
+          <a:ln>
+            <a:noFill/>
+          </a:ln>
+        </p:spPr>
+        <p:txBody>
+          <a:bodyPr wrap="square" anchor="ctr" lIns="45720" rIns="45720">
+            <a:noAutofit/>
+          </a:bodyPr>
+          <a:lstStyle/>
+          <a:p>
+            <a:pPr algn="ctr"/>
+            <a:r>
+              <a:rPr lang="es-ES" sz="2400" b="1" dirty="0">
+                <a:solidFill>
+                  <a:srgbClr val="FFFFFF"/>
+                </a:solidFill>
+              </a:rPr>
+              <a:t>F3</a:t>
+            </a:r>
+          </a:p>
+          <a:p>
+            <a:pPr algn="ctr"/>
+            <a:r>
+              <a:rPr lang="es-ES" sz="1050" dirty="0">
+                <a:solidFill>
+                  <a:srgbClr val="FFFFFF"/>
+                </a:solidFill>
+              </a:rPr>
+              <a:t>Feasibility and risk</a:t>
+            </a:r>
+          </a:p>
+        </p:txBody>
+      </p:sp>
+      <p:sp>
+        <p:nvSpPr>
+          <p:cNvPr id="182" name="Texto 182"/>
+          <p:cNvSpPr txBox="1"/>
+          <p:nvPr/>
+        </p:nvSpPr>
+        <p:spPr>
+          <a:xfrm>
+            <a:off x="5701000" y="3900000"/>
+            <a:ext cx="800000" cy="300000"/>
+          </a:xfrm>
+          <a:prstGeom prst="rect">
+            <a:avLst/>
+          </a:prstGeom>
+          <a:noFill/>
+        </p:spPr>
+        <p:txBody>
+          <a:bodyPr wrap="square" anchor="t" lIns="45720" rIns="45720">
+            <a:noAutofit/>
+          </a:bodyPr>
+          <a:lstStyle/>
+          <a:p>
+            <a:pPr algn="ctr"/>
+            <a:r>
+              <a:rPr lang="es-ES" sz="1200" b="1" dirty="0">
+                <a:solidFill>
+                  <a:srgbClr val="990F3D"/>
+                </a:solidFill>
+              </a:rPr>
+              <a:t>G3</a:t>
+            </a:r>
+          </a:p>
+        </p:txBody>
+      </p:sp>
+      <p:sp>
+        <p:nvSpPr>
+          <p:cNvPr id="183" name="Caja 183"/>
+          <p:cNvSpPr/>
+          <p:nvPr/>
+        </p:nvSpPr>
+        <p:spPr>
+          <a:xfrm>
+            <a:off x="6161000" y="2350000"/>
+            <a:ext cx="1240000" cy="1500000"/>
+          </a:xfrm>
+          <a:prstGeom prst="roundRect">
+            <a:avLst>
+              <a:gd name="adj" fmla="val 6000"/>
+            </a:avLst>
+          </a:prstGeom>
+          <a:solidFill>
+            <a:srgbClr val="0D7680"/>
+          </a:solidFill>
+          <a:ln>
+            <a:noFill/>
+          </a:ln>
+        </p:spPr>
+        <p:txBody>
+          <a:bodyPr wrap="square" anchor="ctr" lIns="45720" rIns="45720">
+            <a:noAutofit/>
+          </a:bodyPr>
+          <a:lstStyle/>
+          <a:p>
+            <a:pPr algn="ctr"/>
+            <a:r>
+              <a:rPr lang="es-ES" sz="2400" b="1" dirty="0">
+                <a:solidFill>
+                  <a:srgbClr val="FFFFFF"/>
+                </a:solidFill>
+              </a:rPr>
+              <a:t>F4</a:t>
+            </a:r>
+          </a:p>
+          <a:p>
+            <a:pPr algn="ctr"/>
+            <a:r>
+              <a:rPr lang="es-ES" sz="1050" dirty="0">
+                <a:solidFill>
+                  <a:srgbClr val="FFFFFF"/>
+                </a:solidFill>
+              </a:rPr>
+              <a:t>Solution design</a:t>
+            </a:r>
+          </a:p>
+        </p:txBody>
+      </p:sp>
+      <p:sp>
+        <p:nvSpPr>
+          <p:cNvPr id="184" name="Texto 184"/>
+          <p:cNvSpPr txBox="1"/>
+          <p:nvPr/>
+        </p:nvSpPr>
+        <p:spPr>
+          <a:xfrm>
+            <a:off x="7071000" y="3900000"/>
+            <a:ext cx="800000" cy="300000"/>
+          </a:xfrm>
+          <a:prstGeom prst="rect">
+            <a:avLst/>
+          </a:prstGeom>
+          <a:noFill/>
+        </p:spPr>
+        <p:txBody>
+          <a:bodyPr wrap="square" anchor="t" lIns="45720" rIns="45720">
+            <a:noAutofit/>
+          </a:bodyPr>
+          <a:lstStyle/>
+          <a:p>
+            <a:pPr algn="ctr"/>
+            <a:r>
+              <a:rPr lang="es-ES" sz="1200" b="1" dirty="0">
+                <a:solidFill>
+                  <a:srgbClr val="990F3D"/>
+                </a:solidFill>
+              </a:rPr>
+              <a:t>G4</a:t>
+            </a:r>
+          </a:p>
+        </p:txBody>
+      </p:sp>
+      <p:sp>
+        <p:nvSpPr>
+          <p:cNvPr id="185" name="Caja 185"/>
+          <p:cNvSpPr/>
+          <p:nvPr/>
+        </p:nvSpPr>
+        <p:spPr>
+          <a:xfrm>
+            <a:off x="7531000" y="2350000"/>
+            <a:ext cx="1240000" cy="1500000"/>
+          </a:xfrm>
+          <a:prstGeom prst="roundRect">
+            <a:avLst>
+              <a:gd name="adj" fmla="val 6000"/>
+            </a:avLst>
+          </a:prstGeom>
+          <a:solidFill>
+            <a:srgbClr val="0D7680"/>
+          </a:solidFill>
+          <a:ln>
+            <a:noFill/>
+          </a:ln>
+        </p:spPr>
+        <p:txBody>
+          <a:bodyPr wrap="square" anchor="ctr" lIns="45720" rIns="45720">
+            <a:noAutofit/>
+          </a:bodyPr>
+          <a:lstStyle/>
+          <a:p>
+            <a:pPr algn="ctr"/>
+            <a:r>
+              <a:rPr lang="es-ES" sz="2400" b="1" dirty="0">
+                <a:solidFill>
+                  <a:srgbClr val="FFFFFF"/>
+                </a:solidFill>
+              </a:rPr>
+              <a:t>F5</a:t>
+            </a:r>
+          </a:p>
+          <a:p>
+            <a:pPr algn="ctr"/>
+            <a:r>
+              <a:rPr lang="es-ES" sz="1050" dirty="0">
+                <a:solidFill>
+                  <a:srgbClr val="FFFFFF"/>
+                </a:solidFill>
+              </a:rPr>
+              <a:t>Delivery and validation</a:t>
+            </a:r>
+          </a:p>
+        </p:txBody>
+      </p:sp>
+      <p:sp>
+        <p:nvSpPr>
+          <p:cNvPr id="186" name="Texto 186"/>
+          <p:cNvSpPr txBox="1"/>
+          <p:nvPr/>
+        </p:nvSpPr>
+        <p:spPr>
+          <a:xfrm>
+            <a:off x="8441000" y="3900000"/>
+            <a:ext cx="800000" cy="300000"/>
+          </a:xfrm>
+          <a:prstGeom prst="rect">
+            <a:avLst/>
+          </a:prstGeom>
+          <a:noFill/>
+        </p:spPr>
+        <p:txBody>
+          <a:bodyPr wrap="square" anchor="t" lIns="45720" rIns="45720">
+            <a:noAutofit/>
+          </a:bodyPr>
+          <a:lstStyle/>
+          <a:p>
+            <a:pPr algn="ctr"/>
+            <a:r>
+              <a:rPr lang="es-ES" sz="1200" b="1" dirty="0">
+                <a:solidFill>
+                  <a:srgbClr val="990F3D"/>
+                </a:solidFill>
+              </a:rPr>
+              <a:t>G5</a:t>
+            </a:r>
+          </a:p>
+        </p:txBody>
+      </p:sp>
+      <p:sp>
+        <p:nvSpPr>
+          <p:cNvPr id="187" name="Caja 187"/>
+          <p:cNvSpPr/>
+          <p:nvPr/>
+        </p:nvSpPr>
+        <p:spPr>
+          <a:xfrm>
+            <a:off x="8901000" y="2350000"/>
+            <a:ext cx="1240000" cy="1500000"/>
+          </a:xfrm>
+          <a:prstGeom prst="roundRect">
+            <a:avLst>
+              <a:gd name="adj" fmla="val 6000"/>
+            </a:avLst>
+          </a:prstGeom>
+          <a:solidFill>
+            <a:srgbClr val="0D7680"/>
+          </a:solidFill>
+          <a:ln>
+            <a:noFill/>
+          </a:ln>
+        </p:spPr>
+        <p:txBody>
+          <a:bodyPr wrap="square" anchor="ctr" lIns="45720" rIns="45720">
+            <a:noAutofit/>
+          </a:bodyPr>
+          <a:lstStyle/>
+          <a:p>
+            <a:pPr algn="ctr"/>
+            <a:r>
+              <a:rPr lang="es-ES" sz="2400" b="1" dirty="0">
+                <a:solidFill>
+                  <a:srgbClr val="FFFFFF"/>
+                </a:solidFill>
+              </a:rPr>
+              <a:t>F6</a:t>
+            </a:r>
+          </a:p>
+          <a:p>
+            <a:pPr algn="ctr"/>
+            <a:r>
+              <a:rPr lang="es-ES" sz="1050" dirty="0">
+                <a:solidFill>
+                  <a:srgbClr val="FFFFFF"/>
+                </a:solidFill>
+              </a:rPr>
+              <a:t>Operation and governance</a:t>
+            </a:r>
+          </a:p>
+        </p:txBody>
+      </p:sp>
+      <p:sp>
+        <p:nvSpPr>
+          <p:cNvPr id="188" name="Texto 188"/>
+          <p:cNvSpPr txBox="1"/>
+          <p:nvPr/>
+        </p:nvSpPr>
+        <p:spPr>
+          <a:xfrm>
+            <a:off x="9811000" y="3900000"/>
+            <a:ext cx="800000" cy="300000"/>
+          </a:xfrm>
+          <a:prstGeom prst="rect">
+            <a:avLst/>
+          </a:prstGeom>
+          <a:noFill/>
+        </p:spPr>
+        <p:txBody>
+          <a:bodyPr wrap="square" anchor="t" lIns="45720" rIns="45720">
+            <a:noAutofit/>
+          </a:bodyPr>
+          <a:lstStyle/>
+          <a:p>
+            <a:pPr algn="ctr"/>
+            <a:r>
+              <a:rPr lang="es-ES" sz="1200" b="1" dirty="0">
+                <a:solidFill>
+                  <a:srgbClr val="990F3D"/>
+                </a:solidFill>
+              </a:rPr>
+              <a:t>R6</a:t>
+            </a:r>
+          </a:p>
+        </p:txBody>
+      </p:sp>
+      <p:sp>
+        <p:nvSpPr>
+          <p:cNvPr id="189" name="Caja 189"/>
+          <p:cNvSpPr/>
+          <p:nvPr/>
+        </p:nvSpPr>
+        <p:spPr>
+          <a:xfrm>
+            <a:off x="10271000" y="2350000"/>
+            <a:ext cx="1240000" cy="1500000"/>
+          </a:xfrm>
+          <a:prstGeom prst="roundRect">
+            <a:avLst>
+              <a:gd name="adj" fmla="val 6000"/>
+            </a:avLst>
+          </a:prstGeom>
+          <a:solidFill>
+            <a:srgbClr val="C9A78D"/>
+          </a:solidFill>
+          <a:ln>
+            <a:noFill/>
+          </a:ln>
+        </p:spPr>
+        <p:txBody>
+          <a:bodyPr wrap="square" anchor="ctr" lIns="45720" rIns="45720">
+            <a:noAutofit/>
+          </a:bodyPr>
+          <a:lstStyle/>
+          <a:p>
+            <a:pPr algn="ctr"/>
+            <a:r>
+              <a:rPr lang="es-ES" sz="2400" b="1" dirty="0">
+                <a:solidFill>
+                  <a:srgbClr val="564D47"/>
+                </a:solidFill>
+              </a:rPr>
+              <a:t>F7</a:t>
+            </a:r>
+          </a:p>
+          <a:p>
+            <a:pPr algn="ctr"/>
+            <a:r>
+              <a:rPr lang="es-ES" sz="1050" dirty="0">
+                <a:solidFill>
+                  <a:srgbClr val="564D47"/>
+                </a:solidFill>
+              </a:rPr>
+              <a:t>Evolution or retirement</a:t>
+            </a:r>
+          </a:p>
+        </p:txBody>
+      </p:sp>
+      <p:sp>
+        <p:nvSpPr>
+          <p:cNvPr id="190" name="Texto 190"/>
+          <p:cNvSpPr txBox="1"/>
+          <p:nvPr/>
+        </p:nvSpPr>
+        <p:spPr>
+          <a:xfrm>
+            <a:off x="11181000" y="3900000"/>
+            <a:ext cx="800000" cy="300000"/>
+          </a:xfrm>
+          <a:prstGeom prst="rect">
+            <a:avLst/>
+          </a:prstGeom>
+          <a:noFill/>
+        </p:spPr>
+        <p:txBody>
+          <a:bodyPr wrap="square" anchor="t" lIns="45720" rIns="45720">
+            <a:noAutofit/>
+          </a:bodyPr>
+          <a:lstStyle/>
+          <a:p>
+            <a:pPr algn="ctr"/>
+            <a:r>
+              <a:rPr lang="es-ES" sz="1200" b="1" dirty="0">
+                <a:solidFill>
+                  <a:srgbClr val="990F3D"/>
+                </a:solidFill>
+              </a:rPr>
+              <a:t>G7</a:t>
+            </a:r>
+          </a:p>
+        </p:txBody>
+      </p:sp>
+      <p:sp>
+        <p:nvSpPr>
+          <p:cNvPr id="191" name="Texto 191"/>
+          <p:cNvSpPr txBox="1"/>
+          <p:nvPr/>
+        </p:nvSpPr>
+        <p:spPr>
+          <a:xfrm>
+            <a:off x="609600" y="4430000"/>
+            <a:ext cx="10972800" cy="600000"/>
+          </a:xfrm>
+          <a:prstGeom prst="rect">
+            <a:avLst/>
+          </a:prstGeom>
+          <a:noFill/>
+        </p:spPr>
+        <p:txBody>
+          <a:bodyPr wrap="square" anchor="t" lIns="45720" rIns="45720">
+            <a:noAutofit/>
+          </a:bodyPr>
+          <a:lstStyle/>
+          <a:p>
+            <a:pPr algn="ctr"/>
+            <a:r>
+              <a:rPr lang="es-ES" sz="2200" b="1" dirty="0">
+                <a:solidFill>
+                  <a:srgbClr val="0D7680"/>
+                </a:solidFill>
+              </a:rPr>
+              <a:t>IN USE · each R6 confirms it keeps delivering value under control</a:t>
             </a:r>
           </a:p>
         </p:txBody>
@@ -4198,7 +4276,7 @@
     <p:bg>
       <p:bgPr>
         <a:solidFill>
-          <a:srgbClr val="1A1817"/>
+          <a:srgbClr val="FBE2CD"/>
         </a:solidFill>
         <a:effectLst/>
       </p:bgPr>
@@ -4219,13 +4297,13 @@
       </p:grpSpPr>
       <p:sp>
         <p:nvSpPr>
-          <p:cNvPr id="193" name="Marca"/>
+          <p:cNvPr id="197" name="Marca"/>
           <p:cNvSpPr/>
           <p:nvPr/>
         </p:nvSpPr>
         <p:spPr>
           <a:xfrm>
-            <a:off x="609600" y="2400000"/>
+            <a:off x="609600" y="365760"/>
             <a:ext cx="182880" cy="182880"/>
           </a:xfrm>
           <a:prstGeom prst="rect">
@@ -4243,48 +4321,48 @@
       </p:sp>
       <p:sp>
         <p:nvSpPr>
-          <p:cNvPr id="194" name="Texto 194"/>
-          <p:cNvSpPr txBox="1"/>
-          <p:nvPr/>
-        </p:nvSpPr>
-        <p:spPr>
-          <a:xfrm>
-            <a:off x="838200" y="2320000"/>
-            <a:ext cx="9000000" cy="400000"/>
-          </a:xfrm>
-          <a:prstGeom prst="rect">
-            <a:avLst/>
-          </a:prstGeom>
-          <a:noFill/>
-        </p:spPr>
-        <p:txBody>
-          <a:bodyPr wrap="square" anchor="t" lIns="45720" rIns="45720">
+          <p:cNvPr id="198" name="Texto 198"/>
+          <p:cNvSpPr txBox="1"/>
+          <p:nvPr/>
+        </p:nvSpPr>
+        <p:spPr>
+          <a:xfrm>
+            <a:off x="838200" y="300000"/>
+            <a:ext cx="10500000" cy="320000"/>
+          </a:xfrm>
+          <a:prstGeom prst="rect">
+            <a:avLst/>
+          </a:prstGeom>
+          <a:noFill/>
+        </p:spPr>
+        <p:txBody>
+          <a:bodyPr wrap="square" anchor="ctr" lIns="45720" rIns="45720">
             <a:noAutofit/>
           </a:bodyPr>
           <a:lstStyle/>
           <a:p>
             <a:pPr algn="l"/>
             <a:r>
-              <a:rPr lang="es-ES" sz="1600" b="1" dirty="0">
-                <a:solidFill>
-                  <a:srgbClr val="F3CFB2"/>
-                </a:solidFill>
-              </a:rPr>
-              <a:t>FOR THE PARTNER</a:t>
-            </a:r>
-          </a:p>
-        </p:txBody>
-      </p:sp>
-      <p:sp>
-        <p:nvSpPr>
-          <p:cNvPr id="195" name="Texto 195"/>
-          <p:cNvSpPr txBox="1"/>
-          <p:nvPr/>
-        </p:nvSpPr>
-        <p:spPr>
-          <a:xfrm>
-            <a:off x="609600" y="2850000"/>
-            <a:ext cx="10972800" cy="1400000"/>
+              <a:rPr lang="es-ES" sz="1400" b="1" dirty="0">
+                <a:solidFill>
+                  <a:srgbClr val="1A1817"/>
+                </a:solidFill>
+              </a:rPr>
+              <a:t>SEVEN-G · COURSE · PARTNER · BUILDING IT INTO YOUR METHODOLOGY</a:t>
+            </a:r>
+          </a:p>
+        </p:txBody>
+      </p:sp>
+      <p:sp>
+        <p:nvSpPr>
+          <p:cNvPr id="199" name="Texto 199"/>
+          <p:cNvSpPr txBox="1"/>
+          <p:nvPr/>
+        </p:nvSpPr>
+        <p:spPr>
+          <a:xfrm>
+            <a:off x="609600" y="700000"/>
+            <a:ext cx="10972800" cy="650000"/>
           </a:xfrm>
           <a:prstGeom prst="rect">
             <a:avLst/>
@@ -4299,12 +4377,12 @@
           <a:p>
             <a:pPr algn="l"/>
             <a:r>
-              <a:rPr lang="es-ES" sz="4000" b="1" dirty="0">
-                <a:solidFill>
-                  <a:srgbClr val="FBE2CD"/>
-                </a:solidFill>
-              </a:rPr>
-              <a:t>Integrating SEVEN-G into your own methodology or product</a:t>
+              <a:rPr lang="es-ES" sz="2700" b="1" dirty="0">
+                <a:solidFill>
+                  <a:srgbClr val="990F3D"/>
+                </a:solidFill>
+              </a:rPr>
+              <a:t>How value is measured</a:t>
             </a:r>
           </a:p>
         </p:txBody>
@@ -4317,28 +4395,117 @@
         </p:nvSpPr>
         <p:spPr>
           <a:xfrm>
-            <a:off x="609600" y="4400000"/>
-            <a:ext cx="10500000" cy="900000"/>
-          </a:xfrm>
-          <a:prstGeom prst="rect">
-            <a:avLst/>
-          </a:prstGeom>
-          <a:noFill/>
-        </p:spPr>
-        <p:txBody>
-          <a:bodyPr wrap="square" anchor="t" lIns="45720" rIns="45720">
-            <a:noAutofit/>
-          </a:bodyPr>
-          <a:lstStyle/>
-          <a:p>
-            <a:pPr algn="l"/>
-            <a:r>
-              <a:rPr lang="es-ES" sz="1700" dirty="0">
-                <a:solidFill>
-                  <a:srgbClr val="F3CFB2"/>
-                </a:solidFill>
-              </a:rPr>
-              <a:t>Here, "partner" means a company that builds the framework into its own offering under its open licence. There is no partner programme and no "official partner" status.</a:t>
+            <a:off x="609600" y="1750000"/>
+            <a:ext cx="10972800" cy="4400000"/>
+          </a:xfrm>
+          <a:prstGeom prst="rect">
+            <a:avLst/>
+          </a:prstGeom>
+          <a:noFill/>
+        </p:spPr>
+        <p:txBody>
+          <a:bodyPr wrap="square" anchor="t" lIns="45720" rIns="45720">
+            <a:noAutofit/>
+          </a:bodyPr>
+          <a:lstStyle/>
+          <a:p>
+            <a:pPr marL="285750" indent="-285750">
+              <a:spcAft>
+                <a:spcPts val="400"/>
+              </a:spcAft>
+              <a:buClr>
+                <a:srgbClr val="990F3D"/>
+              </a:buClr>
+              <a:buFont typeface="Arial"/>
+              <a:buChar char="•"/>
+            </a:pPr>
+            <a:r>
+              <a:rPr lang="es-ES" sz="1800" dirty="0">
+                <a:solidFill>
+                  <a:srgbClr val="2F2B28"/>
+                </a:solidFill>
+              </a:rPr>
+              <a:t>Every amount carries a formula and a status: validated (finance), declared (the team) or estimated.</a:t>
+            </a:r>
+          </a:p>
+          <a:p>
+            <a:pPr marL="285750" indent="-285750">
+              <a:spcAft>
+                <a:spcPts val="400"/>
+              </a:spcAft>
+              <a:buClr>
+                <a:srgbClr val="990F3D"/>
+              </a:buClr>
+              <a:buFont typeface="Arial"/>
+              <a:buChar char="•"/>
+            </a:pPr>
+            <a:r>
+              <a:rPr lang="es-ES" sz="1800" dirty="0">
+                <a:solidFill>
+                  <a:srgbClr val="2F2B28"/>
+                </a:solidFill>
+              </a:rPr>
+              <a:t>Released hours are not savings until they are materialised: a cost goes down or they are reassigned to a valuable activity.</a:t>
+            </a:r>
+          </a:p>
+          <a:p>
+            <a:pPr marL="285750" indent="-285750">
+              <a:spcAft>
+                <a:spcPts val="400"/>
+              </a:spcAft>
+              <a:buClr>
+                <a:srgbClr val="990F3D"/>
+              </a:buClr>
+              <a:buFont typeface="Arial"/>
+              <a:buChar char="•"/>
+            </a:pPr>
+            <a:r>
+              <a:rPr lang="es-ES" sz="1800" dirty="0">
+                <a:solidFill>
+                  <a:srgbClr val="2F2B28"/>
+                </a:solidFill>
+              </a:rPr>
+              <a:t>Cost is complete: build, consumption, operation, human oversight and retirement.</a:t>
+            </a:r>
+          </a:p>
+          <a:p>
+            <a:pPr marL="285750" indent="-285750">
+              <a:spcAft>
+                <a:spcPts val="400"/>
+              </a:spcAft>
+              <a:buClr>
+                <a:srgbClr val="990F3D"/>
+              </a:buClr>
+              <a:buFont typeface="Arial"/>
+              <a:buChar char="•"/>
+            </a:pPr>
+            <a:r>
+              <a:rPr lang="es-ES" sz="1800" dirty="0">
+                <a:solidFill>
+                  <a:srgbClr val="2F2B28"/>
+                </a:solidFill>
+              </a:rPr>
+              <a:t>The transformation index uses eight evidence signals to tell transformation apart from mere efficiency.</a:t>
+            </a:r>
+          </a:p>
+          <a:p>
+            <a:pPr marL="285750" indent="-285750">
+              <a:spcAft>
+                <a:spcPts val="400"/>
+              </a:spcAft>
+              <a:buClr>
+                <a:srgbClr val="990F3D"/>
+              </a:buClr>
+              <a:buFont typeface="Arial"/>
+              <a:buChar char="•"/>
+            </a:pPr>
+            <a:r>
+              <a:rPr lang="es-ES" sz="1800" dirty="0">
+                <a:solidFill>
+                  <a:srgbClr val="2F2B28"/>
+                </a:solidFill>
+              </a:rPr>
+              <a:t>Ten measurement rules (document 40). No figure enters the portfolio net without its status.</a:t>
             </a:r>
           </a:p>
         </p:txBody>
@@ -4639,7 +4806,7 @@
     <p:bg>
       <p:bgPr>
         <a:solidFill>
-          <a:srgbClr val="FBE2CD"/>
+          <a:srgbClr val="1A1817"/>
         </a:solidFill>
         <a:effectLst/>
       </p:bgPr>
@@ -4660,13 +4827,13 @@
       </p:grpSpPr>
       <p:sp>
         <p:nvSpPr>
-          <p:cNvPr id="207" name="Marca"/>
+          <p:cNvPr id="200" name="Marca"/>
           <p:cNvSpPr/>
           <p:nvPr/>
         </p:nvSpPr>
         <p:spPr>
           <a:xfrm>
-            <a:off x="609600" y="365760"/>
+            <a:off x="609600" y="2400000"/>
             <a:ext cx="182880" cy="182880"/>
           </a:xfrm>
           <a:prstGeom prst="rect">
@@ -4684,48 +4851,48 @@
       </p:sp>
       <p:sp>
         <p:nvSpPr>
-          <p:cNvPr id="208" name="Texto 208"/>
-          <p:cNvSpPr txBox="1"/>
-          <p:nvPr/>
-        </p:nvSpPr>
-        <p:spPr>
-          <a:xfrm>
-            <a:off x="838200" y="300000"/>
-            <a:ext cx="10500000" cy="320000"/>
-          </a:xfrm>
-          <a:prstGeom prst="rect">
-            <a:avLst/>
-          </a:prstGeom>
-          <a:noFill/>
-        </p:spPr>
-        <p:txBody>
-          <a:bodyPr wrap="square" anchor="ctr" lIns="45720" rIns="45720">
+          <p:cNvPr id="201" name="Texto 201"/>
+          <p:cNvSpPr txBox="1"/>
+          <p:nvPr/>
+        </p:nvSpPr>
+        <p:spPr>
+          <a:xfrm>
+            <a:off x="838200" y="2320000"/>
+            <a:ext cx="9000000" cy="400000"/>
+          </a:xfrm>
+          <a:prstGeom prst="rect">
+            <a:avLst/>
+          </a:prstGeom>
+          <a:noFill/>
+        </p:spPr>
+        <p:txBody>
+          <a:bodyPr wrap="square" anchor="t" lIns="45720" rIns="45720">
             <a:noAutofit/>
           </a:bodyPr>
           <a:lstStyle/>
           <a:p>
             <a:pPr algn="l"/>
             <a:r>
-              <a:rPr lang="es-ES" sz="1400" b="1" dirty="0">
-                <a:solidFill>
-                  <a:srgbClr val="1A1817"/>
-                </a:solidFill>
-              </a:rPr>
-              <a:t>SEVEN-G · COURSE · PARTNER · BUILDING IT INTO YOUR METHODOLOGY</a:t>
-            </a:r>
-          </a:p>
-        </p:txBody>
-      </p:sp>
-      <p:sp>
-        <p:nvSpPr>
-          <p:cNvPr id="209" name="Texto 209"/>
-          <p:cNvSpPr txBox="1"/>
-          <p:nvPr/>
-        </p:nvSpPr>
-        <p:spPr>
-          <a:xfrm>
-            <a:off x="609600" y="700000"/>
-            <a:ext cx="10972800" cy="650000"/>
+              <a:rPr lang="es-ES" sz="1600" b="1" dirty="0">
+                <a:solidFill>
+                  <a:srgbClr val="F3CFB2"/>
+                </a:solidFill>
+              </a:rPr>
+              <a:t>FOR THE PARTNER</a:t>
+            </a:r>
+          </a:p>
+        </p:txBody>
+      </p:sp>
+      <p:sp>
+        <p:nvSpPr>
+          <p:cNvPr id="202" name="Texto 202"/>
+          <p:cNvSpPr txBox="1"/>
+          <p:nvPr/>
+        </p:nvSpPr>
+        <p:spPr>
+          <a:xfrm>
+            <a:off x="609600" y="2850000"/>
+            <a:ext cx="10972800" cy="1400000"/>
           </a:xfrm>
           <a:prstGeom prst="rect">
             <a:avLst/>
@@ -4740,26 +4907,26 @@
           <a:p>
             <a:pPr algn="l"/>
             <a:r>
-              <a:rPr lang="es-ES" sz="2700" b="1" dirty="0">
-                <a:solidFill>
-                  <a:srgbClr val="990F3D"/>
-                </a:solidFill>
-              </a:rPr>
-              <a:t>What the licence allows and what it requires</a:t>
-            </a:r>
-          </a:p>
-        </p:txBody>
-      </p:sp>
-      <p:sp>
-        <p:nvSpPr>
-          <p:cNvPr id="210" name="Texto 210"/>
-          <p:cNvSpPr txBox="1"/>
-          <p:nvPr/>
-        </p:nvSpPr>
-        <p:spPr>
-          <a:xfrm>
-            <a:off x="609600" y="1330000"/>
-            <a:ext cx="10972800" cy="450000"/>
+              <a:rPr lang="es-ES" sz="4000" b="1" dirty="0">
+                <a:solidFill>
+                  <a:srgbClr val="FBE2CD"/>
+                </a:solidFill>
+              </a:rPr>
+              <a:t>Integrating SEVEN-G into your own methodology or product</a:t>
+            </a:r>
+          </a:p>
+        </p:txBody>
+      </p:sp>
+      <p:sp>
+        <p:nvSpPr>
+          <p:cNvPr id="203" name="Texto 203"/>
+          <p:cNvSpPr txBox="1"/>
+          <p:nvPr/>
+        </p:nvSpPr>
+        <p:spPr>
+          <a:xfrm>
+            <a:off x="609600" y="4400000"/>
+            <a:ext cx="10500000" cy="900000"/>
           </a:xfrm>
           <a:prstGeom prst="rect">
             <a:avLst/>
@@ -4774,394 +4941,12 @@
           <a:p>
             <a:pPr algn="l"/>
             <a:r>
-              <a:rPr lang="es-ES" sz="1500" dirty="0">
-                <a:solidFill>
-                  <a:srgbClr val="564D47"/>
-                </a:solidFill>
-              </a:rPr>
-              <a:t>Content: CC BY 4.0. Tool code: MIT</a:t>
-            </a:r>
-          </a:p>
-        </p:txBody>
-      </p:sp>
-      <p:sp>
-        <p:nvSpPr>
-          <p:cNvPr id="197" name="Caja 197"/>
-          <p:cNvSpPr/>
-          <p:nvPr/>
-        </p:nvSpPr>
-        <p:spPr>
-          <a:xfrm>
-            <a:off x="609600" y="2050000"/>
-            <a:ext cx="3577600" cy="800000"/>
-          </a:xfrm>
-          <a:prstGeom prst="roundRect">
-            <a:avLst>
-              <a:gd name="adj" fmla="val 6000"/>
-            </a:avLst>
-          </a:prstGeom>
-          <a:solidFill>
-            <a:srgbClr val="0D7680"/>
-          </a:solidFill>
-          <a:ln>
-            <a:noFill/>
-          </a:ln>
-        </p:spPr>
-        <p:txBody>
-          <a:bodyPr wrap="square" anchor="ctr" lIns="45720" rIns="45720">
-            <a:noAutofit/>
-          </a:bodyPr>
-          <a:lstStyle/>
-          <a:p>
-            <a:pPr algn="ctr"/>
-            <a:r>
-              <a:rPr lang="es-ES" sz="1700" b="1" dirty="0">
-                <a:solidFill>
-                  <a:srgbClr val="FFFFFF"/>
-                </a:solidFill>
-              </a:rPr>
-              <a:t>It allows</a:t>
-            </a:r>
-          </a:p>
-        </p:txBody>
-      </p:sp>
-      <p:sp>
-        <p:nvSpPr>
-          <p:cNvPr id="198" name="Caja 198"/>
-          <p:cNvSpPr/>
-          <p:nvPr/>
-        </p:nvSpPr>
-        <p:spPr>
-          <a:xfrm>
-            <a:off x="609600" y="2790000"/>
-            <a:ext cx="3577600" cy="2500000"/>
-          </a:xfrm>
-          <a:prstGeom prst="roundRect">
-            <a:avLst>
-              <a:gd name="adj" fmla="val 6000"/>
-            </a:avLst>
-          </a:prstGeom>
-          <a:solidFill>
-            <a:srgbClr val="F3CFB2"/>
-          </a:solidFill>
-          <a:ln>
-            <a:noFill/>
-          </a:ln>
-        </p:spPr>
-        <p:txBody>
-          <a:bodyPr wrap="square" anchor="ctr" lIns="45720" rIns="45720">
-            <a:noAutofit/>
-          </a:bodyPr>
-          <a:lstStyle/>
-          <a:p>
-            <a:pPr algn="ctr"/>
-            <a:r>
-              <a:rPr lang="es-ES" sz="1000" b="1" dirty="0">
-                <a:solidFill>
-                  <a:srgbClr val="2F2B28"/>
-                </a:solidFill>
-              </a:rPr>
-              <a:t/>
-            </a:r>
-          </a:p>
-        </p:txBody>
-      </p:sp>
-      <p:sp>
-        <p:nvSpPr>
-          <p:cNvPr id="199" name="Texto 199"/>
-          <p:cNvSpPr txBox="1"/>
-          <p:nvPr/>
-        </p:nvSpPr>
-        <p:spPr>
-          <a:xfrm>
-            <a:off x="649600" y="2890000"/>
-            <a:ext cx="3497600" cy="2340000"/>
-          </a:xfrm>
-          <a:prstGeom prst="rect">
-            <a:avLst/>
-          </a:prstGeom>
-          <a:noFill/>
-        </p:spPr>
-        <p:txBody>
-          <a:bodyPr wrap="square" anchor="t" lIns="45720" rIns="45720">
-            <a:noAutofit/>
-          </a:bodyPr>
-          <a:lstStyle/>
-          <a:p>
-            <a:pPr algn="l"/>
-            <a:r>
-              <a:rPr lang="es-ES" sz="1300" dirty="0">
-                <a:solidFill>
-                  <a:srgbClr val="2F2B28"/>
-                </a:solidFill>
-              </a:rPr>
-              <a:t>Copying, adapting, translating, trimming, renaming, merging with your methodology and building into products, including commercially, without asking permission or paying.</a:t>
-            </a:r>
-          </a:p>
-        </p:txBody>
-      </p:sp>
-      <p:sp>
-        <p:nvSpPr>
-          <p:cNvPr id="200" name="Caja 200"/>
-          <p:cNvSpPr/>
-          <p:nvPr/>
-        </p:nvSpPr>
-        <p:spPr>
-          <a:xfrm>
-            <a:off x="4307200" y="2050000"/>
-            <a:ext cx="3577600" cy="800000"/>
-          </a:xfrm>
-          <a:prstGeom prst="roundRect">
-            <a:avLst>
-              <a:gd name="adj" fmla="val 6000"/>
-            </a:avLst>
-          </a:prstGeom>
-          <a:solidFill>
-            <a:srgbClr val="0F5499"/>
-          </a:solidFill>
-          <a:ln>
-            <a:noFill/>
-          </a:ln>
-        </p:spPr>
-        <p:txBody>
-          <a:bodyPr wrap="square" anchor="ctr" lIns="45720" rIns="45720">
-            <a:noAutofit/>
-          </a:bodyPr>
-          <a:lstStyle/>
-          <a:p>
-            <a:pPr algn="ctr"/>
-            <a:r>
-              <a:rPr lang="es-ES" sz="1700" b="1" dirty="0">
-                <a:solidFill>
-                  <a:srgbClr val="FFFFFF"/>
-                </a:solidFill>
-              </a:rPr>
-              <a:t>It requires</a:t>
-            </a:r>
-          </a:p>
-        </p:txBody>
-      </p:sp>
-      <p:sp>
-        <p:nvSpPr>
-          <p:cNvPr id="201" name="Caja 201"/>
-          <p:cNvSpPr/>
-          <p:nvPr/>
-        </p:nvSpPr>
-        <p:spPr>
-          <a:xfrm>
-            <a:off x="4307200" y="2790000"/>
-            <a:ext cx="3577600" cy="2500000"/>
-          </a:xfrm>
-          <a:prstGeom prst="roundRect">
-            <a:avLst>
-              <a:gd name="adj" fmla="val 6000"/>
-            </a:avLst>
-          </a:prstGeom>
-          <a:solidFill>
-            <a:srgbClr val="F3CFB2"/>
-          </a:solidFill>
-          <a:ln>
-            <a:noFill/>
-          </a:ln>
-        </p:spPr>
-        <p:txBody>
-          <a:bodyPr wrap="square" anchor="ctr" lIns="45720" rIns="45720">
-            <a:noAutofit/>
-          </a:bodyPr>
-          <a:lstStyle/>
-          <a:p>
-            <a:pPr algn="ctr"/>
-            <a:r>
-              <a:rPr lang="es-ES" sz="1000" b="1" dirty="0">
-                <a:solidFill>
-                  <a:srgbClr val="2F2B28"/>
-                </a:solidFill>
-              </a:rPr>
-              <a:t/>
-            </a:r>
-          </a:p>
-        </p:txBody>
-      </p:sp>
-      <p:sp>
-        <p:nvSpPr>
-          <p:cNvPr id="202" name="Texto 202"/>
-          <p:cNvSpPr txBox="1"/>
-          <p:nvPr/>
-        </p:nvSpPr>
-        <p:spPr>
-          <a:xfrm>
-            <a:off x="4347200" y="2890000"/>
-            <a:ext cx="3497600" cy="2340000"/>
-          </a:xfrm>
-          <a:prstGeom prst="rect">
-            <a:avLst/>
-          </a:prstGeom>
-          <a:noFill/>
-        </p:spPr>
-        <p:txBody>
-          <a:bodyPr wrap="square" anchor="t" lIns="45720" rIns="45720">
-            <a:noAutofit/>
-          </a:bodyPr>
-          <a:lstStyle/>
-          <a:p>
-            <a:pPr algn="l"/>
-            <a:r>
-              <a:rPr lang="es-ES" sz="1300" dirty="0">
-                <a:solidFill>
-                  <a:srgbClr val="2F2B28"/>
-                </a:solidFill>
-              </a:rPr>
-              <a:t>Crediting the author (Fernando García Varela), linking the licence, indicating changes and keeping the legal notice. In code, keeping the copyright notice and the MIT licence.</a:t>
-            </a:r>
-          </a:p>
-        </p:txBody>
-      </p:sp>
-      <p:sp>
-        <p:nvSpPr>
-          <p:cNvPr id="203" name="Caja 203"/>
-          <p:cNvSpPr/>
-          <p:nvPr/>
-        </p:nvSpPr>
-        <p:spPr>
-          <a:xfrm>
-            <a:off x="8004800" y="2050000"/>
-            <a:ext cx="3577600" cy="800000"/>
-          </a:xfrm>
-          <a:prstGeom prst="roundRect">
-            <a:avLst>
-              <a:gd name="adj" fmla="val 6000"/>
-            </a:avLst>
-          </a:prstGeom>
-          <a:solidFill>
-            <a:srgbClr val="990F3D"/>
-          </a:solidFill>
-          <a:ln>
-            <a:noFill/>
-          </a:ln>
-        </p:spPr>
-        <p:txBody>
-          <a:bodyPr wrap="square" anchor="ctr" lIns="45720" rIns="45720">
-            <a:noAutofit/>
-          </a:bodyPr>
-          <a:lstStyle/>
-          <a:p>
-            <a:pPr algn="ctr"/>
-            <a:r>
-              <a:rPr lang="es-ES" sz="1700" b="1" dirty="0">
-                <a:solidFill>
-                  <a:srgbClr val="FFFFFF"/>
-                </a:solidFill>
-              </a:rPr>
-              <a:t>It does not grant</a:t>
-            </a:r>
-          </a:p>
-        </p:txBody>
-      </p:sp>
-      <p:sp>
-        <p:nvSpPr>
-          <p:cNvPr id="204" name="Caja 204"/>
-          <p:cNvSpPr/>
-          <p:nvPr/>
-        </p:nvSpPr>
-        <p:spPr>
-          <a:xfrm>
-            <a:off x="8004800" y="2790000"/>
-            <a:ext cx="3577600" cy="2500000"/>
-          </a:xfrm>
-          <a:prstGeom prst="roundRect">
-            <a:avLst>
-              <a:gd name="adj" fmla="val 6000"/>
-            </a:avLst>
-          </a:prstGeom>
-          <a:solidFill>
-            <a:srgbClr val="F3CFB2"/>
-          </a:solidFill>
-          <a:ln>
-            <a:noFill/>
-          </a:ln>
-        </p:spPr>
-        <p:txBody>
-          <a:bodyPr wrap="square" anchor="ctr" lIns="45720" rIns="45720">
-            <a:noAutofit/>
-          </a:bodyPr>
-          <a:lstStyle/>
-          <a:p>
-            <a:pPr algn="ctr"/>
-            <a:r>
-              <a:rPr lang="es-ES" sz="1000" b="1" dirty="0">
-                <a:solidFill>
-                  <a:srgbClr val="2F2B28"/>
-                </a:solidFill>
-              </a:rPr>
-              <a:t/>
-            </a:r>
-          </a:p>
-        </p:txBody>
-      </p:sp>
-      <p:sp>
-        <p:nvSpPr>
-          <p:cNvPr id="205" name="Texto 205"/>
-          <p:cNvSpPr txBox="1"/>
-          <p:nvPr/>
-        </p:nvSpPr>
-        <p:spPr>
-          <a:xfrm>
-            <a:off x="8044800" y="2890000"/>
-            <a:ext cx="3497600" cy="2340000"/>
-          </a:xfrm>
-          <a:prstGeom prst="rect">
-            <a:avLst/>
-          </a:prstGeom>
-          <a:noFill/>
-        </p:spPr>
-        <p:txBody>
-          <a:bodyPr wrap="square" anchor="t" lIns="45720" rIns="45720">
-            <a:noAutofit/>
-          </a:bodyPr>
-          <a:lstStyle/>
-          <a:p>
-            <a:pPr algn="l"/>
-            <a:r>
-              <a:rPr lang="es-ES" sz="1300" dirty="0">
-                <a:solidFill>
-                  <a:srgbClr val="2F2B28"/>
-                </a:solidFill>
-              </a:rPr>
-              <a:t>The trademark: SEVEN-G is a registered trademark. You may name it to state accurately what you used; not to suggest endorsement, accreditation or certification.</a:t>
-            </a:r>
-          </a:p>
-        </p:txBody>
-      </p:sp>
-      <p:sp>
-        <p:nvSpPr>
-          <p:cNvPr id="206" name="Texto 206"/>
-          <p:cNvSpPr txBox="1"/>
-          <p:nvPr/>
-        </p:nvSpPr>
-        <p:spPr>
-          <a:xfrm>
-            <a:off x="609600" y="6150000"/>
-            <a:ext cx="10972800" cy="500000"/>
-          </a:xfrm>
-          <a:prstGeom prst="rect">
-            <a:avLst/>
-          </a:prstGeom>
-          <a:noFill/>
-        </p:spPr>
-        <p:txBody>
-          <a:bodyPr wrap="square" anchor="t" lIns="45720" rIns="45720">
-            <a:noAutofit/>
-          </a:bodyPr>
-          <a:lstStyle/>
-          <a:p>
-            <a:pPr algn="l"/>
-            <a:r>
-              <a:rPr lang="es-ES" sz="1400" b="1" dirty="0">
-                <a:solidFill>
-                  <a:srgbClr val="0F5499"/>
-                </a:solidFill>
-              </a:rPr>
-              <a:t>Published versions are not revoked: what you integrate today you can keep using (document 93).</a:t>
+              <a:rPr lang="es-ES" sz="1700" dirty="0">
+                <a:solidFill>
+                  <a:srgbClr val="F3CFB2"/>
+                </a:solidFill>
+              </a:rPr>
+              <a:t>Here, "partner" means a company that builds the framework into its own offering under its open licence. There is no partner programme and no "official partner" status.</a:t>
             </a:r>
           </a:p>
         </p:txBody>
@@ -5201,7 +4986,7 @@
       </p:grpSpPr>
       <p:sp>
         <p:nvSpPr>
-          <p:cNvPr id="224" name="Marca"/>
+          <p:cNvPr id="214" name="Marca"/>
           <p:cNvSpPr/>
           <p:nvPr/>
         </p:nvSpPr>
@@ -5225,7 +5010,7 @@
       </p:sp>
       <p:sp>
         <p:nvSpPr>
-          <p:cNvPr id="225" name="Texto 225"/>
+          <p:cNvPr id="215" name="Texto 215"/>
           <p:cNvSpPr txBox="1"/>
           <p:nvPr/>
         </p:nvSpPr>
@@ -5259,7 +5044,7 @@
       </p:sp>
       <p:sp>
         <p:nvSpPr>
-          <p:cNvPr id="226" name="Texto 226"/>
+          <p:cNvPr id="216" name="Texto 216"/>
           <p:cNvSpPr txBox="1"/>
           <p:nvPr/>
         </p:nvSpPr>
@@ -5286,14 +5071,14 @@
                   <a:srgbClr val="990F3D"/>
                 </a:solidFill>
               </a:rPr>
-              <a:t>Modular adoption: four components</a:t>
-            </a:r>
-          </a:p>
-        </p:txBody>
-      </p:sp>
-      <p:sp>
-        <p:nvSpPr>
-          <p:cNvPr id="227" name="Texto 227"/>
+              <a:t>What the licence allows and what it requires</a:t>
+            </a:r>
+          </a:p>
+        </p:txBody>
+      </p:sp>
+      <p:sp>
+        <p:nvSpPr>
+          <p:cNvPr id="217" name="Texto 217"/>
           <p:cNvSpPr txBox="1"/>
           <p:nvPr/>
         </p:nvSpPr>
@@ -5320,21 +5105,21 @@
                   <a:srgbClr val="564D47"/>
                 </a:solidFill>
               </a:rPr>
-              <a:t>You can integrate the whole framework or just the pieces your methodology lacks</a:t>
-            </a:r>
-          </a:p>
-        </p:txBody>
-      </p:sp>
-      <p:sp>
-        <p:nvSpPr>
-          <p:cNvPr id="211" name="Caja 211"/>
+              <a:t>Content: CC BY 4.0. Tool code: MIT</a:t>
+            </a:r>
+          </a:p>
+        </p:txBody>
+      </p:sp>
+      <p:sp>
+        <p:nvSpPr>
+          <p:cNvPr id="204" name="Caja 204"/>
           <p:cNvSpPr/>
           <p:nvPr/>
         </p:nvSpPr>
         <p:spPr>
           <a:xfrm>
             <a:off x="609600" y="2050000"/>
-            <a:ext cx="2653200" cy="800000"/>
+            <a:ext cx="3577600" cy="800000"/>
           </a:xfrm>
           <a:prstGeom prst="roundRect">
             <a:avLst>
@@ -5342,7 +5127,7 @@
             </a:avLst>
           </a:prstGeom>
           <a:solidFill>
-            <a:srgbClr val="593380"/>
+            <a:srgbClr val="0D7680"/>
           </a:solidFill>
           <a:ln>
             <a:noFill/>
@@ -5361,21 +5146,21 @@
                   <a:srgbClr val="FFFFFF"/>
                 </a:solidFill>
               </a:rPr>
-              <a:t>A · Impact map</a:t>
-            </a:r>
-          </a:p>
-        </p:txBody>
-      </p:sp>
-      <p:sp>
-        <p:nvSpPr>
-          <p:cNvPr id="212" name="Caja 212"/>
+              <a:t>It allows</a:t>
+            </a:r>
+          </a:p>
+        </p:txBody>
+      </p:sp>
+      <p:sp>
+        <p:nvSpPr>
+          <p:cNvPr id="205" name="Caja 205"/>
           <p:cNvSpPr/>
           <p:nvPr/>
         </p:nvSpPr>
         <p:spPr>
           <a:xfrm>
             <a:off x="609600" y="2790000"/>
-            <a:ext cx="2653200" cy="2500000"/>
+            <a:ext cx="3577600" cy="2500000"/>
           </a:xfrm>
           <a:prstGeom prst="roundRect">
             <a:avLst>
@@ -5409,14 +5194,14 @@
       </p:sp>
       <p:sp>
         <p:nvSpPr>
-          <p:cNvPr id="213" name="Texto 213"/>
+          <p:cNvPr id="206" name="Texto 206"/>
           <p:cNvSpPr txBox="1"/>
           <p:nvPr/>
         </p:nvSpPr>
         <p:spPr>
           <a:xfrm>
             <a:off x="649600" y="2890000"/>
-            <a:ext cx="2573200" cy="2340000"/>
+            <a:ext cx="3497600" cy="2340000"/>
           </a:xfrm>
           <a:prstGeom prst="rect">
             <a:avLst/>
@@ -5436,21 +5221,21 @@
                   <a:srgbClr val="2F2B28"/>
                 </a:solidFill>
               </a:rPr>
-              <a:t>Nine spheres by three ambition levels (Optimise, Augment, Transform). Useful to prioritise and to talk to the board without technology.</a:t>
-            </a:r>
-          </a:p>
-        </p:txBody>
-      </p:sp>
-      <p:sp>
-        <p:nvSpPr>
-          <p:cNvPr id="214" name="Caja 214"/>
+              <a:t>Copying, adapting, translating, trimming, renaming, merging with your methodology and building into products, including commercially, without asking permission or paying.</a:t>
+            </a:r>
+          </a:p>
+        </p:txBody>
+      </p:sp>
+      <p:sp>
+        <p:nvSpPr>
+          <p:cNvPr id="207" name="Caja 207"/>
           <p:cNvSpPr/>
           <p:nvPr/>
         </p:nvSpPr>
         <p:spPr>
           <a:xfrm>
-            <a:off x="3382800" y="2050000"/>
-            <a:ext cx="2653200" cy="800000"/>
+            <a:off x="4307200" y="2050000"/>
+            <a:ext cx="3577600" cy="800000"/>
           </a:xfrm>
           <a:prstGeom prst="roundRect">
             <a:avLst>
@@ -5477,21 +5262,21 @@
                   <a:srgbClr val="FFFFFF"/>
                 </a:solidFill>
               </a:rPr>
-              <a:t>B · Governance</a:t>
-            </a:r>
-          </a:p>
-        </p:txBody>
-      </p:sp>
-      <p:sp>
-        <p:nvSpPr>
-          <p:cNvPr id="215" name="Caja 215"/>
+              <a:t>It requires</a:t>
+            </a:r>
+          </a:p>
+        </p:txBody>
+      </p:sp>
+      <p:sp>
+        <p:nvSpPr>
+          <p:cNvPr id="208" name="Caja 208"/>
           <p:cNvSpPr/>
           <p:nvPr/>
         </p:nvSpPr>
         <p:spPr>
           <a:xfrm>
-            <a:off x="3382800" y="2790000"/>
-            <a:ext cx="2653200" cy="2500000"/>
+            <a:off x="4307200" y="2790000"/>
+            <a:ext cx="3577600" cy="2500000"/>
           </a:xfrm>
           <a:prstGeom prst="roundRect">
             <a:avLst>
@@ -5525,14 +5310,14 @@
       </p:sp>
       <p:sp>
         <p:nvSpPr>
-          <p:cNvPr id="216" name="Texto 216"/>
-          <p:cNvSpPr txBox="1"/>
-          <p:nvPr/>
-        </p:nvSpPr>
-        <p:spPr>
-          <a:xfrm>
-            <a:off x="3422800" y="2890000"/>
-            <a:ext cx="2573200" cy="2340000"/>
+          <p:cNvPr id="209" name="Texto 209"/>
+          <p:cNvSpPr txBox="1"/>
+          <p:nvPr/>
+        </p:nvSpPr>
+        <p:spPr>
+          <a:xfrm>
+            <a:off x="4347200" y="2890000"/>
+            <a:ext cx="3497600" cy="2340000"/>
           </a:xfrm>
           <a:prstGeom prst="rect">
             <a:avLst/>
@@ -5552,21 +5337,21 @@
                   <a:srgbClr val="2F2B28"/>
                 </a:solidFill>
               </a:rPr>
-              <a:t>Phases, gates with dual validation, segregation of duties, risk, regulation and nonconformities.</a:t>
-            </a:r>
-          </a:p>
-        </p:txBody>
-      </p:sp>
-      <p:sp>
-        <p:nvSpPr>
-          <p:cNvPr id="217" name="Caja 217"/>
+              <a:t>Crediting the author (Fernando García Varela), linking the licence, indicating changes and keeping the legal notice. In code, keeping the copyright notice and the MIT licence.</a:t>
+            </a:r>
+          </a:p>
+        </p:txBody>
+      </p:sp>
+      <p:sp>
+        <p:nvSpPr>
+          <p:cNvPr id="210" name="Caja 210"/>
           <p:cNvSpPr/>
           <p:nvPr/>
         </p:nvSpPr>
         <p:spPr>
           <a:xfrm>
-            <a:off x="6156000" y="2050000"/>
-            <a:ext cx="2653200" cy="800000"/>
+            <a:off x="8004800" y="2050000"/>
+            <a:ext cx="3577600" cy="800000"/>
           </a:xfrm>
           <a:prstGeom prst="roundRect">
             <a:avLst>
@@ -5574,7 +5359,7 @@
             </a:avLst>
           </a:prstGeom>
           <a:solidFill>
-            <a:srgbClr val="0D7680"/>
+            <a:srgbClr val="990F3D"/>
           </a:solidFill>
           <a:ln>
             <a:noFill/>
@@ -5593,21 +5378,21 @@
                   <a:srgbClr val="FFFFFF"/>
                 </a:solidFill>
               </a:rPr>
-              <a:t>C · Measurement</a:t>
-            </a:r>
-          </a:p>
-        </p:txBody>
-      </p:sp>
-      <p:sp>
-        <p:nvSpPr>
-          <p:cNvPr id="218" name="Caja 218"/>
+              <a:t>It does not grant</a:t>
+            </a:r>
+          </a:p>
+        </p:txBody>
+      </p:sp>
+      <p:sp>
+        <p:nvSpPr>
+          <p:cNvPr id="211" name="Caja 211"/>
           <p:cNvSpPr/>
           <p:nvPr/>
         </p:nvSpPr>
         <p:spPr>
           <a:xfrm>
-            <a:off x="6156000" y="2790000"/>
-            <a:ext cx="2653200" cy="2500000"/>
+            <a:off x="8004800" y="2790000"/>
+            <a:ext cx="3577600" cy="2500000"/>
           </a:xfrm>
           <a:prstGeom prst="roundRect">
             <a:avLst>
@@ -5641,14 +5426,14 @@
       </p:sp>
       <p:sp>
         <p:nvSpPr>
-          <p:cNvPr id="219" name="Texto 219"/>
-          <p:cNvSpPr txBox="1"/>
-          <p:nvPr/>
-        </p:nvSpPr>
-        <p:spPr>
-          <a:xfrm>
-            <a:off x="6196000" y="2890000"/>
-            <a:ext cx="2573200" cy="2340000"/>
+          <p:cNvPr id="212" name="Texto 212"/>
+          <p:cNvSpPr txBox="1"/>
+          <p:nvPr/>
+        </p:nvSpPr>
+        <p:spPr>
+          <a:xfrm>
+            <a:off x="8044800" y="2890000"/>
+            <a:ext cx="3497600" cy="2340000"/>
           </a:xfrm>
           <a:prstGeom prst="rect">
             <a:avLst/>
@@ -5668,130 +5453,14 @@
                   <a:srgbClr val="2F2B28"/>
                 </a:solidFill>
               </a:rPr>
-              <a:t>Ten measurement rules, amount statuses, full costs and the transformation index.</a:t>
-            </a:r>
-          </a:p>
-        </p:txBody>
-      </p:sp>
-      <p:sp>
-        <p:nvSpPr>
-          <p:cNvPr id="220" name="Caja 220"/>
-          <p:cNvSpPr/>
-          <p:nvPr/>
-        </p:nvSpPr>
-        <p:spPr>
-          <a:xfrm>
-            <a:off x="8929200" y="2050000"/>
-            <a:ext cx="2653200" cy="800000"/>
-          </a:xfrm>
-          <a:prstGeom prst="roundRect">
-            <a:avLst>
-              <a:gd name="adj" fmla="val 6000"/>
-            </a:avLst>
-          </a:prstGeom>
-          <a:solidFill>
-            <a:srgbClr val="A5822A"/>
-          </a:solidFill>
-          <a:ln>
-            <a:noFill/>
-          </a:ln>
-        </p:spPr>
-        <p:txBody>
-          <a:bodyPr wrap="square" anchor="ctr" lIns="45720" rIns="45720">
-            <a:noAutofit/>
-          </a:bodyPr>
-          <a:lstStyle/>
-          <a:p>
-            <a:pPr algn="ctr"/>
-            <a:r>
-              <a:rPr lang="es-ES" sz="1700" b="1" dirty="0">
-                <a:solidFill>
-                  <a:srgbClr val="FFFFFF"/>
-                </a:solidFill>
-              </a:rPr>
-              <a:t>D · Tools</a:t>
-            </a:r>
-          </a:p>
-        </p:txBody>
-      </p:sp>
-      <p:sp>
-        <p:nvSpPr>
-          <p:cNvPr id="221" name="Caja 221"/>
-          <p:cNvSpPr/>
-          <p:nvPr/>
-        </p:nvSpPr>
-        <p:spPr>
-          <a:xfrm>
-            <a:off x="8929200" y="2790000"/>
-            <a:ext cx="2653200" cy="2500000"/>
-          </a:xfrm>
-          <a:prstGeom prst="roundRect">
-            <a:avLst>
-              <a:gd name="adj" fmla="val 6000"/>
-            </a:avLst>
-          </a:prstGeom>
-          <a:solidFill>
-            <a:srgbClr val="F3CFB2"/>
-          </a:solidFill>
-          <a:ln>
-            <a:noFill/>
-          </a:ln>
-        </p:spPr>
-        <p:txBody>
-          <a:bodyPr wrap="square" anchor="ctr" lIns="45720" rIns="45720">
-            <a:noAutofit/>
-          </a:bodyPr>
-          <a:lstStyle/>
-          <a:p>
-            <a:pPr algn="ctr"/>
-            <a:r>
-              <a:rPr lang="es-ES" sz="1000" b="1" dirty="0">
-                <a:solidFill>
-                  <a:srgbClr val="2F2B28"/>
-                </a:solidFill>
-              </a:rPr>
-              <a:t/>
-            </a:r>
-          </a:p>
-        </p:txBody>
-      </p:sp>
-      <p:sp>
-        <p:nvSpPr>
-          <p:cNvPr id="222" name="Texto 222"/>
-          <p:cNvSpPr txBox="1"/>
-          <p:nvPr/>
-        </p:nvSpPr>
-        <p:spPr>
-          <a:xfrm>
-            <a:off x="8969200" y="2890000"/>
-            <a:ext cx="2573200" cy="2340000"/>
-          </a:xfrm>
-          <a:prstGeom prst="rect">
-            <a:avLst/>
-          </a:prstGeom>
-          <a:noFill/>
-        </p:spPr>
-        <p:txBody>
-          <a:bodyPr wrap="square" anchor="t" lIns="45720" rIns="45720">
-            <a:noAutofit/>
-          </a:bodyPr>
-          <a:lstStyle/>
-          <a:p>
-            <a:pPr algn="l"/>
-            <a:r>
-              <a:rPr lang="es-ES" sz="1300" dirty="0">
-                <a:solidFill>
-                  <a:srgbClr val="2F2B28"/>
-                </a:solidFill>
-              </a:rPr>
-              <a:t>T01 register, calculators, maturity diagnostic and board dashboard: serverless HTML, JSON data, MIT code.</a:t>
-            </a:r>
-          </a:p>
-        </p:txBody>
-      </p:sp>
-      <p:sp>
-        <p:nvSpPr>
-          <p:cNvPr id="223" name="Texto 223"/>
+              <a:t>The trademark: SEVEN-G is a registered trademark. You may name it to state accurately what you used; not to suggest endorsement, accreditation or certification.</a:t>
+            </a:r>
+          </a:p>
+        </p:txBody>
+      </p:sp>
+      <p:sp>
+        <p:nvSpPr>
+          <p:cNvPr id="213" name="Texto 213"/>
           <p:cNvSpPr txBox="1"/>
           <p:nvPr/>
         </p:nvSpPr>
@@ -5818,7 +5487,7 @@
                   <a:srgbClr val="0F5499"/>
                 </a:solidFill>
               </a:rPr>
-              <a:t>If you call it "SEVEN-G", respect its six essential rules; otherwise say "adapted from" and state what changes.</a:t>
+              <a:t>Published versions are not revoked: what you integrate today you can keep using (document 93).</a:t>
             </a:r>
           </a:p>
         </p:txBody>
@@ -5858,7 +5527,7 @@
       </p:grpSpPr>
       <p:sp>
         <p:nvSpPr>
-          <p:cNvPr id="229" name="Marca"/>
+          <p:cNvPr id="231" name="Marca"/>
           <p:cNvSpPr/>
           <p:nvPr/>
         </p:nvSpPr>
@@ -5882,7 +5551,7 @@
       </p:sp>
       <p:sp>
         <p:nvSpPr>
-          <p:cNvPr id="230" name="Texto 230"/>
+          <p:cNvPr id="232" name="Texto 232"/>
           <p:cNvSpPr txBox="1"/>
           <p:nvPr/>
         </p:nvSpPr>
@@ -5916,7 +5585,7 @@
       </p:sp>
       <p:sp>
         <p:nvSpPr>
-          <p:cNvPr id="231" name="Texto 231"/>
+          <p:cNvPr id="233" name="Texto 233"/>
           <p:cNvSpPr txBox="1"/>
           <p:nvPr/>
         </p:nvSpPr>
@@ -5943,130 +5612,539 @@
                   <a:srgbClr val="990F3D"/>
                 </a:solidFill>
               </a:rPr>
-              <a:t>How to fit it into your methodology</a:t>
-            </a:r>
-          </a:p>
-        </p:txBody>
-      </p:sp>
-      <p:sp>
-        <p:nvSpPr>
-          <p:cNvPr id="228" name="Texto 228"/>
-          <p:cNvSpPr txBox="1"/>
-          <p:nvPr/>
-        </p:nvSpPr>
-        <p:spPr>
-          <a:xfrm>
-            <a:off x="609600" y="1750000"/>
-            <a:ext cx="10972800" cy="4400000"/>
-          </a:xfrm>
-          <a:prstGeom prst="rect">
-            <a:avLst/>
-          </a:prstGeom>
-          <a:noFill/>
-        </p:spPr>
-        <p:txBody>
-          <a:bodyPr wrap="square" anchor="t" lIns="45720" rIns="45720">
-            <a:noAutofit/>
-          </a:bodyPr>
-          <a:lstStyle/>
-          <a:p>
-            <a:pPr marL="285750" indent="-285750">
-              <a:spcAft>
-                <a:spcPts val="400"/>
-              </a:spcAft>
-              <a:buClr>
-                <a:srgbClr val="990F3D"/>
-              </a:buClr>
-              <a:buFont typeface="Arial"/>
-              <a:buChar char="•"/>
-            </a:pPr>
-            <a:r>
-              <a:rPr lang="es-ES" sz="1700" dirty="0">
-                <a:solidFill>
-                  <a:srgbClr val="2F2B28"/>
-                </a:solidFill>
-              </a:rPr>
-              <a:t>Build a mapping table: your stages against phases 0 to 7, your committees against the bodies, your deliverables against the P templates.</a:t>
-            </a:r>
-          </a:p>
-          <a:p>
-            <a:pPr marL="285750" indent="-285750">
-              <a:spcAft>
-                <a:spcPts val="400"/>
-              </a:spcAft>
-              <a:buClr>
-                <a:srgbClr val="990F3D"/>
-              </a:buClr>
-              <a:buFont typeface="Arial"/>
-              <a:buChar char="•"/>
-            </a:pPr>
-            <a:r>
-              <a:rPr lang="es-ES" sz="1700" dirty="0">
-                <a:solidFill>
-                  <a:srgbClr val="2F2B28"/>
-                </a:solidFill>
-              </a:rPr>
-              <a:t>Keep the codes (G0–G7, P01–P74, T01–T22) or publish your equivalence: your clients will be able to check against the source.</a:t>
-            </a:r>
-          </a:p>
-          <a:p>
-            <a:pPr marL="285750" indent="-285750">
-              <a:spcAft>
-                <a:spcPts val="400"/>
-              </a:spcAft>
-              <a:buClr>
-                <a:srgbClr val="990F3D"/>
-              </a:buClr>
-              <a:buFont typeface="Arial"/>
-              <a:buChar char="•"/>
-            </a:pPr>
-            <a:r>
-              <a:rPr lang="es-ES" sz="1700" dirty="0">
-                <a:solidFill>
-                  <a:srgbClr val="2F2B28"/>
-                </a:solidFill>
-              </a:rPr>
-              <a:t>You may change names, thresholds, deadlines and weights. Do not change what protects the client: segregation of duties, evidence before deciding and a status for every amount.</a:t>
-            </a:r>
-          </a:p>
-          <a:p>
-            <a:pPr marL="285750" indent="-285750">
-              <a:spcAft>
-                <a:spcPts val="400"/>
-              </a:spcAft>
-              <a:buClr>
-                <a:srgbClr val="990F3D"/>
-              </a:buClr>
-              <a:buFont typeface="Arial"/>
-              <a:buChar char="•"/>
-            </a:pPr>
-            <a:r>
-              <a:rPr lang="es-ES" sz="1700" dirty="0">
-                <a:solidFill>
-                  <a:srgbClr val="2F2B28"/>
-                </a:solidFill>
-              </a:rPr>
-              <a:t>State the base version and your changes; when the framework evolves, decide whether you update, and say so.</a:t>
-            </a:r>
-          </a:p>
-          <a:p>
-            <a:pPr marL="285750" indent="-285750">
-              <a:spcAft>
-                <a:spcPts val="400"/>
-              </a:spcAft>
-              <a:buClr>
-                <a:srgbClr val="990F3D"/>
-              </a:buClr>
-              <a:buFont typeface="Arial"/>
-              <a:buChar char="•"/>
-            </a:pPr>
-            <a:r>
-              <a:rPr lang="es-ES" sz="1700" dirty="0">
-                <a:solidFill>
-                  <a:srgbClr val="2F2B28"/>
-                </a:solidFill>
-              </a:rPr>
-              <a:t>In a work that mixes frameworks it must be clear what comes from SEVEN-G. You may license your own contributions as you wish, without blocking the original's licence.</a:t>
+              <a:t>Modular adoption: four components</a:t>
+            </a:r>
+          </a:p>
+        </p:txBody>
+      </p:sp>
+      <p:sp>
+        <p:nvSpPr>
+          <p:cNvPr id="234" name="Texto 234"/>
+          <p:cNvSpPr txBox="1"/>
+          <p:nvPr/>
+        </p:nvSpPr>
+        <p:spPr>
+          <a:xfrm>
+            <a:off x="609600" y="1330000"/>
+            <a:ext cx="10972800" cy="450000"/>
+          </a:xfrm>
+          <a:prstGeom prst="rect">
+            <a:avLst/>
+          </a:prstGeom>
+          <a:noFill/>
+        </p:spPr>
+        <p:txBody>
+          <a:bodyPr wrap="square" anchor="t" lIns="45720" rIns="45720">
+            <a:noAutofit/>
+          </a:bodyPr>
+          <a:lstStyle/>
+          <a:p>
+            <a:pPr algn="l"/>
+            <a:r>
+              <a:rPr lang="es-ES" sz="1500" dirty="0">
+                <a:solidFill>
+                  <a:srgbClr val="564D47"/>
+                </a:solidFill>
+              </a:rPr>
+              <a:t>You can integrate the whole framework or just the pieces your methodology lacks</a:t>
+            </a:r>
+          </a:p>
+        </p:txBody>
+      </p:sp>
+      <p:sp>
+        <p:nvSpPr>
+          <p:cNvPr id="218" name="Caja 218"/>
+          <p:cNvSpPr/>
+          <p:nvPr/>
+        </p:nvSpPr>
+        <p:spPr>
+          <a:xfrm>
+            <a:off x="609600" y="2050000"/>
+            <a:ext cx="2653200" cy="800000"/>
+          </a:xfrm>
+          <a:prstGeom prst="roundRect">
+            <a:avLst>
+              <a:gd name="adj" fmla="val 6000"/>
+            </a:avLst>
+          </a:prstGeom>
+          <a:solidFill>
+            <a:srgbClr val="593380"/>
+          </a:solidFill>
+          <a:ln>
+            <a:noFill/>
+          </a:ln>
+        </p:spPr>
+        <p:txBody>
+          <a:bodyPr wrap="square" anchor="ctr" lIns="45720" rIns="45720">
+            <a:noAutofit/>
+          </a:bodyPr>
+          <a:lstStyle/>
+          <a:p>
+            <a:pPr algn="ctr"/>
+            <a:r>
+              <a:rPr lang="es-ES" sz="1700" b="1" dirty="0">
+                <a:solidFill>
+                  <a:srgbClr val="FFFFFF"/>
+                </a:solidFill>
+              </a:rPr>
+              <a:t>A · Impact map</a:t>
+            </a:r>
+          </a:p>
+        </p:txBody>
+      </p:sp>
+      <p:sp>
+        <p:nvSpPr>
+          <p:cNvPr id="219" name="Caja 219"/>
+          <p:cNvSpPr/>
+          <p:nvPr/>
+        </p:nvSpPr>
+        <p:spPr>
+          <a:xfrm>
+            <a:off x="609600" y="2790000"/>
+            <a:ext cx="2653200" cy="2500000"/>
+          </a:xfrm>
+          <a:prstGeom prst="roundRect">
+            <a:avLst>
+              <a:gd name="adj" fmla="val 6000"/>
+            </a:avLst>
+          </a:prstGeom>
+          <a:solidFill>
+            <a:srgbClr val="F3CFB2"/>
+          </a:solidFill>
+          <a:ln>
+            <a:noFill/>
+          </a:ln>
+        </p:spPr>
+        <p:txBody>
+          <a:bodyPr wrap="square" anchor="ctr" lIns="45720" rIns="45720">
+            <a:noAutofit/>
+          </a:bodyPr>
+          <a:lstStyle/>
+          <a:p>
+            <a:pPr algn="ctr"/>
+            <a:r>
+              <a:rPr lang="es-ES" sz="1000" b="1" dirty="0">
+                <a:solidFill>
+                  <a:srgbClr val="2F2B28"/>
+                </a:solidFill>
+              </a:rPr>
+              <a:t/>
+            </a:r>
+          </a:p>
+        </p:txBody>
+      </p:sp>
+      <p:sp>
+        <p:nvSpPr>
+          <p:cNvPr id="220" name="Texto 220"/>
+          <p:cNvSpPr txBox="1"/>
+          <p:nvPr/>
+        </p:nvSpPr>
+        <p:spPr>
+          <a:xfrm>
+            <a:off x="649600" y="2890000"/>
+            <a:ext cx="2573200" cy="2340000"/>
+          </a:xfrm>
+          <a:prstGeom prst="rect">
+            <a:avLst/>
+          </a:prstGeom>
+          <a:noFill/>
+        </p:spPr>
+        <p:txBody>
+          <a:bodyPr wrap="square" anchor="t" lIns="45720" rIns="45720">
+            <a:noAutofit/>
+          </a:bodyPr>
+          <a:lstStyle/>
+          <a:p>
+            <a:pPr algn="l"/>
+            <a:r>
+              <a:rPr lang="es-ES" sz="1300" dirty="0">
+                <a:solidFill>
+                  <a:srgbClr val="2F2B28"/>
+                </a:solidFill>
+              </a:rPr>
+              <a:t>Nine spheres by three ambition levels (Optimise, Augment, Transform). Useful to prioritise and to talk to the board without technology.</a:t>
+            </a:r>
+          </a:p>
+        </p:txBody>
+      </p:sp>
+      <p:sp>
+        <p:nvSpPr>
+          <p:cNvPr id="221" name="Caja 221"/>
+          <p:cNvSpPr/>
+          <p:nvPr/>
+        </p:nvSpPr>
+        <p:spPr>
+          <a:xfrm>
+            <a:off x="3382800" y="2050000"/>
+            <a:ext cx="2653200" cy="800000"/>
+          </a:xfrm>
+          <a:prstGeom prst="roundRect">
+            <a:avLst>
+              <a:gd name="adj" fmla="val 6000"/>
+            </a:avLst>
+          </a:prstGeom>
+          <a:solidFill>
+            <a:srgbClr val="0F5499"/>
+          </a:solidFill>
+          <a:ln>
+            <a:noFill/>
+          </a:ln>
+        </p:spPr>
+        <p:txBody>
+          <a:bodyPr wrap="square" anchor="ctr" lIns="45720" rIns="45720">
+            <a:noAutofit/>
+          </a:bodyPr>
+          <a:lstStyle/>
+          <a:p>
+            <a:pPr algn="ctr"/>
+            <a:r>
+              <a:rPr lang="es-ES" sz="1700" b="1" dirty="0">
+                <a:solidFill>
+                  <a:srgbClr val="FFFFFF"/>
+                </a:solidFill>
+              </a:rPr>
+              <a:t>B · Governance</a:t>
+            </a:r>
+          </a:p>
+        </p:txBody>
+      </p:sp>
+      <p:sp>
+        <p:nvSpPr>
+          <p:cNvPr id="222" name="Caja 222"/>
+          <p:cNvSpPr/>
+          <p:nvPr/>
+        </p:nvSpPr>
+        <p:spPr>
+          <a:xfrm>
+            <a:off x="3382800" y="2790000"/>
+            <a:ext cx="2653200" cy="2500000"/>
+          </a:xfrm>
+          <a:prstGeom prst="roundRect">
+            <a:avLst>
+              <a:gd name="adj" fmla="val 6000"/>
+            </a:avLst>
+          </a:prstGeom>
+          <a:solidFill>
+            <a:srgbClr val="F3CFB2"/>
+          </a:solidFill>
+          <a:ln>
+            <a:noFill/>
+          </a:ln>
+        </p:spPr>
+        <p:txBody>
+          <a:bodyPr wrap="square" anchor="ctr" lIns="45720" rIns="45720">
+            <a:noAutofit/>
+          </a:bodyPr>
+          <a:lstStyle/>
+          <a:p>
+            <a:pPr algn="ctr"/>
+            <a:r>
+              <a:rPr lang="es-ES" sz="1000" b="1" dirty="0">
+                <a:solidFill>
+                  <a:srgbClr val="2F2B28"/>
+                </a:solidFill>
+              </a:rPr>
+              <a:t/>
+            </a:r>
+          </a:p>
+        </p:txBody>
+      </p:sp>
+      <p:sp>
+        <p:nvSpPr>
+          <p:cNvPr id="223" name="Texto 223"/>
+          <p:cNvSpPr txBox="1"/>
+          <p:nvPr/>
+        </p:nvSpPr>
+        <p:spPr>
+          <a:xfrm>
+            <a:off x="3422800" y="2890000"/>
+            <a:ext cx="2573200" cy="2340000"/>
+          </a:xfrm>
+          <a:prstGeom prst="rect">
+            <a:avLst/>
+          </a:prstGeom>
+          <a:noFill/>
+        </p:spPr>
+        <p:txBody>
+          <a:bodyPr wrap="square" anchor="t" lIns="45720" rIns="45720">
+            <a:noAutofit/>
+          </a:bodyPr>
+          <a:lstStyle/>
+          <a:p>
+            <a:pPr algn="l"/>
+            <a:r>
+              <a:rPr lang="es-ES" sz="1300" dirty="0">
+                <a:solidFill>
+                  <a:srgbClr val="2F2B28"/>
+                </a:solidFill>
+              </a:rPr>
+              <a:t>Phases, gates with dual validation, segregation of duties, risk, regulation and nonconformities.</a:t>
+            </a:r>
+          </a:p>
+        </p:txBody>
+      </p:sp>
+      <p:sp>
+        <p:nvSpPr>
+          <p:cNvPr id="224" name="Caja 224"/>
+          <p:cNvSpPr/>
+          <p:nvPr/>
+        </p:nvSpPr>
+        <p:spPr>
+          <a:xfrm>
+            <a:off x="6156000" y="2050000"/>
+            <a:ext cx="2653200" cy="800000"/>
+          </a:xfrm>
+          <a:prstGeom prst="roundRect">
+            <a:avLst>
+              <a:gd name="adj" fmla="val 6000"/>
+            </a:avLst>
+          </a:prstGeom>
+          <a:solidFill>
+            <a:srgbClr val="0D7680"/>
+          </a:solidFill>
+          <a:ln>
+            <a:noFill/>
+          </a:ln>
+        </p:spPr>
+        <p:txBody>
+          <a:bodyPr wrap="square" anchor="ctr" lIns="45720" rIns="45720">
+            <a:noAutofit/>
+          </a:bodyPr>
+          <a:lstStyle/>
+          <a:p>
+            <a:pPr algn="ctr"/>
+            <a:r>
+              <a:rPr lang="es-ES" sz="1700" b="1" dirty="0">
+                <a:solidFill>
+                  <a:srgbClr val="FFFFFF"/>
+                </a:solidFill>
+              </a:rPr>
+              <a:t>C · Measurement</a:t>
+            </a:r>
+          </a:p>
+        </p:txBody>
+      </p:sp>
+      <p:sp>
+        <p:nvSpPr>
+          <p:cNvPr id="225" name="Caja 225"/>
+          <p:cNvSpPr/>
+          <p:nvPr/>
+        </p:nvSpPr>
+        <p:spPr>
+          <a:xfrm>
+            <a:off x="6156000" y="2790000"/>
+            <a:ext cx="2653200" cy="2500000"/>
+          </a:xfrm>
+          <a:prstGeom prst="roundRect">
+            <a:avLst>
+              <a:gd name="adj" fmla="val 6000"/>
+            </a:avLst>
+          </a:prstGeom>
+          <a:solidFill>
+            <a:srgbClr val="F3CFB2"/>
+          </a:solidFill>
+          <a:ln>
+            <a:noFill/>
+          </a:ln>
+        </p:spPr>
+        <p:txBody>
+          <a:bodyPr wrap="square" anchor="ctr" lIns="45720" rIns="45720">
+            <a:noAutofit/>
+          </a:bodyPr>
+          <a:lstStyle/>
+          <a:p>
+            <a:pPr algn="ctr"/>
+            <a:r>
+              <a:rPr lang="es-ES" sz="1000" b="1" dirty="0">
+                <a:solidFill>
+                  <a:srgbClr val="2F2B28"/>
+                </a:solidFill>
+              </a:rPr>
+              <a:t/>
+            </a:r>
+          </a:p>
+        </p:txBody>
+      </p:sp>
+      <p:sp>
+        <p:nvSpPr>
+          <p:cNvPr id="226" name="Texto 226"/>
+          <p:cNvSpPr txBox="1"/>
+          <p:nvPr/>
+        </p:nvSpPr>
+        <p:spPr>
+          <a:xfrm>
+            <a:off x="6196000" y="2890000"/>
+            <a:ext cx="2573200" cy="2340000"/>
+          </a:xfrm>
+          <a:prstGeom prst="rect">
+            <a:avLst/>
+          </a:prstGeom>
+          <a:noFill/>
+        </p:spPr>
+        <p:txBody>
+          <a:bodyPr wrap="square" anchor="t" lIns="45720" rIns="45720">
+            <a:noAutofit/>
+          </a:bodyPr>
+          <a:lstStyle/>
+          <a:p>
+            <a:pPr algn="l"/>
+            <a:r>
+              <a:rPr lang="es-ES" sz="1300" dirty="0">
+                <a:solidFill>
+                  <a:srgbClr val="2F2B28"/>
+                </a:solidFill>
+              </a:rPr>
+              <a:t>Ten measurement rules, amount statuses, full costs and the transformation index.</a:t>
+            </a:r>
+          </a:p>
+        </p:txBody>
+      </p:sp>
+      <p:sp>
+        <p:nvSpPr>
+          <p:cNvPr id="227" name="Caja 227"/>
+          <p:cNvSpPr/>
+          <p:nvPr/>
+        </p:nvSpPr>
+        <p:spPr>
+          <a:xfrm>
+            <a:off x="8929200" y="2050000"/>
+            <a:ext cx="2653200" cy="800000"/>
+          </a:xfrm>
+          <a:prstGeom prst="roundRect">
+            <a:avLst>
+              <a:gd name="adj" fmla="val 6000"/>
+            </a:avLst>
+          </a:prstGeom>
+          <a:solidFill>
+            <a:srgbClr val="A5822A"/>
+          </a:solidFill>
+          <a:ln>
+            <a:noFill/>
+          </a:ln>
+        </p:spPr>
+        <p:txBody>
+          <a:bodyPr wrap="square" anchor="ctr" lIns="45720" rIns="45720">
+            <a:noAutofit/>
+          </a:bodyPr>
+          <a:lstStyle/>
+          <a:p>
+            <a:pPr algn="ctr"/>
+            <a:r>
+              <a:rPr lang="es-ES" sz="1700" b="1" dirty="0">
+                <a:solidFill>
+                  <a:srgbClr val="FFFFFF"/>
+                </a:solidFill>
+              </a:rPr>
+              <a:t>D · Tools</a:t>
+            </a:r>
+          </a:p>
+        </p:txBody>
+      </p:sp>
+      <p:sp>
+        <p:nvSpPr>
+          <p:cNvPr id="228" name="Caja 228"/>
+          <p:cNvSpPr/>
+          <p:nvPr/>
+        </p:nvSpPr>
+        <p:spPr>
+          <a:xfrm>
+            <a:off x="8929200" y="2790000"/>
+            <a:ext cx="2653200" cy="2500000"/>
+          </a:xfrm>
+          <a:prstGeom prst="roundRect">
+            <a:avLst>
+              <a:gd name="adj" fmla="val 6000"/>
+            </a:avLst>
+          </a:prstGeom>
+          <a:solidFill>
+            <a:srgbClr val="F3CFB2"/>
+          </a:solidFill>
+          <a:ln>
+            <a:noFill/>
+          </a:ln>
+        </p:spPr>
+        <p:txBody>
+          <a:bodyPr wrap="square" anchor="ctr" lIns="45720" rIns="45720">
+            <a:noAutofit/>
+          </a:bodyPr>
+          <a:lstStyle/>
+          <a:p>
+            <a:pPr algn="ctr"/>
+            <a:r>
+              <a:rPr lang="es-ES" sz="1000" b="1" dirty="0">
+                <a:solidFill>
+                  <a:srgbClr val="2F2B28"/>
+                </a:solidFill>
+              </a:rPr>
+              <a:t/>
+            </a:r>
+          </a:p>
+        </p:txBody>
+      </p:sp>
+      <p:sp>
+        <p:nvSpPr>
+          <p:cNvPr id="229" name="Texto 229"/>
+          <p:cNvSpPr txBox="1"/>
+          <p:nvPr/>
+        </p:nvSpPr>
+        <p:spPr>
+          <a:xfrm>
+            <a:off x="8969200" y="2890000"/>
+            <a:ext cx="2573200" cy="2340000"/>
+          </a:xfrm>
+          <a:prstGeom prst="rect">
+            <a:avLst/>
+          </a:prstGeom>
+          <a:noFill/>
+        </p:spPr>
+        <p:txBody>
+          <a:bodyPr wrap="square" anchor="t" lIns="45720" rIns="45720">
+            <a:noAutofit/>
+          </a:bodyPr>
+          <a:lstStyle/>
+          <a:p>
+            <a:pPr algn="l"/>
+            <a:r>
+              <a:rPr lang="es-ES" sz="1300" dirty="0">
+                <a:solidFill>
+                  <a:srgbClr val="2F2B28"/>
+                </a:solidFill>
+              </a:rPr>
+              <a:t>T01 register, calculators, maturity diagnostic and board dashboard: serverless HTML, JSON data, MIT code.</a:t>
+            </a:r>
+          </a:p>
+        </p:txBody>
+      </p:sp>
+      <p:sp>
+        <p:nvSpPr>
+          <p:cNvPr id="230" name="Texto 230"/>
+          <p:cNvSpPr txBox="1"/>
+          <p:nvPr/>
+        </p:nvSpPr>
+        <p:spPr>
+          <a:xfrm>
+            <a:off x="609600" y="6150000"/>
+            <a:ext cx="10972800" cy="500000"/>
+          </a:xfrm>
+          <a:prstGeom prst="rect">
+            <a:avLst/>
+          </a:prstGeom>
+          <a:noFill/>
+        </p:spPr>
+        <p:txBody>
+          <a:bodyPr wrap="square" anchor="t" lIns="45720" rIns="45720">
+            <a:noAutofit/>
+          </a:bodyPr>
+          <a:lstStyle/>
+          <a:p>
+            <a:pPr algn="l"/>
+            <a:r>
+              <a:rPr lang="es-ES" sz="1400" b="1" dirty="0">
+                <a:solidFill>
+                  <a:srgbClr val="0F5499"/>
+                </a:solidFill>
+              </a:rPr>
+              <a:t>If you call it "SEVEN-G", respect its six essential rules; otherwise say "adapted from" and state what changes.</a:t>
             </a:r>
           </a:p>
         </p:txBody>
@@ -6106,7 +6184,7 @@
       </p:grpSpPr>
       <p:sp>
         <p:nvSpPr>
-          <p:cNvPr id="233" name="Marca"/>
+          <p:cNvPr id="236" name="Marca"/>
           <p:cNvSpPr/>
           <p:nvPr/>
         </p:nvSpPr>
@@ -6130,7 +6208,7 @@
       </p:sp>
       <p:sp>
         <p:nvSpPr>
-          <p:cNvPr id="234" name="Texto 234"/>
+          <p:cNvPr id="237" name="Texto 237"/>
           <p:cNvSpPr txBox="1"/>
           <p:nvPr/>
         </p:nvSpPr>
@@ -6164,7 +6242,7 @@
       </p:sp>
       <p:sp>
         <p:nvSpPr>
-          <p:cNvPr id="235" name="Texto 235"/>
+          <p:cNvPr id="238" name="Texto 238"/>
           <p:cNvSpPr txBox="1"/>
           <p:nvPr/>
         </p:nvSpPr>
@@ -6191,14 +6269,14 @@
                   <a:srgbClr val="990F3D"/>
                 </a:solidFill>
               </a:rPr>
-              <a:t>Technical integration: data and tools</a:t>
-            </a:r>
-          </a:p>
-        </p:txBody>
-      </p:sp>
-      <p:sp>
-        <p:nvSpPr>
-          <p:cNvPr id="232" name="Texto 232"/>
+              <a:t>How to fit it into your methodology</a:t>
+            </a:r>
+          </a:p>
+        </p:txBody>
+      </p:sp>
+      <p:sp>
+        <p:nvSpPr>
+          <p:cNvPr id="235" name="Texto 235"/>
           <p:cNvSpPr txBox="1"/>
           <p:nvPr/>
         </p:nvSpPr>
@@ -6234,7 +6312,7 @@
                   <a:srgbClr val="2F2B28"/>
                 </a:solidFill>
               </a:rPr>
-              <a:t>One data model for everything: the T01 register's JSON, with its published schema. It can be imported, exported and merged by initiative code.</a:t>
+              <a:t>Build a mapping table: your stages against phases 0 to 7, your committees against the bodies, your deliverables against the P templates.</a:t>
             </a:r>
           </a:p>
           <a:p>
@@ -6254,7 +6332,7 @@
                   <a:srgbClr val="2F2B28"/>
                 </a:solidFill>
               </a:rPr>
-              <a:t>You can feed that JSON from your own platform (project management, GRC, CRM) and generate the board dashboard with the T17 connector.</a:t>
+              <a:t>Keep the codes (G0–G7, P01–P74, T01–T22) or publish your equivalence: your clients will be able to check against the source.</a:t>
             </a:r>
           </a:p>
           <a:p>
@@ -6274,7 +6352,7 @@
                   <a:srgbClr val="2F2B28"/>
                 </a:solidFill>
               </a:rPr>
-              <a:t>The tools are serverless HTML: host them wherever you like, with your brand next to the attribution, and they send data to no one.</a:t>
+              <a:t>You may change names, thresholds, deadlines and weights. Do not change what protects the client: segregation of duties, evidence before deciding and a status for every amount.</a:t>
             </a:r>
           </a:p>
           <a:p>
@@ -6294,7 +6372,7 @@
                   <a:srgbClr val="2F2B28"/>
                 </a:solidFill>
               </a:rPr>
-              <a:t>The 74 templates are generated in Word from Markdown: you can change styles and cover and regenerate them with your branding.</a:t>
+              <a:t>State the base version and your changes; when the framework evolves, decide whether you update, and say so.</a:t>
             </a:r>
           </a:p>
           <a:p>
@@ -6314,27 +6392,7 @@
                   <a:srgbClr val="2F2B28"/>
                 </a:solidFill>
               </a:rPr>
-              <a:t>New schema versions only add optional fields: old files keep working.</a:t>
-            </a:r>
-          </a:p>
-          <a:p>
-            <a:pPr marL="285750" indent="-285750">
-              <a:spcAft>
-                <a:spcPts val="400"/>
-              </a:spcAft>
-              <a:buClr>
-                <a:srgbClr val="990F3D"/>
-              </a:buClr>
-              <a:buFont typeface="Arial"/>
-              <a:buChar char="•"/>
-            </a:pPr>
-            <a:r>
-              <a:rPr lang="es-ES" sz="1700" dirty="0">
-                <a:solidFill>
-                  <a:srgbClr val="2F2B28"/>
-                </a:solidFill>
-              </a:rPr>
-              <a:t>The client's data belongs to the client: always leave it in an open format.</a:t>
+              <a:t>In a work that mixes frameworks it must be clear what comes from SEVEN-G. You may license your own contributions as you wish, without blocking the original's licence.</a:t>
             </a:r>
           </a:p>
         </p:txBody>
@@ -6374,7 +6432,7 @@
       </p:grpSpPr>
       <p:sp>
         <p:nvSpPr>
-          <p:cNvPr id="246" name="Marca"/>
+          <p:cNvPr id="240" name="Marca"/>
           <p:cNvSpPr/>
           <p:nvPr/>
         </p:nvSpPr>
@@ -6398,7 +6456,7 @@
       </p:sp>
       <p:sp>
         <p:nvSpPr>
-          <p:cNvPr id="247" name="Texto 247"/>
+          <p:cNvPr id="241" name="Texto 241"/>
           <p:cNvSpPr txBox="1"/>
           <p:nvPr/>
         </p:nvSpPr>
@@ -6432,7 +6490,7 @@
       </p:sp>
       <p:sp>
         <p:nvSpPr>
-          <p:cNvPr id="248" name="Texto 248"/>
+          <p:cNvPr id="242" name="Texto 242"/>
           <p:cNvSpPr txBox="1"/>
           <p:nvPr/>
         </p:nvSpPr>
@@ -6459,423 +6517,150 @@
                   <a:srgbClr val="990F3D"/>
                 </a:solidFill>
               </a:rPr>
-              <a:t>How to name it in front of your clients</a:t>
-            </a:r>
-          </a:p>
-        </p:txBody>
-      </p:sp>
-      <p:sp>
-        <p:nvSpPr>
-          <p:cNvPr id="249" name="Texto 249"/>
-          <p:cNvSpPr txBox="1"/>
-          <p:nvPr/>
-        </p:nvSpPr>
-        <p:spPr>
-          <a:xfrm>
-            <a:off x="609600" y="1330000"/>
-            <a:ext cx="10972800" cy="450000"/>
-          </a:xfrm>
-          <a:prstGeom prst="rect">
-            <a:avLst/>
-          </a:prstGeom>
-          <a:noFill/>
-        </p:spPr>
-        <p:txBody>
-          <a:bodyPr wrap="square" anchor="t" lIns="45720" rIns="45720">
-            <a:noAutofit/>
-          </a:bodyPr>
-          <a:lstStyle/>
-          <a:p>
-            <a:pPr algn="l"/>
-            <a:r>
-              <a:rPr lang="es-ES" sz="1500" dirty="0">
-                <a:solidFill>
-                  <a:srgbClr val="564D47"/>
-                </a:solidFill>
-              </a:rPr>
-              <a:t>Stating accurately what was used is mandatory; suggesting endorsement is not allowed</a:t>
-            </a:r>
-          </a:p>
-        </p:txBody>
-      </p:sp>
-      <p:sp>
-        <p:nvSpPr>
-          <p:cNvPr id="236" name="Caja 236"/>
-          <p:cNvSpPr/>
-          <p:nvPr/>
-        </p:nvSpPr>
-        <p:spPr>
-          <a:xfrm>
-            <a:off x="609600" y="2050000"/>
-            <a:ext cx="3577600" cy="800000"/>
-          </a:xfrm>
-          <a:prstGeom prst="roundRect">
-            <a:avLst>
-              <a:gd name="adj" fmla="val 6000"/>
-            </a:avLst>
-          </a:prstGeom>
-          <a:solidFill>
-            <a:srgbClr val="0D7680"/>
-          </a:solidFill>
-          <a:ln>
-            <a:noFill/>
-          </a:ln>
-        </p:spPr>
-        <p:txBody>
-          <a:bodyPr wrap="square" anchor="ctr" lIns="45720" rIns="45720">
-            <a:noAutofit/>
-          </a:bodyPr>
-          <a:lstStyle/>
-          <a:p>
-            <a:pPr algn="ctr"/>
-            <a:r>
-              <a:rPr lang="es-ES" sz="1700" b="1" dirty="0">
-                <a:solidFill>
-                  <a:srgbClr val="FFFFFF"/>
-                </a:solidFill>
-              </a:rPr>
-              <a:t>Appropriate</a:t>
-            </a:r>
-          </a:p>
-        </p:txBody>
-      </p:sp>
-      <p:sp>
-        <p:nvSpPr>
-          <p:cNvPr id="237" name="Caja 237"/>
-          <p:cNvSpPr/>
-          <p:nvPr/>
-        </p:nvSpPr>
-        <p:spPr>
-          <a:xfrm>
-            <a:off x="609600" y="2790000"/>
-            <a:ext cx="3577600" cy="2500000"/>
-          </a:xfrm>
-          <a:prstGeom prst="roundRect">
-            <a:avLst>
-              <a:gd name="adj" fmla="val 6000"/>
-            </a:avLst>
-          </a:prstGeom>
-          <a:solidFill>
-            <a:srgbClr val="F3CFB2"/>
-          </a:solidFill>
-          <a:ln>
-            <a:noFill/>
-          </a:ln>
-        </p:spPr>
-        <p:txBody>
-          <a:bodyPr wrap="square" anchor="ctr" lIns="45720" rIns="45720">
-            <a:noAutofit/>
-          </a:bodyPr>
-          <a:lstStyle/>
-          <a:p>
-            <a:pPr algn="ctr"/>
-            <a:r>
-              <a:rPr lang="es-ES" sz="1000" b="1" dirty="0">
-                <a:solidFill>
-                  <a:srgbClr val="2F2B28"/>
-                </a:solidFill>
-              </a:rPr>
-              <a:t/>
-            </a:r>
-          </a:p>
-        </p:txBody>
-      </p:sp>
-      <p:sp>
-        <p:nvSpPr>
-          <p:cNvPr id="238" name="Texto 238"/>
-          <p:cNvSpPr txBox="1"/>
-          <p:nvPr/>
-        </p:nvSpPr>
-        <p:spPr>
-          <a:xfrm>
-            <a:off x="649600" y="2890000"/>
-            <a:ext cx="3497600" cy="2340000"/>
-          </a:xfrm>
-          <a:prstGeom prst="rect">
-            <a:avLst/>
-          </a:prstGeom>
-          <a:noFill/>
-        </p:spPr>
-        <p:txBody>
-          <a:bodyPr wrap="square" anchor="t" lIns="45720" rIns="45720">
-            <a:noAutofit/>
-          </a:bodyPr>
-          <a:lstStyle/>
-          <a:p>
-            <a:pPr algn="l"/>
-            <a:r>
-              <a:rPr lang="es-ES" sz="1300" dirty="0">
-                <a:solidFill>
-                  <a:srgbClr val="2F2B28"/>
-                </a:solidFill>
-              </a:rPr>
-              <a:t>"Based on SEVEN-G (version 0.80)."   "Adapted from SEVEN-G; changes: …"   "Includes the SEVEN-G initiative register (MIT)."   "This adaptation is not endorsed by the author."</a:t>
-            </a:r>
-          </a:p>
-        </p:txBody>
-      </p:sp>
-      <p:sp>
-        <p:nvSpPr>
-          <p:cNvPr id="239" name="Caja 239"/>
-          <p:cNvSpPr/>
-          <p:nvPr/>
-        </p:nvSpPr>
-        <p:spPr>
-          <a:xfrm>
-            <a:off x="4307200" y="2050000"/>
-            <a:ext cx="3577600" cy="800000"/>
-          </a:xfrm>
-          <a:prstGeom prst="roundRect">
-            <a:avLst>
-              <a:gd name="adj" fmla="val 6000"/>
-            </a:avLst>
-          </a:prstGeom>
-          <a:solidFill>
-            <a:srgbClr val="990F3D"/>
-          </a:solidFill>
-          <a:ln>
-            <a:noFill/>
-          </a:ln>
-        </p:spPr>
-        <p:txBody>
-          <a:bodyPr wrap="square" anchor="ctr" lIns="45720" rIns="45720">
-            <a:noAutofit/>
-          </a:bodyPr>
-          <a:lstStyle/>
-          <a:p>
-            <a:pPr algn="ctr"/>
-            <a:r>
-              <a:rPr lang="es-ES" sz="1700" b="1" dirty="0">
-                <a:solidFill>
-                  <a:srgbClr val="FFFFFF"/>
-                </a:solidFill>
-              </a:rPr>
-              <a:t>Inappropriate</a:t>
-            </a:r>
-          </a:p>
-        </p:txBody>
-      </p:sp>
-      <p:sp>
-        <p:nvSpPr>
-          <p:cNvPr id="240" name="Caja 240"/>
-          <p:cNvSpPr/>
-          <p:nvPr/>
-        </p:nvSpPr>
-        <p:spPr>
-          <a:xfrm>
-            <a:off x="4307200" y="2790000"/>
-            <a:ext cx="3577600" cy="2500000"/>
-          </a:xfrm>
-          <a:prstGeom prst="roundRect">
-            <a:avLst>
-              <a:gd name="adj" fmla="val 6000"/>
-            </a:avLst>
-          </a:prstGeom>
-          <a:solidFill>
-            <a:srgbClr val="F3CFB2"/>
-          </a:solidFill>
-          <a:ln>
-            <a:noFill/>
-          </a:ln>
-        </p:spPr>
-        <p:txBody>
-          <a:bodyPr wrap="square" anchor="ctr" lIns="45720" rIns="45720">
-            <a:noAutofit/>
-          </a:bodyPr>
-          <a:lstStyle/>
-          <a:p>
-            <a:pPr algn="ctr"/>
-            <a:r>
-              <a:rPr lang="es-ES" sz="1000" b="1" dirty="0">
-                <a:solidFill>
-                  <a:srgbClr val="2F2B28"/>
-                </a:solidFill>
-              </a:rPr>
-              <a:t/>
-            </a:r>
-          </a:p>
-        </p:txBody>
-      </p:sp>
-      <p:sp>
-        <p:nvSpPr>
-          <p:cNvPr id="241" name="Texto 241"/>
-          <p:cNvSpPr txBox="1"/>
-          <p:nvPr/>
-        </p:nvSpPr>
-        <p:spPr>
-          <a:xfrm>
-            <a:off x="4347200" y="2890000"/>
-            <a:ext cx="3497600" cy="2340000"/>
-          </a:xfrm>
-          <a:prstGeom prst="rect">
-            <a:avLst/>
-          </a:prstGeom>
-          <a:noFill/>
-        </p:spPr>
-        <p:txBody>
-          <a:bodyPr wrap="square" anchor="t" lIns="45720" rIns="45720">
-            <a:noAutofit/>
-          </a:bodyPr>
-          <a:lstStyle/>
-          <a:p>
-            <a:pPr algn="l"/>
-            <a:r>
-              <a:rPr lang="es-ES" sz="1300" dirty="0">
-                <a:solidFill>
-                  <a:srgbClr val="2F2B28"/>
-                </a:solidFill>
-              </a:rPr>
-              <a:t>"Official partner", "approved", "accredited", "SEVEN-G certification", or stating on behalf of SEVEN-G or the author that a client complies with regulation.</a:t>
-            </a:r>
-          </a:p>
-        </p:txBody>
-      </p:sp>
-      <p:sp>
-        <p:nvSpPr>
-          <p:cNvPr id="242" name="Caja 242"/>
-          <p:cNvSpPr/>
-          <p:nvPr/>
-        </p:nvSpPr>
-        <p:spPr>
-          <a:xfrm>
-            <a:off x="8004800" y="2050000"/>
-            <a:ext cx="3577600" cy="800000"/>
-          </a:xfrm>
-          <a:prstGeom prst="roundRect">
-            <a:avLst>
-              <a:gd name="adj" fmla="val 6000"/>
-            </a:avLst>
-          </a:prstGeom>
-          <a:solidFill>
-            <a:srgbClr val="0F5499"/>
-          </a:solidFill>
-          <a:ln>
-            <a:noFill/>
-          </a:ln>
-        </p:spPr>
-        <p:txBody>
-          <a:bodyPr wrap="square" anchor="ctr" lIns="45720" rIns="45720">
-            <a:noAutofit/>
-          </a:bodyPr>
-          <a:lstStyle/>
-          <a:p>
-            <a:pPr algn="ctr"/>
-            <a:r>
-              <a:rPr lang="es-ES" sz="1700" b="1" dirty="0">
-                <a:solidFill>
-                  <a:srgbClr val="FFFFFF"/>
-                </a:solidFill>
-              </a:rPr>
-              <a:t>Notice to keep</a:t>
-            </a:r>
-          </a:p>
-        </p:txBody>
-      </p:sp>
-      <p:sp>
-        <p:nvSpPr>
-          <p:cNvPr id="243" name="Caja 243"/>
-          <p:cNvSpPr/>
-          <p:nvPr/>
-        </p:nvSpPr>
-        <p:spPr>
-          <a:xfrm>
-            <a:off x="8004800" y="2790000"/>
-            <a:ext cx="3577600" cy="2500000"/>
-          </a:xfrm>
-          <a:prstGeom prst="roundRect">
-            <a:avLst>
-              <a:gd name="adj" fmla="val 6000"/>
-            </a:avLst>
-          </a:prstGeom>
-          <a:solidFill>
-            <a:srgbClr val="F3CFB2"/>
-          </a:solidFill>
-          <a:ln>
-            <a:noFill/>
-          </a:ln>
-        </p:spPr>
-        <p:txBody>
-          <a:bodyPr wrap="square" anchor="ctr" lIns="45720" rIns="45720">
-            <a:noAutofit/>
-          </a:bodyPr>
-          <a:lstStyle/>
-          <a:p>
-            <a:pPr algn="ctr"/>
-            <a:r>
-              <a:rPr lang="es-ES" sz="1000" b="1" dirty="0">
-                <a:solidFill>
-                  <a:srgbClr val="2F2B28"/>
-                </a:solidFill>
-              </a:rPr>
-              <a:t/>
-            </a:r>
-          </a:p>
-        </p:txBody>
-      </p:sp>
-      <p:sp>
-        <p:nvSpPr>
-          <p:cNvPr id="244" name="Texto 244"/>
-          <p:cNvSpPr txBox="1"/>
-          <p:nvPr/>
-        </p:nvSpPr>
-        <p:spPr>
-          <a:xfrm>
-            <a:off x="8044800" y="2890000"/>
-            <a:ext cx="3497600" cy="2340000"/>
-          </a:xfrm>
-          <a:prstGeom prst="rect">
-            <a:avLst/>
-          </a:prstGeom>
-          <a:noFill/>
-        </p:spPr>
-        <p:txBody>
-          <a:bodyPr wrap="square" anchor="t" lIns="45720" rIns="45720">
-            <a:noAutofit/>
-          </a:bodyPr>
-          <a:lstStyle/>
-          <a:p>
-            <a:pPr algn="l"/>
-            <a:r>
-              <a:rPr lang="es-ES" sz="1300" dirty="0">
-                <a:solidFill>
-                  <a:srgbClr val="2F2B28"/>
-                </a:solidFill>
-              </a:rPr>
-              <a:t>"Based on SEVEN-G (Fernando García Varela, CC BY 4.0). Guidance content, "as is", without warranties; not legal advice. The author does not validate or endorse this work."</a:t>
-            </a:r>
-          </a:p>
-        </p:txBody>
-      </p:sp>
-      <p:sp>
-        <p:nvSpPr>
-          <p:cNvPr id="245" name="Texto 245"/>
-          <p:cNvSpPr txBox="1"/>
-          <p:nvPr/>
-        </p:nvSpPr>
-        <p:spPr>
-          <a:xfrm>
-            <a:off x="609600" y="6150000"/>
-            <a:ext cx="10972800" cy="500000"/>
-          </a:xfrm>
-          <a:prstGeom prst="rect">
-            <a:avLst/>
-          </a:prstGeom>
-          <a:noFill/>
-        </p:spPr>
-        <p:txBody>
-          <a:bodyPr wrap="square" anchor="t" lIns="45720" rIns="45720">
-            <a:noAutofit/>
-          </a:bodyPr>
-          <a:lstStyle/>
-          <a:p>
-            <a:pPr algn="l"/>
-            <a:r>
-              <a:rPr lang="es-ES" sz="1400" b="1" dirty="0">
-                <a:solidFill>
-                  <a:srgbClr val="0F5499"/>
-                </a:solidFill>
-              </a:rPr>
-              <a:t>Document 93, sections 6, 7, 8 and 11.9.</a:t>
+              <a:t>Technical integration: data and tools</a:t>
+            </a:r>
+          </a:p>
+        </p:txBody>
+      </p:sp>
+      <p:sp>
+        <p:nvSpPr>
+          <p:cNvPr id="239" name="Texto 239"/>
+          <p:cNvSpPr txBox="1"/>
+          <p:nvPr/>
+        </p:nvSpPr>
+        <p:spPr>
+          <a:xfrm>
+            <a:off x="609600" y="1750000"/>
+            <a:ext cx="10972800" cy="4400000"/>
+          </a:xfrm>
+          <a:prstGeom prst="rect">
+            <a:avLst/>
+          </a:prstGeom>
+          <a:noFill/>
+        </p:spPr>
+        <p:txBody>
+          <a:bodyPr wrap="square" anchor="t" lIns="45720" rIns="45720">
+            <a:noAutofit/>
+          </a:bodyPr>
+          <a:lstStyle/>
+          <a:p>
+            <a:pPr marL="285750" indent="-285750">
+              <a:spcAft>
+                <a:spcPts val="400"/>
+              </a:spcAft>
+              <a:buClr>
+                <a:srgbClr val="990F3D"/>
+              </a:buClr>
+              <a:buFont typeface="Arial"/>
+              <a:buChar char="•"/>
+            </a:pPr>
+            <a:r>
+              <a:rPr lang="es-ES" sz="1700" dirty="0">
+                <a:solidFill>
+                  <a:srgbClr val="2F2B28"/>
+                </a:solidFill>
+              </a:rPr>
+              <a:t>One data model for everything: the T01 register's JSON, with its published schema. It can be imported, exported and merged by initiative code.</a:t>
+            </a:r>
+          </a:p>
+          <a:p>
+            <a:pPr marL="285750" indent="-285750">
+              <a:spcAft>
+                <a:spcPts val="400"/>
+              </a:spcAft>
+              <a:buClr>
+                <a:srgbClr val="990F3D"/>
+              </a:buClr>
+              <a:buFont typeface="Arial"/>
+              <a:buChar char="•"/>
+            </a:pPr>
+            <a:r>
+              <a:rPr lang="es-ES" sz="1700" dirty="0">
+                <a:solidFill>
+                  <a:srgbClr val="2F2B28"/>
+                </a:solidFill>
+              </a:rPr>
+              <a:t>You can feed that JSON from your own platform (project management, GRC, CRM) and generate the board dashboard with the T17 connector.</a:t>
+            </a:r>
+          </a:p>
+          <a:p>
+            <a:pPr marL="285750" indent="-285750">
+              <a:spcAft>
+                <a:spcPts val="400"/>
+              </a:spcAft>
+              <a:buClr>
+                <a:srgbClr val="990F3D"/>
+              </a:buClr>
+              <a:buFont typeface="Arial"/>
+              <a:buChar char="•"/>
+            </a:pPr>
+            <a:r>
+              <a:rPr lang="es-ES" sz="1700" dirty="0">
+                <a:solidFill>
+                  <a:srgbClr val="2F2B28"/>
+                </a:solidFill>
+              </a:rPr>
+              <a:t>The tools are serverless HTML: host them wherever you like, with your brand next to the attribution, and they send data to no one.</a:t>
+            </a:r>
+          </a:p>
+          <a:p>
+            <a:pPr marL="285750" indent="-285750">
+              <a:spcAft>
+                <a:spcPts val="400"/>
+              </a:spcAft>
+              <a:buClr>
+                <a:srgbClr val="990F3D"/>
+              </a:buClr>
+              <a:buFont typeface="Arial"/>
+              <a:buChar char="•"/>
+            </a:pPr>
+            <a:r>
+              <a:rPr lang="es-ES" sz="1700" dirty="0">
+                <a:solidFill>
+                  <a:srgbClr val="2F2B28"/>
+                </a:solidFill>
+              </a:rPr>
+              <a:t>The 74 templates are generated in Word from Markdown: you can change styles and cover and regenerate them with your branding.</a:t>
+            </a:r>
+          </a:p>
+          <a:p>
+            <a:pPr marL="285750" indent="-285750">
+              <a:spcAft>
+                <a:spcPts val="400"/>
+              </a:spcAft>
+              <a:buClr>
+                <a:srgbClr val="990F3D"/>
+              </a:buClr>
+              <a:buFont typeface="Arial"/>
+              <a:buChar char="•"/>
+            </a:pPr>
+            <a:r>
+              <a:rPr lang="es-ES" sz="1700" dirty="0">
+                <a:solidFill>
+                  <a:srgbClr val="2F2B28"/>
+                </a:solidFill>
+              </a:rPr>
+              <a:t>New schema versions only add optional fields: old files keep working.</a:t>
+            </a:r>
+          </a:p>
+          <a:p>
+            <a:pPr marL="285750" indent="-285750">
+              <a:spcAft>
+                <a:spcPts val="400"/>
+              </a:spcAft>
+              <a:buClr>
+                <a:srgbClr val="990F3D"/>
+              </a:buClr>
+              <a:buFont typeface="Arial"/>
+              <a:buChar char="•"/>
+            </a:pPr>
+            <a:r>
+              <a:rPr lang="es-ES" sz="1700" dirty="0">
+                <a:solidFill>
+                  <a:srgbClr val="2F2B28"/>
+                </a:solidFill>
+              </a:rPr>
+              <a:t>The client's data belongs to the client: always leave it in an open format.</a:t>
             </a:r>
           </a:p>
         </p:txBody>
@@ -6915,7 +6700,7 @@
       </p:grpSpPr>
       <p:sp>
         <p:nvSpPr>
-          <p:cNvPr id="251" name="Marca"/>
+          <p:cNvPr id="253" name="Marca"/>
           <p:cNvSpPr/>
           <p:nvPr/>
         </p:nvSpPr>
@@ -6939,7 +6724,7 @@
       </p:sp>
       <p:sp>
         <p:nvSpPr>
-          <p:cNvPr id="252" name="Texto 252"/>
+          <p:cNvPr id="254" name="Texto 254"/>
           <p:cNvSpPr txBox="1"/>
           <p:nvPr/>
         </p:nvSpPr>
@@ -6973,7 +6758,7 @@
       </p:sp>
       <p:sp>
         <p:nvSpPr>
-          <p:cNvPr id="253" name="Texto 253"/>
+          <p:cNvPr id="255" name="Texto 255"/>
           <p:cNvSpPr txBox="1"/>
           <p:nvPr/>
         </p:nvSpPr>
@@ -7000,110 +6785,423 @@
                   <a:srgbClr val="990F3D"/>
                 </a:solidFill>
               </a:rPr>
-              <a:t>Staying current and improving the framework</a:t>
-            </a:r>
-          </a:p>
-        </p:txBody>
-      </p:sp>
-      <p:sp>
-        <p:nvSpPr>
-          <p:cNvPr id="250" name="Texto 250"/>
-          <p:cNvSpPr txBox="1"/>
-          <p:nvPr/>
-        </p:nvSpPr>
-        <p:spPr>
-          <a:xfrm>
-            <a:off x="609600" y="1750000"/>
-            <a:ext cx="10972800" cy="4400000"/>
-          </a:xfrm>
-          <a:prstGeom prst="rect">
-            <a:avLst/>
-          </a:prstGeom>
-          <a:noFill/>
-        </p:spPr>
-        <p:txBody>
-          <a:bodyPr wrap="square" anchor="t" lIns="45720" rIns="45720">
-            <a:noAutofit/>
-          </a:bodyPr>
-          <a:lstStyle/>
-          <a:p>
-            <a:pPr marL="285750" indent="-285750">
-              <a:spcAft>
-                <a:spcPts val="400"/>
-              </a:spcAft>
-              <a:buClr>
-                <a:srgbClr val="990F3D"/>
-              </a:buClr>
-              <a:buFont typeface="Arial"/>
-              <a:buChar char="•"/>
-            </a:pPr>
-            <a:r>
-              <a:rPr lang="es-ES" sz="1800" dirty="0">
-                <a:solidFill>
-                  <a:srgbClr val="2F2B28"/>
-                </a:solidFill>
-              </a:rPr>
-              <a:t>The site publishes the framework version and each document's version history: review the changes before updating your adaptation.</a:t>
-            </a:r>
-          </a:p>
-          <a:p>
-            <a:pPr marL="285750" indent="-285750">
-              <a:spcAft>
-                <a:spcPts val="400"/>
-              </a:spcAft>
-              <a:buClr>
-                <a:srgbClr val="990F3D"/>
-              </a:buClr>
-              <a:buFont typeface="Arial"/>
-              <a:buChar char="•"/>
-            </a:pPr>
-            <a:r>
-              <a:rPr lang="es-ES" sz="1800" dirty="0">
-                <a:solidFill>
-                  <a:srgbClr val="2F2B28"/>
-                </a:solidFill>
-              </a:rPr>
-              <a:t>Issues and improvement requests: on the community page, with no account or email; the most-voted requests are taken on.</a:t>
-            </a:r>
-          </a:p>
-          <a:p>
-            <a:pPr marL="285750" indent="-285750">
-              <a:spcAft>
-                <a:spcPts val="400"/>
-              </a:spcAft>
-              <a:buClr>
-                <a:srgbClr val="990F3D"/>
-              </a:buClr>
-              <a:buFont typeface="Arial"/>
-              <a:buChar char="•"/>
-            </a:pPr>
-            <a:r>
-              <a:rPr lang="es-ES" sz="1800" dirty="0">
-                <a:solidFill>
-                  <a:srgbClr val="2F2B28"/>
-                </a:solidFill>
-              </a:rPr>
-              <a:t>A translation of yours is a derivative work: state that it is unofficial, which version it comes from and who made it.</a:t>
-            </a:r>
-          </a:p>
-          <a:p>
-            <a:pPr marL="285750" indent="-285750">
-              <a:spcAft>
-                <a:spcPts val="400"/>
-              </a:spcAft>
-              <a:buClr>
-                <a:srgbClr val="990F3D"/>
-              </a:buClr>
-              <a:buFont typeface="Arial"/>
-              <a:buChar char="•"/>
-            </a:pPr>
-            <a:r>
-              <a:rPr lang="es-ES" sz="1800" dirty="0">
-                <a:solidFill>
-                  <a:srgbClr val="2F2B28"/>
-                </a:solidFill>
-              </a:rPr>
-              <a:t>If you want something the licence does not give —custom work, training for your team, an agreement on trademark use— talk to the author. You start that conversation.</a:t>
+              <a:t>How to name it in front of your clients</a:t>
+            </a:r>
+          </a:p>
+        </p:txBody>
+      </p:sp>
+      <p:sp>
+        <p:nvSpPr>
+          <p:cNvPr id="256" name="Texto 256"/>
+          <p:cNvSpPr txBox="1"/>
+          <p:nvPr/>
+        </p:nvSpPr>
+        <p:spPr>
+          <a:xfrm>
+            <a:off x="609600" y="1330000"/>
+            <a:ext cx="10972800" cy="450000"/>
+          </a:xfrm>
+          <a:prstGeom prst="rect">
+            <a:avLst/>
+          </a:prstGeom>
+          <a:noFill/>
+        </p:spPr>
+        <p:txBody>
+          <a:bodyPr wrap="square" anchor="t" lIns="45720" rIns="45720">
+            <a:noAutofit/>
+          </a:bodyPr>
+          <a:lstStyle/>
+          <a:p>
+            <a:pPr algn="l"/>
+            <a:r>
+              <a:rPr lang="es-ES" sz="1500" dirty="0">
+                <a:solidFill>
+                  <a:srgbClr val="564D47"/>
+                </a:solidFill>
+              </a:rPr>
+              <a:t>Stating accurately what was used is mandatory; suggesting endorsement is not allowed</a:t>
+            </a:r>
+          </a:p>
+        </p:txBody>
+      </p:sp>
+      <p:sp>
+        <p:nvSpPr>
+          <p:cNvPr id="243" name="Caja 243"/>
+          <p:cNvSpPr/>
+          <p:nvPr/>
+        </p:nvSpPr>
+        <p:spPr>
+          <a:xfrm>
+            <a:off x="609600" y="2050000"/>
+            <a:ext cx="3577600" cy="800000"/>
+          </a:xfrm>
+          <a:prstGeom prst="roundRect">
+            <a:avLst>
+              <a:gd name="adj" fmla="val 6000"/>
+            </a:avLst>
+          </a:prstGeom>
+          <a:solidFill>
+            <a:srgbClr val="0D7680"/>
+          </a:solidFill>
+          <a:ln>
+            <a:noFill/>
+          </a:ln>
+        </p:spPr>
+        <p:txBody>
+          <a:bodyPr wrap="square" anchor="ctr" lIns="45720" rIns="45720">
+            <a:noAutofit/>
+          </a:bodyPr>
+          <a:lstStyle/>
+          <a:p>
+            <a:pPr algn="ctr"/>
+            <a:r>
+              <a:rPr lang="es-ES" sz="1700" b="1" dirty="0">
+                <a:solidFill>
+                  <a:srgbClr val="FFFFFF"/>
+                </a:solidFill>
+              </a:rPr>
+              <a:t>Appropriate</a:t>
+            </a:r>
+          </a:p>
+        </p:txBody>
+      </p:sp>
+      <p:sp>
+        <p:nvSpPr>
+          <p:cNvPr id="244" name="Caja 244"/>
+          <p:cNvSpPr/>
+          <p:nvPr/>
+        </p:nvSpPr>
+        <p:spPr>
+          <a:xfrm>
+            <a:off x="609600" y="2790000"/>
+            <a:ext cx="3577600" cy="2500000"/>
+          </a:xfrm>
+          <a:prstGeom prst="roundRect">
+            <a:avLst>
+              <a:gd name="adj" fmla="val 6000"/>
+            </a:avLst>
+          </a:prstGeom>
+          <a:solidFill>
+            <a:srgbClr val="F3CFB2"/>
+          </a:solidFill>
+          <a:ln>
+            <a:noFill/>
+          </a:ln>
+        </p:spPr>
+        <p:txBody>
+          <a:bodyPr wrap="square" anchor="ctr" lIns="45720" rIns="45720">
+            <a:noAutofit/>
+          </a:bodyPr>
+          <a:lstStyle/>
+          <a:p>
+            <a:pPr algn="ctr"/>
+            <a:r>
+              <a:rPr lang="es-ES" sz="1000" b="1" dirty="0">
+                <a:solidFill>
+                  <a:srgbClr val="2F2B28"/>
+                </a:solidFill>
+              </a:rPr>
+              <a:t/>
+            </a:r>
+          </a:p>
+        </p:txBody>
+      </p:sp>
+      <p:sp>
+        <p:nvSpPr>
+          <p:cNvPr id="245" name="Texto 245"/>
+          <p:cNvSpPr txBox="1"/>
+          <p:nvPr/>
+        </p:nvSpPr>
+        <p:spPr>
+          <a:xfrm>
+            <a:off x="649600" y="2890000"/>
+            <a:ext cx="3497600" cy="2340000"/>
+          </a:xfrm>
+          <a:prstGeom prst="rect">
+            <a:avLst/>
+          </a:prstGeom>
+          <a:noFill/>
+        </p:spPr>
+        <p:txBody>
+          <a:bodyPr wrap="square" anchor="t" lIns="45720" rIns="45720">
+            <a:noAutofit/>
+          </a:bodyPr>
+          <a:lstStyle/>
+          <a:p>
+            <a:pPr algn="l"/>
+            <a:r>
+              <a:rPr lang="es-ES" sz="1300" dirty="0">
+                <a:solidFill>
+                  <a:srgbClr val="2F2B28"/>
+                </a:solidFill>
+              </a:rPr>
+              <a:t>"Based on SEVEN-G (version 0.80)."   "Adapted from SEVEN-G; changes: …"   "Includes the SEVEN-G initiative register (MIT)."   "This adaptation is not endorsed by the author."</a:t>
+            </a:r>
+          </a:p>
+        </p:txBody>
+      </p:sp>
+      <p:sp>
+        <p:nvSpPr>
+          <p:cNvPr id="246" name="Caja 246"/>
+          <p:cNvSpPr/>
+          <p:nvPr/>
+        </p:nvSpPr>
+        <p:spPr>
+          <a:xfrm>
+            <a:off x="4307200" y="2050000"/>
+            <a:ext cx="3577600" cy="800000"/>
+          </a:xfrm>
+          <a:prstGeom prst="roundRect">
+            <a:avLst>
+              <a:gd name="adj" fmla="val 6000"/>
+            </a:avLst>
+          </a:prstGeom>
+          <a:solidFill>
+            <a:srgbClr val="990F3D"/>
+          </a:solidFill>
+          <a:ln>
+            <a:noFill/>
+          </a:ln>
+        </p:spPr>
+        <p:txBody>
+          <a:bodyPr wrap="square" anchor="ctr" lIns="45720" rIns="45720">
+            <a:noAutofit/>
+          </a:bodyPr>
+          <a:lstStyle/>
+          <a:p>
+            <a:pPr algn="ctr"/>
+            <a:r>
+              <a:rPr lang="es-ES" sz="1700" b="1" dirty="0">
+                <a:solidFill>
+                  <a:srgbClr val="FFFFFF"/>
+                </a:solidFill>
+              </a:rPr>
+              <a:t>Inappropriate</a:t>
+            </a:r>
+          </a:p>
+        </p:txBody>
+      </p:sp>
+      <p:sp>
+        <p:nvSpPr>
+          <p:cNvPr id="247" name="Caja 247"/>
+          <p:cNvSpPr/>
+          <p:nvPr/>
+        </p:nvSpPr>
+        <p:spPr>
+          <a:xfrm>
+            <a:off x="4307200" y="2790000"/>
+            <a:ext cx="3577600" cy="2500000"/>
+          </a:xfrm>
+          <a:prstGeom prst="roundRect">
+            <a:avLst>
+              <a:gd name="adj" fmla="val 6000"/>
+            </a:avLst>
+          </a:prstGeom>
+          <a:solidFill>
+            <a:srgbClr val="F3CFB2"/>
+          </a:solidFill>
+          <a:ln>
+            <a:noFill/>
+          </a:ln>
+        </p:spPr>
+        <p:txBody>
+          <a:bodyPr wrap="square" anchor="ctr" lIns="45720" rIns="45720">
+            <a:noAutofit/>
+          </a:bodyPr>
+          <a:lstStyle/>
+          <a:p>
+            <a:pPr algn="ctr"/>
+            <a:r>
+              <a:rPr lang="es-ES" sz="1000" b="1" dirty="0">
+                <a:solidFill>
+                  <a:srgbClr val="2F2B28"/>
+                </a:solidFill>
+              </a:rPr>
+              <a:t/>
+            </a:r>
+          </a:p>
+        </p:txBody>
+      </p:sp>
+      <p:sp>
+        <p:nvSpPr>
+          <p:cNvPr id="248" name="Texto 248"/>
+          <p:cNvSpPr txBox="1"/>
+          <p:nvPr/>
+        </p:nvSpPr>
+        <p:spPr>
+          <a:xfrm>
+            <a:off x="4347200" y="2890000"/>
+            <a:ext cx="3497600" cy="2340000"/>
+          </a:xfrm>
+          <a:prstGeom prst="rect">
+            <a:avLst/>
+          </a:prstGeom>
+          <a:noFill/>
+        </p:spPr>
+        <p:txBody>
+          <a:bodyPr wrap="square" anchor="t" lIns="45720" rIns="45720">
+            <a:noAutofit/>
+          </a:bodyPr>
+          <a:lstStyle/>
+          <a:p>
+            <a:pPr algn="l"/>
+            <a:r>
+              <a:rPr lang="es-ES" sz="1300" dirty="0">
+                <a:solidFill>
+                  <a:srgbClr val="2F2B28"/>
+                </a:solidFill>
+              </a:rPr>
+              <a:t>"Official partner", "approved", "accredited", "SEVEN-G certification", or stating on behalf of SEVEN-G or the author that a client complies with regulation.</a:t>
+            </a:r>
+          </a:p>
+        </p:txBody>
+      </p:sp>
+      <p:sp>
+        <p:nvSpPr>
+          <p:cNvPr id="249" name="Caja 249"/>
+          <p:cNvSpPr/>
+          <p:nvPr/>
+        </p:nvSpPr>
+        <p:spPr>
+          <a:xfrm>
+            <a:off x="8004800" y="2050000"/>
+            <a:ext cx="3577600" cy="800000"/>
+          </a:xfrm>
+          <a:prstGeom prst="roundRect">
+            <a:avLst>
+              <a:gd name="adj" fmla="val 6000"/>
+            </a:avLst>
+          </a:prstGeom>
+          <a:solidFill>
+            <a:srgbClr val="0F5499"/>
+          </a:solidFill>
+          <a:ln>
+            <a:noFill/>
+          </a:ln>
+        </p:spPr>
+        <p:txBody>
+          <a:bodyPr wrap="square" anchor="ctr" lIns="45720" rIns="45720">
+            <a:noAutofit/>
+          </a:bodyPr>
+          <a:lstStyle/>
+          <a:p>
+            <a:pPr algn="ctr"/>
+            <a:r>
+              <a:rPr lang="es-ES" sz="1700" b="1" dirty="0">
+                <a:solidFill>
+                  <a:srgbClr val="FFFFFF"/>
+                </a:solidFill>
+              </a:rPr>
+              <a:t>Notice to keep</a:t>
+            </a:r>
+          </a:p>
+        </p:txBody>
+      </p:sp>
+      <p:sp>
+        <p:nvSpPr>
+          <p:cNvPr id="250" name="Caja 250"/>
+          <p:cNvSpPr/>
+          <p:nvPr/>
+        </p:nvSpPr>
+        <p:spPr>
+          <a:xfrm>
+            <a:off x="8004800" y="2790000"/>
+            <a:ext cx="3577600" cy="2500000"/>
+          </a:xfrm>
+          <a:prstGeom prst="roundRect">
+            <a:avLst>
+              <a:gd name="adj" fmla="val 6000"/>
+            </a:avLst>
+          </a:prstGeom>
+          <a:solidFill>
+            <a:srgbClr val="F3CFB2"/>
+          </a:solidFill>
+          <a:ln>
+            <a:noFill/>
+          </a:ln>
+        </p:spPr>
+        <p:txBody>
+          <a:bodyPr wrap="square" anchor="ctr" lIns="45720" rIns="45720">
+            <a:noAutofit/>
+          </a:bodyPr>
+          <a:lstStyle/>
+          <a:p>
+            <a:pPr algn="ctr"/>
+            <a:r>
+              <a:rPr lang="es-ES" sz="1000" b="1" dirty="0">
+                <a:solidFill>
+                  <a:srgbClr val="2F2B28"/>
+                </a:solidFill>
+              </a:rPr>
+              <a:t/>
+            </a:r>
+          </a:p>
+        </p:txBody>
+      </p:sp>
+      <p:sp>
+        <p:nvSpPr>
+          <p:cNvPr id="251" name="Texto 251"/>
+          <p:cNvSpPr txBox="1"/>
+          <p:nvPr/>
+        </p:nvSpPr>
+        <p:spPr>
+          <a:xfrm>
+            <a:off x="8044800" y="2890000"/>
+            <a:ext cx="3497600" cy="2340000"/>
+          </a:xfrm>
+          <a:prstGeom prst="rect">
+            <a:avLst/>
+          </a:prstGeom>
+          <a:noFill/>
+        </p:spPr>
+        <p:txBody>
+          <a:bodyPr wrap="square" anchor="t" lIns="45720" rIns="45720">
+            <a:noAutofit/>
+          </a:bodyPr>
+          <a:lstStyle/>
+          <a:p>
+            <a:pPr algn="l"/>
+            <a:r>
+              <a:rPr lang="es-ES" sz="1300" dirty="0">
+                <a:solidFill>
+                  <a:srgbClr val="2F2B28"/>
+                </a:solidFill>
+              </a:rPr>
+              <a:t>"Based on SEVEN-G (Fernando García Varela, CC BY 4.0). Guidance content, "as is", without warranties; not legal advice. The author does not validate or endorse this work."</a:t>
+            </a:r>
+          </a:p>
+        </p:txBody>
+      </p:sp>
+      <p:sp>
+        <p:nvSpPr>
+          <p:cNvPr id="252" name="Texto 252"/>
+          <p:cNvSpPr txBox="1"/>
+          <p:nvPr/>
+        </p:nvSpPr>
+        <p:spPr>
+          <a:xfrm>
+            <a:off x="609600" y="6150000"/>
+            <a:ext cx="10972800" cy="500000"/>
+          </a:xfrm>
+          <a:prstGeom prst="rect">
+            <a:avLst/>
+          </a:prstGeom>
+          <a:noFill/>
+        </p:spPr>
+        <p:txBody>
+          <a:bodyPr wrap="square" anchor="t" lIns="45720" rIns="45720">
+            <a:noAutofit/>
+          </a:bodyPr>
+          <a:lstStyle/>
+          <a:p>
+            <a:pPr algn="l"/>
+            <a:r>
+              <a:rPr lang="es-ES" sz="1400" b="1" dirty="0">
+                <a:solidFill>
+                  <a:srgbClr val="0F5499"/>
+                </a:solidFill>
+              </a:rPr>
+              <a:t>Document 93, sections 6, 7, 8 and 11.9.</a:t>
             </a:r>
           </a:p>
         </p:txBody>
@@ -7143,7 +7241,235 @@
       </p:grpSpPr>
       <p:sp>
         <p:nvSpPr>
-          <p:cNvPr id="254" name="Texto 254"/>
+          <p:cNvPr id="258" name="Marca"/>
+          <p:cNvSpPr/>
+          <p:nvPr/>
+        </p:nvSpPr>
+        <p:spPr>
+          <a:xfrm>
+            <a:off x="609600" y="365760"/>
+            <a:ext cx="182880" cy="182880"/>
+          </a:xfrm>
+          <a:prstGeom prst="rect">
+            <a:avLst/>
+          </a:prstGeom>
+          <a:solidFill>
+            <a:srgbClr val="990F3D"/>
+          </a:solidFill>
+        </p:spPr>
+        <p:txBody>
+          <a:bodyPr/>
+          <a:lstStyle/>
+          <a:p/>
+        </p:txBody>
+      </p:sp>
+      <p:sp>
+        <p:nvSpPr>
+          <p:cNvPr id="259" name="Texto 259"/>
+          <p:cNvSpPr txBox="1"/>
+          <p:nvPr/>
+        </p:nvSpPr>
+        <p:spPr>
+          <a:xfrm>
+            <a:off x="838200" y="300000"/>
+            <a:ext cx="10500000" cy="320000"/>
+          </a:xfrm>
+          <a:prstGeom prst="rect">
+            <a:avLst/>
+          </a:prstGeom>
+          <a:noFill/>
+        </p:spPr>
+        <p:txBody>
+          <a:bodyPr wrap="square" anchor="ctr" lIns="45720" rIns="45720">
+            <a:noAutofit/>
+          </a:bodyPr>
+          <a:lstStyle/>
+          <a:p>
+            <a:pPr algn="l"/>
+            <a:r>
+              <a:rPr lang="es-ES" sz="1400" b="1" dirty="0">
+                <a:solidFill>
+                  <a:srgbClr val="1A1817"/>
+                </a:solidFill>
+              </a:rPr>
+              <a:t>SEVEN-G · COURSE · PARTNER · BUILDING IT INTO YOUR METHODOLOGY</a:t>
+            </a:r>
+          </a:p>
+        </p:txBody>
+      </p:sp>
+      <p:sp>
+        <p:nvSpPr>
+          <p:cNvPr id="260" name="Texto 260"/>
+          <p:cNvSpPr txBox="1"/>
+          <p:nvPr/>
+        </p:nvSpPr>
+        <p:spPr>
+          <a:xfrm>
+            <a:off x="609600" y="700000"/>
+            <a:ext cx="10972800" cy="650000"/>
+          </a:xfrm>
+          <a:prstGeom prst="rect">
+            <a:avLst/>
+          </a:prstGeom>
+          <a:noFill/>
+        </p:spPr>
+        <p:txBody>
+          <a:bodyPr wrap="square" anchor="t" lIns="45720" rIns="45720">
+            <a:noAutofit/>
+          </a:bodyPr>
+          <a:lstStyle/>
+          <a:p>
+            <a:pPr algn="l"/>
+            <a:r>
+              <a:rPr lang="es-ES" sz="2700" b="1" dirty="0">
+                <a:solidFill>
+                  <a:srgbClr val="990F3D"/>
+                </a:solidFill>
+              </a:rPr>
+              <a:t>Staying current and improving the framework</a:t>
+            </a:r>
+          </a:p>
+        </p:txBody>
+      </p:sp>
+      <p:sp>
+        <p:nvSpPr>
+          <p:cNvPr id="257" name="Texto 257"/>
+          <p:cNvSpPr txBox="1"/>
+          <p:nvPr/>
+        </p:nvSpPr>
+        <p:spPr>
+          <a:xfrm>
+            <a:off x="609600" y="1750000"/>
+            <a:ext cx="10972800" cy="4400000"/>
+          </a:xfrm>
+          <a:prstGeom prst="rect">
+            <a:avLst/>
+          </a:prstGeom>
+          <a:noFill/>
+        </p:spPr>
+        <p:txBody>
+          <a:bodyPr wrap="square" anchor="t" lIns="45720" rIns="45720">
+            <a:noAutofit/>
+          </a:bodyPr>
+          <a:lstStyle/>
+          <a:p>
+            <a:pPr marL="285750" indent="-285750">
+              <a:spcAft>
+                <a:spcPts val="400"/>
+              </a:spcAft>
+              <a:buClr>
+                <a:srgbClr val="990F3D"/>
+              </a:buClr>
+              <a:buFont typeface="Arial"/>
+              <a:buChar char="•"/>
+            </a:pPr>
+            <a:r>
+              <a:rPr lang="es-ES" sz="1800" dirty="0">
+                <a:solidFill>
+                  <a:srgbClr val="2F2B28"/>
+                </a:solidFill>
+              </a:rPr>
+              <a:t>The site publishes the framework version and each document's version history: review the changes before updating your adaptation.</a:t>
+            </a:r>
+          </a:p>
+          <a:p>
+            <a:pPr marL="285750" indent="-285750">
+              <a:spcAft>
+                <a:spcPts val="400"/>
+              </a:spcAft>
+              <a:buClr>
+                <a:srgbClr val="990F3D"/>
+              </a:buClr>
+              <a:buFont typeface="Arial"/>
+              <a:buChar char="•"/>
+            </a:pPr>
+            <a:r>
+              <a:rPr lang="es-ES" sz="1800" dirty="0">
+                <a:solidFill>
+                  <a:srgbClr val="2F2B28"/>
+                </a:solidFill>
+              </a:rPr>
+              <a:t>Issues and improvement requests: on the community page, with no account or email; the most-voted requests are taken on.</a:t>
+            </a:r>
+          </a:p>
+          <a:p>
+            <a:pPr marL="285750" indent="-285750">
+              <a:spcAft>
+                <a:spcPts val="400"/>
+              </a:spcAft>
+              <a:buClr>
+                <a:srgbClr val="990F3D"/>
+              </a:buClr>
+              <a:buFont typeface="Arial"/>
+              <a:buChar char="•"/>
+            </a:pPr>
+            <a:r>
+              <a:rPr lang="es-ES" sz="1800" dirty="0">
+                <a:solidFill>
+                  <a:srgbClr val="2F2B28"/>
+                </a:solidFill>
+              </a:rPr>
+              <a:t>A translation of yours is a derivative work: state that it is unofficial, which version it comes from and who made it.</a:t>
+            </a:r>
+          </a:p>
+          <a:p>
+            <a:pPr marL="285750" indent="-285750">
+              <a:spcAft>
+                <a:spcPts val="400"/>
+              </a:spcAft>
+              <a:buClr>
+                <a:srgbClr val="990F3D"/>
+              </a:buClr>
+              <a:buFont typeface="Arial"/>
+              <a:buChar char="•"/>
+            </a:pPr>
+            <a:r>
+              <a:rPr lang="es-ES" sz="1800" dirty="0">
+                <a:solidFill>
+                  <a:srgbClr val="2F2B28"/>
+                </a:solidFill>
+              </a:rPr>
+              <a:t>If you want something the licence does not give —custom work, training for your team, an agreement on trademark use— talk to the author. You start that conversation.</a:t>
+            </a:r>
+          </a:p>
+        </p:txBody>
+      </p:sp>
+    </p:spTree>
+  </p:cSld>
+  <p:clrMapOvr>
+    <a:overrideClrMapping bg1="lt1" tx1="dk1" bg2="lt2" tx2="dk2" accent1="accent1" accent2="accent2" accent3="accent3" accent4="accent4" accent5="accent5" accent6="accent6" hlink="hlink" folHlink="folHlink"/>
+  </p:clrMapOvr>
+</p:sld>
+</file>
+
+<file path=ppt/slides/slide27.xml><?xml version="1.0" encoding="utf-8"?>
+<p:sld xmlns:a="http://schemas.openxmlformats.org/drawingml/2006/main" xmlns:r="http://schemas.openxmlformats.org/officeDocument/2006/relationships" xmlns:p="http://schemas.openxmlformats.org/presentationml/2006/main">
+  <p:cSld>
+    <p:bg>
+      <p:bgPr>
+        <a:solidFill>
+          <a:srgbClr val="FBE2CD"/>
+        </a:solidFill>
+        <a:effectLst/>
+      </p:bgPr>
+    </p:bg>
+    <p:spTree>
+      <p:nvGrpSpPr>
+        <p:cNvPr id="1" name=""/>
+        <p:cNvGrpSpPr/>
+        <p:nvPr/>
+      </p:nvGrpSpPr>
+      <p:grpSpPr>
+        <a:xfrm>
+          <a:off x="0" y="0"/>
+          <a:ext cx="0" cy="0"/>
+          <a:chOff x="0" y="0"/>
+          <a:chExt cx="0" cy="0"/>
+        </a:xfrm>
+      </p:grpSpPr>
+      <p:sp>
+        <p:nvSpPr>
+          <p:cNvPr id="261" name="Texto 261"/>
           <p:cNvSpPr txBox="1"/>
           <p:nvPr/>
         </p:nvSpPr>
@@ -7177,7 +7503,7 @@
       </p:sp>
       <p:sp>
         <p:nvSpPr>
-          <p:cNvPr id="255" name="Texto 255"/>
+          <p:cNvPr id="262" name="Texto 262"/>
           <p:cNvSpPr txBox="1"/>
           <p:nvPr/>
         </p:nvSpPr>
@@ -7211,7 +7537,7 @@
       </p:sp>
       <p:sp>
         <p:nvSpPr>
-          <p:cNvPr id="256" name="Texto 256"/>
+          <p:cNvPr id="263" name="Texto 263"/>
           <p:cNvSpPr txBox="1"/>
           <p:nvPr/>
         </p:nvSpPr>
@@ -7245,7 +7571,7 @@
       </p:sp>
       <p:sp>
         <p:nvSpPr>
-          <p:cNvPr id="257" name="Texto 257"/>
+          <p:cNvPr id="264" name="Texto 264"/>
           <p:cNvSpPr txBox="1"/>
           <p:nvPr/>
         </p:nvSpPr>
@@ -7279,7 +7605,7 @@
       </p:sp>
       <p:sp>
         <p:nvSpPr>
-          <p:cNvPr id="258" name="Texto 258"/>
+          <p:cNvPr id="265" name="Texto 265"/>
           <p:cNvSpPr txBox="1"/>
           <p:nvPr/>
         </p:nvSpPr>
